--- a/clients/sara/Sara-Use-Cases.pptx
+++ b/clients/sara/Sara-Use-Cases.pptx
@@ -16,6 +16,9 @@
     <p:sldId id="264" r:id="rId15"/>
     <p:sldId id="265" r:id="rId16"/>
     <p:sldId id="266" r:id="rId17"/>
+    <p:sldId id="267" r:id="rId18"/>
+    <p:sldId id="268" r:id="rId19"/>
+    <p:sldId id="269" r:id="rId20"/>
   </p:sldIdLst>
   <p:sldSz cx="18288000" cy="10287000" type="screen4x3"/>
   <p:notesSz cx="6858000" cy="9144000"/>
@@ -3200,13 +3203,13 @@
           <a:p>
             <a:pPr algn="l"/>
             <a:r>
-              <a:rPr sz="1700" b="0" i="0">
+              <a:rPr sz="1600" b="0" i="0">
                 <a:solidFill>
                   <a:srgbClr val="4B5563"/>
                 </a:solidFill>
                 <a:latin typeface="Calibri"/>
               </a:rPr>
-              <a:t>Nove process flows sobre um único sistema operacional para a clínica. Cada fluxo corre num dos dois runtimes Claude: Code (sempre ligado, em tempo real, para o paciente) ou Cowork (cockpit da proprietária). Mesma base de dados, mesmas ferramentas, mesma voz da clínica.</a:t>
+              <a:t>Doze process flows sobre um único sistema operacional — do paciente à aquisição. Cada fluxo corre num dos dois runtimes Claude: Code (sempre ligado, tempo real) ou Cowork (cockpit da proprietária). Mesma base de dados, mesmas ferramentas, mesma voz da clínica.</a:t>
             </a:r>
           </a:p>
         </p:txBody>
@@ -3219,7 +3222,7 @@
         </p:nvCxnSpPr>
         <p:spPr>
           <a:xfrm>
-            <a:off x="12984480" y="1783080"/>
+            <a:off x="12984480" y="1645920"/>
             <a:ext cx="4389120" cy="0"/>
           </a:xfrm>
           <a:prstGeom prst="line">
@@ -3254,23 +3257,23 @@
         </p:nvSpPr>
         <p:spPr>
           <a:xfrm>
-            <a:off x="12984480" y="1874519"/>
-            <a:ext cx="640080" cy="365760"/>
-          </a:xfrm>
-          <a:prstGeom prst="rect">
-            <a:avLst/>
-          </a:prstGeom>
-          <a:noFill/>
-        </p:spPr>
-        <p:txBody>
-          <a:bodyPr wrap="square" lIns="0" rIns="0" tIns="0" bIns="0" anchor="t">
-            <a:spAutoFit/>
-          </a:bodyPr>
-          <a:lstStyle/>
-          <a:p>
-            <a:pPr algn="l"/>
-            <a:r>
-              <a:rPr sz="1900" b="0" i="0">
+            <a:off x="12984480" y="1737360"/>
+            <a:ext cx="640080" cy="320040"/>
+          </a:xfrm>
+          <a:prstGeom prst="rect">
+            <a:avLst/>
+          </a:prstGeom>
+          <a:noFill/>
+        </p:spPr>
+        <p:txBody>
+          <a:bodyPr wrap="square" lIns="0" rIns="0" tIns="0" bIns="0" anchor="t">
+            <a:spAutoFit/>
+          </a:bodyPr>
+          <a:lstStyle/>
+          <a:p>
+            <a:pPr algn="l"/>
+            <a:r>
+              <a:rPr sz="1500" b="0" i="0">
                 <a:solidFill>
                   <a:srgbClr val="6B7280"/>
                 </a:solidFill>
@@ -3289,23 +3292,23 @@
         </p:nvSpPr>
         <p:spPr>
           <a:xfrm>
-            <a:off x="13761719" y="1847088"/>
-            <a:ext cx="3474720" cy="457200"/>
-          </a:xfrm>
-          <a:prstGeom prst="rect">
-            <a:avLst/>
-          </a:prstGeom>
-          <a:noFill/>
-        </p:spPr>
-        <p:txBody>
-          <a:bodyPr wrap="square" lIns="0" rIns="0" tIns="0" bIns="0" anchor="t">
-            <a:spAutoFit/>
-          </a:bodyPr>
-          <a:lstStyle/>
-          <a:p>
-            <a:pPr algn="l"/>
-            <a:r>
-              <a:rPr sz="1600" b="0" i="0">
+            <a:off x="13716000" y="1719072"/>
+            <a:ext cx="3566160" cy="411480"/>
+          </a:xfrm>
+          <a:prstGeom prst="rect">
+            <a:avLst/>
+          </a:prstGeom>
+          <a:noFill/>
+        </p:spPr>
+        <p:txBody>
+          <a:bodyPr wrap="square" lIns="0" rIns="0" tIns="0" bIns="0" anchor="t">
+            <a:spAutoFit/>
+          </a:bodyPr>
+          <a:lstStyle/>
+          <a:p>
+            <a:pPr algn="l"/>
+            <a:r>
+              <a:rPr sz="1350" b="0" i="0">
                 <a:solidFill>
                   <a:srgbClr val="000000"/>
                 </a:solidFill>
@@ -3324,7 +3327,7 @@
         </p:nvCxnSpPr>
         <p:spPr>
           <a:xfrm>
-            <a:off x="12984480" y="2596896"/>
+            <a:off x="12984480" y="2276856"/>
             <a:ext cx="4389120" cy="0"/>
           </a:xfrm>
           <a:prstGeom prst="line">
@@ -3359,23 +3362,23 @@
         </p:nvSpPr>
         <p:spPr>
           <a:xfrm>
-            <a:off x="12984480" y="2679191"/>
-            <a:ext cx="640080" cy="365760"/>
-          </a:xfrm>
-          <a:prstGeom prst="rect">
-            <a:avLst/>
-          </a:prstGeom>
-          <a:noFill/>
-        </p:spPr>
-        <p:txBody>
-          <a:bodyPr wrap="square" lIns="0" rIns="0" tIns="0" bIns="0" anchor="t">
-            <a:spAutoFit/>
-          </a:bodyPr>
-          <a:lstStyle/>
-          <a:p>
-            <a:pPr algn="l"/>
-            <a:r>
-              <a:rPr sz="1900" b="0" i="0">
+            <a:off x="12984480" y="2359152"/>
+            <a:ext cx="640080" cy="320040"/>
+          </a:xfrm>
+          <a:prstGeom prst="rect">
+            <a:avLst/>
+          </a:prstGeom>
+          <a:noFill/>
+        </p:spPr>
+        <p:txBody>
+          <a:bodyPr wrap="square" lIns="0" rIns="0" tIns="0" bIns="0" anchor="t">
+            <a:spAutoFit/>
+          </a:bodyPr>
+          <a:lstStyle/>
+          <a:p>
+            <a:pPr algn="l"/>
+            <a:r>
+              <a:rPr sz="1500" b="0" i="0">
                 <a:solidFill>
                   <a:srgbClr val="6B7280"/>
                 </a:solidFill>
@@ -3394,23 +3397,23 @@
         </p:nvSpPr>
         <p:spPr>
           <a:xfrm>
-            <a:off x="13761719" y="2651760"/>
-            <a:ext cx="3474720" cy="457200"/>
-          </a:xfrm>
-          <a:prstGeom prst="rect">
-            <a:avLst/>
-          </a:prstGeom>
-          <a:noFill/>
-        </p:spPr>
-        <p:txBody>
-          <a:bodyPr wrap="square" lIns="0" rIns="0" tIns="0" bIns="0" anchor="t">
-            <a:spAutoFit/>
-          </a:bodyPr>
-          <a:lstStyle/>
-          <a:p>
-            <a:pPr algn="l"/>
-            <a:r>
-              <a:rPr sz="1600" b="0" i="0">
+            <a:off x="13716000" y="2340864"/>
+            <a:ext cx="3566160" cy="411480"/>
+          </a:xfrm>
+          <a:prstGeom prst="rect">
+            <a:avLst/>
+          </a:prstGeom>
+          <a:noFill/>
+        </p:spPr>
+        <p:txBody>
+          <a:bodyPr wrap="square" lIns="0" rIns="0" tIns="0" bIns="0" anchor="t">
+            <a:spAutoFit/>
+          </a:bodyPr>
+          <a:lstStyle/>
+          <a:p>
+            <a:pPr algn="l"/>
+            <a:r>
+              <a:rPr sz="1350" b="0" i="0">
                 <a:solidFill>
                   <a:srgbClr val="000000"/>
                 </a:solidFill>
@@ -3429,7 +3432,7 @@
         </p:nvCxnSpPr>
         <p:spPr>
           <a:xfrm>
-            <a:off x="12984480" y="3401568"/>
+            <a:off x="12984480" y="2898648"/>
             <a:ext cx="4389120" cy="0"/>
           </a:xfrm>
           <a:prstGeom prst="line">
@@ -3464,23 +3467,23 @@
         </p:nvSpPr>
         <p:spPr>
           <a:xfrm>
-            <a:off x="12984480" y="3483863"/>
-            <a:ext cx="640080" cy="365760"/>
-          </a:xfrm>
-          <a:prstGeom prst="rect">
-            <a:avLst/>
-          </a:prstGeom>
-          <a:noFill/>
-        </p:spPr>
-        <p:txBody>
-          <a:bodyPr wrap="square" lIns="0" rIns="0" tIns="0" bIns="0" anchor="t">
-            <a:spAutoFit/>
-          </a:bodyPr>
-          <a:lstStyle/>
-          <a:p>
-            <a:pPr algn="l"/>
-            <a:r>
-              <a:rPr sz="1900" b="0" i="0">
+            <a:off x="12984480" y="2980944"/>
+            <a:ext cx="640080" cy="320040"/>
+          </a:xfrm>
+          <a:prstGeom prst="rect">
+            <a:avLst/>
+          </a:prstGeom>
+          <a:noFill/>
+        </p:spPr>
+        <p:txBody>
+          <a:bodyPr wrap="square" lIns="0" rIns="0" tIns="0" bIns="0" anchor="t">
+            <a:spAutoFit/>
+          </a:bodyPr>
+          <a:lstStyle/>
+          <a:p>
+            <a:pPr algn="l"/>
+            <a:r>
+              <a:rPr sz="1500" b="0" i="0">
                 <a:solidFill>
                   <a:srgbClr val="6B7280"/>
                 </a:solidFill>
@@ -3499,23 +3502,23 @@
         </p:nvSpPr>
         <p:spPr>
           <a:xfrm>
-            <a:off x="13761719" y="3456432"/>
-            <a:ext cx="3474720" cy="457200"/>
-          </a:xfrm>
-          <a:prstGeom prst="rect">
-            <a:avLst/>
-          </a:prstGeom>
-          <a:noFill/>
-        </p:spPr>
-        <p:txBody>
-          <a:bodyPr wrap="square" lIns="0" rIns="0" tIns="0" bIns="0" anchor="t">
-            <a:spAutoFit/>
-          </a:bodyPr>
-          <a:lstStyle/>
-          <a:p>
-            <a:pPr algn="l"/>
-            <a:r>
-              <a:rPr sz="1600" b="0" i="0">
+            <a:off x="13716000" y="2962656"/>
+            <a:ext cx="3566160" cy="411480"/>
+          </a:xfrm>
+          <a:prstGeom prst="rect">
+            <a:avLst/>
+          </a:prstGeom>
+          <a:noFill/>
+        </p:spPr>
+        <p:txBody>
+          <a:bodyPr wrap="square" lIns="0" rIns="0" tIns="0" bIns="0" anchor="t">
+            <a:spAutoFit/>
+          </a:bodyPr>
+          <a:lstStyle/>
+          <a:p>
+            <a:pPr algn="l"/>
+            <a:r>
+              <a:rPr sz="1350" b="0" i="0">
                 <a:solidFill>
                   <a:srgbClr val="000000"/>
                 </a:solidFill>
@@ -3534,7 +3537,7 @@
         </p:nvCxnSpPr>
         <p:spPr>
           <a:xfrm>
-            <a:off x="12984480" y="4206240"/>
+            <a:off x="12984480" y="3520440"/>
             <a:ext cx="4389120" cy="0"/>
           </a:xfrm>
           <a:prstGeom prst="line">
@@ -3569,23 +3572,23 @@
         </p:nvSpPr>
         <p:spPr>
           <a:xfrm>
-            <a:off x="12984480" y="4288536"/>
-            <a:ext cx="640080" cy="365760"/>
-          </a:xfrm>
-          <a:prstGeom prst="rect">
-            <a:avLst/>
-          </a:prstGeom>
-          <a:noFill/>
-        </p:spPr>
-        <p:txBody>
-          <a:bodyPr wrap="square" lIns="0" rIns="0" tIns="0" bIns="0" anchor="t">
-            <a:spAutoFit/>
-          </a:bodyPr>
-          <a:lstStyle/>
-          <a:p>
-            <a:pPr algn="l"/>
-            <a:r>
-              <a:rPr sz="1900" b="0" i="0">
+            <a:off x="12984480" y="3602736"/>
+            <a:ext cx="640080" cy="320040"/>
+          </a:xfrm>
+          <a:prstGeom prst="rect">
+            <a:avLst/>
+          </a:prstGeom>
+          <a:noFill/>
+        </p:spPr>
+        <p:txBody>
+          <a:bodyPr wrap="square" lIns="0" rIns="0" tIns="0" bIns="0" anchor="t">
+            <a:spAutoFit/>
+          </a:bodyPr>
+          <a:lstStyle/>
+          <a:p>
+            <a:pPr algn="l"/>
+            <a:r>
+              <a:rPr sz="1500" b="0" i="0">
                 <a:solidFill>
                   <a:srgbClr val="6B7280"/>
                 </a:solidFill>
@@ -3604,23 +3607,23 @@
         </p:nvSpPr>
         <p:spPr>
           <a:xfrm>
-            <a:off x="13761719" y="4261104"/>
-            <a:ext cx="3474720" cy="457200"/>
-          </a:xfrm>
-          <a:prstGeom prst="rect">
-            <a:avLst/>
-          </a:prstGeom>
-          <a:noFill/>
-        </p:spPr>
-        <p:txBody>
-          <a:bodyPr wrap="square" lIns="0" rIns="0" tIns="0" bIns="0" anchor="t">
-            <a:spAutoFit/>
-          </a:bodyPr>
-          <a:lstStyle/>
-          <a:p>
-            <a:pPr algn="l"/>
-            <a:r>
-              <a:rPr sz="1600" b="0" i="0">
+            <a:off x="13716000" y="3584448"/>
+            <a:ext cx="3566160" cy="411480"/>
+          </a:xfrm>
+          <a:prstGeom prst="rect">
+            <a:avLst/>
+          </a:prstGeom>
+          <a:noFill/>
+        </p:spPr>
+        <p:txBody>
+          <a:bodyPr wrap="square" lIns="0" rIns="0" tIns="0" bIns="0" anchor="t">
+            <a:spAutoFit/>
+          </a:bodyPr>
+          <a:lstStyle/>
+          <a:p>
+            <a:pPr algn="l"/>
+            <a:r>
+              <a:rPr sz="1350" b="0" i="0">
                 <a:solidFill>
                   <a:srgbClr val="000000"/>
                 </a:solidFill>
@@ -3639,7 +3642,7 @@
         </p:nvCxnSpPr>
         <p:spPr>
           <a:xfrm>
-            <a:off x="12984480" y="5010912"/>
+            <a:off x="12984480" y="4142232"/>
             <a:ext cx="4389120" cy="0"/>
           </a:xfrm>
           <a:prstGeom prst="line">
@@ -3674,23 +3677,23 @@
         </p:nvSpPr>
         <p:spPr>
           <a:xfrm>
-            <a:off x="12984480" y="5093207"/>
-            <a:ext cx="640080" cy="365760"/>
-          </a:xfrm>
-          <a:prstGeom prst="rect">
-            <a:avLst/>
-          </a:prstGeom>
-          <a:noFill/>
-        </p:spPr>
-        <p:txBody>
-          <a:bodyPr wrap="square" lIns="0" rIns="0" tIns="0" bIns="0" anchor="t">
-            <a:spAutoFit/>
-          </a:bodyPr>
-          <a:lstStyle/>
-          <a:p>
-            <a:pPr algn="l"/>
-            <a:r>
-              <a:rPr sz="1900" b="0" i="0">
+            <a:off x="12984480" y="4224528"/>
+            <a:ext cx="640080" cy="320040"/>
+          </a:xfrm>
+          <a:prstGeom prst="rect">
+            <a:avLst/>
+          </a:prstGeom>
+          <a:noFill/>
+        </p:spPr>
+        <p:txBody>
+          <a:bodyPr wrap="square" lIns="0" rIns="0" tIns="0" bIns="0" anchor="t">
+            <a:spAutoFit/>
+          </a:bodyPr>
+          <a:lstStyle/>
+          <a:p>
+            <a:pPr algn="l"/>
+            <a:r>
+              <a:rPr sz="1500" b="0" i="0">
                 <a:solidFill>
                   <a:srgbClr val="6B7280"/>
                 </a:solidFill>
@@ -3709,23 +3712,23 @@
         </p:nvSpPr>
         <p:spPr>
           <a:xfrm>
-            <a:off x="13761719" y="5065775"/>
-            <a:ext cx="3474720" cy="457200"/>
-          </a:xfrm>
-          <a:prstGeom prst="rect">
-            <a:avLst/>
-          </a:prstGeom>
-          <a:noFill/>
-        </p:spPr>
-        <p:txBody>
-          <a:bodyPr wrap="square" lIns="0" rIns="0" tIns="0" bIns="0" anchor="t">
-            <a:spAutoFit/>
-          </a:bodyPr>
-          <a:lstStyle/>
-          <a:p>
-            <a:pPr algn="l"/>
-            <a:r>
-              <a:rPr sz="1600" b="0" i="0">
+            <a:off x="13716000" y="4206240"/>
+            <a:ext cx="3566160" cy="411480"/>
+          </a:xfrm>
+          <a:prstGeom prst="rect">
+            <a:avLst/>
+          </a:prstGeom>
+          <a:noFill/>
+        </p:spPr>
+        <p:txBody>
+          <a:bodyPr wrap="square" lIns="0" rIns="0" tIns="0" bIns="0" anchor="t">
+            <a:spAutoFit/>
+          </a:bodyPr>
+          <a:lstStyle/>
+          <a:p>
+            <a:pPr algn="l"/>
+            <a:r>
+              <a:rPr sz="1350" b="0" i="0">
                 <a:solidFill>
                   <a:srgbClr val="000000"/>
                 </a:solidFill>
@@ -3744,7 +3747,7 @@
         </p:nvCxnSpPr>
         <p:spPr>
           <a:xfrm>
-            <a:off x="12984480" y="5815583"/>
+            <a:off x="12984480" y="4764024"/>
             <a:ext cx="4389120" cy="0"/>
           </a:xfrm>
           <a:prstGeom prst="line">
@@ -3779,23 +3782,23 @@
         </p:nvSpPr>
         <p:spPr>
           <a:xfrm>
-            <a:off x="12984480" y="5897880"/>
-            <a:ext cx="640080" cy="365760"/>
-          </a:xfrm>
-          <a:prstGeom prst="rect">
-            <a:avLst/>
-          </a:prstGeom>
-          <a:noFill/>
-        </p:spPr>
-        <p:txBody>
-          <a:bodyPr wrap="square" lIns="0" rIns="0" tIns="0" bIns="0" anchor="t">
-            <a:spAutoFit/>
-          </a:bodyPr>
-          <a:lstStyle/>
-          <a:p>
-            <a:pPr algn="l"/>
-            <a:r>
-              <a:rPr sz="1900" b="0" i="0">
+            <a:off x="12984480" y="4846320"/>
+            <a:ext cx="640080" cy="320040"/>
+          </a:xfrm>
+          <a:prstGeom prst="rect">
+            <a:avLst/>
+          </a:prstGeom>
+          <a:noFill/>
+        </p:spPr>
+        <p:txBody>
+          <a:bodyPr wrap="square" lIns="0" rIns="0" tIns="0" bIns="0" anchor="t">
+            <a:spAutoFit/>
+          </a:bodyPr>
+          <a:lstStyle/>
+          <a:p>
+            <a:pPr algn="l"/>
+            <a:r>
+              <a:rPr sz="1500" b="0" i="0">
                 <a:solidFill>
                   <a:srgbClr val="6B7280"/>
                 </a:solidFill>
@@ -3814,23 +3817,23 @@
         </p:nvSpPr>
         <p:spPr>
           <a:xfrm>
-            <a:off x="13761719" y="5870448"/>
-            <a:ext cx="3474720" cy="457200"/>
-          </a:xfrm>
-          <a:prstGeom prst="rect">
-            <a:avLst/>
-          </a:prstGeom>
-          <a:noFill/>
-        </p:spPr>
-        <p:txBody>
-          <a:bodyPr wrap="square" lIns="0" rIns="0" tIns="0" bIns="0" anchor="t">
-            <a:spAutoFit/>
-          </a:bodyPr>
-          <a:lstStyle/>
-          <a:p>
-            <a:pPr algn="l"/>
-            <a:r>
-              <a:rPr sz="1600" b="0" i="0">
+            <a:off x="13716000" y="4828032"/>
+            <a:ext cx="3566160" cy="411480"/>
+          </a:xfrm>
+          <a:prstGeom prst="rect">
+            <a:avLst/>
+          </a:prstGeom>
+          <a:noFill/>
+        </p:spPr>
+        <p:txBody>
+          <a:bodyPr wrap="square" lIns="0" rIns="0" tIns="0" bIns="0" anchor="t">
+            <a:spAutoFit/>
+          </a:bodyPr>
+          <a:lstStyle/>
+          <a:p>
+            <a:pPr algn="l"/>
+            <a:r>
+              <a:rPr sz="1350" b="0" i="0">
                 <a:solidFill>
                   <a:srgbClr val="000000"/>
                 </a:solidFill>
@@ -3849,7 +3852,7 @@
         </p:nvCxnSpPr>
         <p:spPr>
           <a:xfrm>
-            <a:off x="12984480" y="6620256"/>
+            <a:off x="12984480" y="5385816"/>
             <a:ext cx="4389120" cy="0"/>
           </a:xfrm>
           <a:prstGeom prst="line">
@@ -3884,23 +3887,23 @@
         </p:nvSpPr>
         <p:spPr>
           <a:xfrm>
-            <a:off x="12984480" y="6702552"/>
-            <a:ext cx="640080" cy="365760"/>
-          </a:xfrm>
-          <a:prstGeom prst="rect">
-            <a:avLst/>
-          </a:prstGeom>
-          <a:noFill/>
-        </p:spPr>
-        <p:txBody>
-          <a:bodyPr wrap="square" lIns="0" rIns="0" tIns="0" bIns="0" anchor="t">
-            <a:spAutoFit/>
-          </a:bodyPr>
-          <a:lstStyle/>
-          <a:p>
-            <a:pPr algn="l"/>
-            <a:r>
-              <a:rPr sz="1900" b="0" i="0">
+            <a:off x="12984480" y="5468112"/>
+            <a:ext cx="640080" cy="320040"/>
+          </a:xfrm>
+          <a:prstGeom prst="rect">
+            <a:avLst/>
+          </a:prstGeom>
+          <a:noFill/>
+        </p:spPr>
+        <p:txBody>
+          <a:bodyPr wrap="square" lIns="0" rIns="0" tIns="0" bIns="0" anchor="t">
+            <a:spAutoFit/>
+          </a:bodyPr>
+          <a:lstStyle/>
+          <a:p>
+            <a:pPr algn="l"/>
+            <a:r>
+              <a:rPr sz="1500" b="0" i="0">
                 <a:solidFill>
                   <a:srgbClr val="6B7280"/>
                 </a:solidFill>
@@ -3919,23 +3922,23 @@
         </p:nvSpPr>
         <p:spPr>
           <a:xfrm>
-            <a:off x="13761719" y="6675120"/>
-            <a:ext cx="3474720" cy="457200"/>
-          </a:xfrm>
-          <a:prstGeom prst="rect">
-            <a:avLst/>
-          </a:prstGeom>
-          <a:noFill/>
-        </p:spPr>
-        <p:txBody>
-          <a:bodyPr wrap="square" lIns="0" rIns="0" tIns="0" bIns="0" anchor="t">
-            <a:spAutoFit/>
-          </a:bodyPr>
-          <a:lstStyle/>
-          <a:p>
-            <a:pPr algn="l"/>
-            <a:r>
-              <a:rPr sz="1600" b="0" i="0">
+            <a:off x="13716000" y="5449824"/>
+            <a:ext cx="3566160" cy="411480"/>
+          </a:xfrm>
+          <a:prstGeom prst="rect">
+            <a:avLst/>
+          </a:prstGeom>
+          <a:noFill/>
+        </p:spPr>
+        <p:txBody>
+          <a:bodyPr wrap="square" lIns="0" rIns="0" tIns="0" bIns="0" anchor="t">
+            <a:spAutoFit/>
+          </a:bodyPr>
+          <a:lstStyle/>
+          <a:p>
+            <a:pPr algn="l"/>
+            <a:r>
+              <a:rPr sz="1350" b="0" i="0">
                 <a:solidFill>
                   <a:srgbClr val="000000"/>
                 </a:solidFill>
@@ -3954,7 +3957,7 @@
         </p:nvCxnSpPr>
         <p:spPr>
           <a:xfrm>
-            <a:off x="12984480" y="7424928"/>
+            <a:off x="12984480" y="6007607"/>
             <a:ext cx="4389120" cy="0"/>
           </a:xfrm>
           <a:prstGeom prst="line">
@@ -3989,23 +3992,23 @@
         </p:nvSpPr>
         <p:spPr>
           <a:xfrm>
-            <a:off x="12984480" y="7507224"/>
-            <a:ext cx="640080" cy="365760"/>
-          </a:xfrm>
-          <a:prstGeom prst="rect">
-            <a:avLst/>
-          </a:prstGeom>
-          <a:noFill/>
-        </p:spPr>
-        <p:txBody>
-          <a:bodyPr wrap="square" lIns="0" rIns="0" tIns="0" bIns="0" anchor="t">
-            <a:spAutoFit/>
-          </a:bodyPr>
-          <a:lstStyle/>
-          <a:p>
-            <a:pPr algn="l"/>
-            <a:r>
-              <a:rPr sz="1900" b="0" i="0">
+            <a:off x="12984480" y="6089904"/>
+            <a:ext cx="640080" cy="320040"/>
+          </a:xfrm>
+          <a:prstGeom prst="rect">
+            <a:avLst/>
+          </a:prstGeom>
+          <a:noFill/>
+        </p:spPr>
+        <p:txBody>
+          <a:bodyPr wrap="square" lIns="0" rIns="0" tIns="0" bIns="0" anchor="t">
+            <a:spAutoFit/>
+          </a:bodyPr>
+          <a:lstStyle/>
+          <a:p>
+            <a:pPr algn="l"/>
+            <a:r>
+              <a:rPr sz="1500" b="0" i="0">
                 <a:solidFill>
                   <a:srgbClr val="6B7280"/>
                 </a:solidFill>
@@ -4024,23 +4027,23 @@
         </p:nvSpPr>
         <p:spPr>
           <a:xfrm>
-            <a:off x="13761719" y="7479792"/>
-            <a:ext cx="3474720" cy="457200"/>
-          </a:xfrm>
-          <a:prstGeom prst="rect">
-            <a:avLst/>
-          </a:prstGeom>
-          <a:noFill/>
-        </p:spPr>
-        <p:txBody>
-          <a:bodyPr wrap="square" lIns="0" rIns="0" tIns="0" bIns="0" anchor="t">
-            <a:spAutoFit/>
-          </a:bodyPr>
-          <a:lstStyle/>
-          <a:p>
-            <a:pPr algn="l"/>
-            <a:r>
-              <a:rPr sz="1600" b="0" i="0">
+            <a:off x="13716000" y="6071616"/>
+            <a:ext cx="3566160" cy="411480"/>
+          </a:xfrm>
+          <a:prstGeom prst="rect">
+            <a:avLst/>
+          </a:prstGeom>
+          <a:noFill/>
+        </p:spPr>
+        <p:txBody>
+          <a:bodyPr wrap="square" lIns="0" rIns="0" tIns="0" bIns="0" anchor="t">
+            <a:spAutoFit/>
+          </a:bodyPr>
+          <a:lstStyle/>
+          <a:p>
+            <a:pPr algn="l"/>
+            <a:r>
+              <a:rPr sz="1350" b="0" i="0">
                 <a:solidFill>
                   <a:srgbClr val="000000"/>
                 </a:solidFill>
@@ -4059,7 +4062,7 @@
         </p:nvCxnSpPr>
         <p:spPr>
           <a:xfrm>
-            <a:off x="12984480" y="8229600"/>
+            <a:off x="12984480" y="6629400"/>
             <a:ext cx="4389120" cy="0"/>
           </a:xfrm>
           <a:prstGeom prst="line">
@@ -4094,23 +4097,23 @@
         </p:nvSpPr>
         <p:spPr>
           <a:xfrm>
-            <a:off x="12984480" y="8311896"/>
-            <a:ext cx="640080" cy="365760"/>
-          </a:xfrm>
-          <a:prstGeom prst="rect">
-            <a:avLst/>
-          </a:prstGeom>
-          <a:noFill/>
-        </p:spPr>
-        <p:txBody>
-          <a:bodyPr wrap="square" lIns="0" rIns="0" tIns="0" bIns="0" anchor="t">
-            <a:spAutoFit/>
-          </a:bodyPr>
-          <a:lstStyle/>
-          <a:p>
-            <a:pPr algn="l"/>
-            <a:r>
-              <a:rPr sz="1900" b="0" i="0">
+            <a:off x="12984480" y="6711696"/>
+            <a:ext cx="640080" cy="320040"/>
+          </a:xfrm>
+          <a:prstGeom prst="rect">
+            <a:avLst/>
+          </a:prstGeom>
+          <a:noFill/>
+        </p:spPr>
+        <p:txBody>
+          <a:bodyPr wrap="square" lIns="0" rIns="0" tIns="0" bIns="0" anchor="t">
+            <a:spAutoFit/>
+          </a:bodyPr>
+          <a:lstStyle/>
+          <a:p>
+            <a:pPr algn="l"/>
+            <a:r>
+              <a:rPr sz="1500" b="0" i="0">
                 <a:solidFill>
                   <a:srgbClr val="6B7280"/>
                 </a:solidFill>
@@ -4129,23 +4132,23 @@
         </p:nvSpPr>
         <p:spPr>
           <a:xfrm>
-            <a:off x="13761719" y="8284463"/>
-            <a:ext cx="3474720" cy="457200"/>
-          </a:xfrm>
-          <a:prstGeom prst="rect">
-            <a:avLst/>
-          </a:prstGeom>
-          <a:noFill/>
-        </p:spPr>
-        <p:txBody>
-          <a:bodyPr wrap="square" lIns="0" rIns="0" tIns="0" bIns="0" anchor="t">
-            <a:spAutoFit/>
-          </a:bodyPr>
-          <a:lstStyle/>
-          <a:p>
-            <a:pPr algn="l"/>
-            <a:r>
-              <a:rPr sz="1600" b="0" i="0">
+            <a:off x="13716000" y="6693408"/>
+            <a:ext cx="3566160" cy="411480"/>
+          </a:xfrm>
+          <a:prstGeom prst="rect">
+            <a:avLst/>
+          </a:prstGeom>
+          <a:noFill/>
+        </p:spPr>
+        <p:txBody>
+          <a:bodyPr wrap="square" lIns="0" rIns="0" tIns="0" bIns="0" anchor="t">
+            <a:spAutoFit/>
+          </a:bodyPr>
+          <a:lstStyle/>
+          <a:p>
+            <a:pPr algn="l"/>
+            <a:r>
+              <a:rPr sz="1350" b="0" i="0">
                 <a:solidFill>
                   <a:srgbClr val="000000"/>
                 </a:solidFill>
@@ -4164,7 +4167,7 @@
         </p:nvCxnSpPr>
         <p:spPr>
           <a:xfrm>
-            <a:off x="12984480" y="9034272"/>
+            <a:off x="12984480" y="7251192"/>
             <a:ext cx="4389120" cy="0"/>
           </a:xfrm>
           <a:prstGeom prst="line">
@@ -4199,43 +4202,78 @@
         </p:nvSpPr>
         <p:spPr>
           <a:xfrm>
-            <a:off x="914400" y="9235440"/>
-            <a:ext cx="5486400" cy="228600"/>
-          </a:xfrm>
-          <a:prstGeom prst="rect">
-            <a:avLst/>
-          </a:prstGeom>
-          <a:noFill/>
-        </p:spPr>
-        <p:txBody>
-          <a:bodyPr wrap="square" lIns="0" rIns="0" tIns="0" bIns="0" anchor="t">
-            <a:spAutoFit/>
-          </a:bodyPr>
-          <a:lstStyle/>
-          <a:p>
-            <a:pPr algn="l"/>
-            <a:r>
-              <a:rPr sz="900" b="0" i="0" spc="80">
+            <a:off x="12984480" y="7333488"/>
+            <a:ext cx="640080" cy="320040"/>
+          </a:xfrm>
+          <a:prstGeom prst="rect">
+            <a:avLst/>
+          </a:prstGeom>
+          <a:noFill/>
+        </p:spPr>
+        <p:txBody>
+          <a:bodyPr wrap="square" lIns="0" rIns="0" tIns="0" bIns="0" anchor="t">
+            <a:spAutoFit/>
+          </a:bodyPr>
+          <a:lstStyle/>
+          <a:p>
+            <a:pPr algn="l"/>
+            <a:r>
+              <a:rPr sz="1500" b="0" i="0">
                 <a:solidFill>
                   <a:srgbClr val="6B7280"/>
                 </a:solidFill>
                 <a:latin typeface="Calibri"/>
               </a:rPr>
-              <a:t>CLÍNICA DE ESTÉTICA · PORTUGAL</a:t>
+              <a:t>10</a:t>
+            </a:r>
+          </a:p>
+        </p:txBody>
+      </p:sp>
+      <p:sp>
+        <p:nvSpPr>
+          <p:cNvPr id="34" name="TextBox 33"/>
+          <p:cNvSpPr txBox="1"/>
+          <p:nvPr/>
+        </p:nvSpPr>
+        <p:spPr>
+          <a:xfrm>
+            <a:off x="13716000" y="7315200"/>
+            <a:ext cx="3566160" cy="411480"/>
+          </a:xfrm>
+          <a:prstGeom prst="rect">
+            <a:avLst/>
+          </a:prstGeom>
+          <a:noFill/>
+        </p:spPr>
+        <p:txBody>
+          <a:bodyPr wrap="square" lIns="0" rIns="0" tIns="0" bIns="0" anchor="t">
+            <a:spAutoFit/>
+          </a:bodyPr>
+          <a:lstStyle/>
+          <a:p>
+            <a:pPr algn="l"/>
+            <a:r>
+              <a:rPr sz="1350" b="0" i="0">
+                <a:solidFill>
+                  <a:srgbClr val="000000"/>
+                </a:solidFill>
+                <a:latin typeface="Georgia"/>
+              </a:rPr>
+              <a:t>Conteúdo &amp; redes sociais</a:t>
             </a:r>
           </a:p>
         </p:txBody>
       </p:sp>
       <p:cxnSp>
         <p:nvCxnSpPr>
-          <p:cNvPr id="34" name="Connector 33"/>
+          <p:cNvPr id="35" name="Connector 34"/>
           <p:cNvCxnSpPr/>
           <p:nvPr/>
         </p:nvCxnSpPr>
         <p:spPr>
           <a:xfrm>
-            <a:off x="6858000" y="9308592"/>
-            <a:ext cx="1143000" cy="0"/>
+            <a:off x="12984480" y="7872984"/>
+            <a:ext cx="4389120" cy="0"/>
           </a:xfrm>
           <a:prstGeom prst="line">
             <a:avLst/>
@@ -4263,14 +4301,294 @@
       </p:cxnSp>
       <p:sp>
         <p:nvSpPr>
-          <p:cNvPr id="35" name="TextBox 34"/>
+          <p:cNvPr id="36" name="TextBox 35"/>
+          <p:cNvSpPr txBox="1"/>
+          <p:nvPr/>
+        </p:nvSpPr>
+        <p:spPr>
+          <a:xfrm>
+            <a:off x="12984480" y="7955280"/>
+            <a:ext cx="640080" cy="320040"/>
+          </a:xfrm>
+          <a:prstGeom prst="rect">
+            <a:avLst/>
+          </a:prstGeom>
+          <a:noFill/>
+        </p:spPr>
+        <p:txBody>
+          <a:bodyPr wrap="square" lIns="0" rIns="0" tIns="0" bIns="0" anchor="t">
+            <a:spAutoFit/>
+          </a:bodyPr>
+          <a:lstStyle/>
+          <a:p>
+            <a:pPr algn="l"/>
+            <a:r>
+              <a:rPr sz="1500" b="0" i="0">
+                <a:solidFill>
+                  <a:srgbClr val="6B7280"/>
+                </a:solidFill>
+                <a:latin typeface="Calibri"/>
+              </a:rPr>
+              <a:t>11</a:t>
+            </a:r>
+          </a:p>
+        </p:txBody>
+      </p:sp>
+      <p:sp>
+        <p:nvSpPr>
+          <p:cNvPr id="37" name="TextBox 36"/>
+          <p:cNvSpPr txBox="1"/>
+          <p:nvPr/>
+        </p:nvSpPr>
+        <p:spPr>
+          <a:xfrm>
+            <a:off x="13716000" y="7936992"/>
+            <a:ext cx="3566160" cy="411480"/>
+          </a:xfrm>
+          <a:prstGeom prst="rect">
+            <a:avLst/>
+          </a:prstGeom>
+          <a:noFill/>
+        </p:spPr>
+        <p:txBody>
+          <a:bodyPr wrap="square" lIns="0" rIns="0" tIns="0" bIns="0" anchor="t">
+            <a:spAutoFit/>
+          </a:bodyPr>
+          <a:lstStyle/>
+          <a:p>
+            <a:pPr algn="l"/>
+            <a:r>
+              <a:rPr sz="1350" b="0" i="0">
+                <a:solidFill>
+                  <a:srgbClr val="000000"/>
+                </a:solidFill>
+                <a:latin typeface="Georgia"/>
+              </a:rPr>
+              <a:t>Anúncios Google + Meta</a:t>
+            </a:r>
+          </a:p>
+        </p:txBody>
+      </p:sp>
+      <p:cxnSp>
+        <p:nvCxnSpPr>
+          <p:cNvPr id="38" name="Connector 37"/>
+          <p:cNvCxnSpPr/>
+          <p:nvPr/>
+        </p:nvCxnSpPr>
+        <p:spPr>
+          <a:xfrm>
+            <a:off x="12984480" y="8494776"/>
+            <a:ext cx="4389120" cy="0"/>
+          </a:xfrm>
+          <a:prstGeom prst="line">
+            <a:avLst/>
+          </a:prstGeom>
+          <a:ln w="9525">
+            <a:solidFill>
+              <a:srgbClr val="E5E7EB"/>
+            </a:solidFill>
+          </a:ln>
+        </p:spPr>
+        <p:style>
+          <a:lnRef idx="2">
+            <a:schemeClr val="accent1"/>
+          </a:lnRef>
+          <a:fillRef idx="0">
+            <a:schemeClr val="accent1"/>
+          </a:fillRef>
+          <a:effectRef idx="1">
+            <a:schemeClr val="accent1"/>
+          </a:effectRef>
+          <a:fontRef idx="minor">
+            <a:schemeClr val="tx1"/>
+          </a:fontRef>
+        </p:style>
+      </p:cxnSp>
+      <p:sp>
+        <p:nvSpPr>
+          <p:cNvPr id="39" name="TextBox 38"/>
+          <p:cNvSpPr txBox="1"/>
+          <p:nvPr/>
+        </p:nvSpPr>
+        <p:spPr>
+          <a:xfrm>
+            <a:off x="12984480" y="8577072"/>
+            <a:ext cx="640080" cy="320040"/>
+          </a:xfrm>
+          <a:prstGeom prst="rect">
+            <a:avLst/>
+          </a:prstGeom>
+          <a:noFill/>
+        </p:spPr>
+        <p:txBody>
+          <a:bodyPr wrap="square" lIns="0" rIns="0" tIns="0" bIns="0" anchor="t">
+            <a:spAutoFit/>
+          </a:bodyPr>
+          <a:lstStyle/>
+          <a:p>
+            <a:pPr algn="l"/>
+            <a:r>
+              <a:rPr sz="1500" b="0" i="0">
+                <a:solidFill>
+                  <a:srgbClr val="6B7280"/>
+                </a:solidFill>
+                <a:latin typeface="Calibri"/>
+              </a:rPr>
+              <a:t>12</a:t>
+            </a:r>
+          </a:p>
+        </p:txBody>
+      </p:sp>
+      <p:sp>
+        <p:nvSpPr>
+          <p:cNvPr id="40" name="TextBox 39"/>
+          <p:cNvSpPr txBox="1"/>
+          <p:nvPr/>
+        </p:nvSpPr>
+        <p:spPr>
+          <a:xfrm>
+            <a:off x="13716000" y="8558784"/>
+            <a:ext cx="3566160" cy="411480"/>
+          </a:xfrm>
+          <a:prstGeom prst="rect">
+            <a:avLst/>
+          </a:prstGeom>
+          <a:noFill/>
+        </p:spPr>
+        <p:txBody>
+          <a:bodyPr wrap="square" lIns="0" rIns="0" tIns="0" bIns="0" anchor="t">
+            <a:spAutoFit/>
+          </a:bodyPr>
+          <a:lstStyle/>
+          <a:p>
+            <a:pPr algn="l"/>
+            <a:r>
+              <a:rPr sz="1350" b="0" i="0">
+                <a:solidFill>
+                  <a:srgbClr val="000000"/>
+                </a:solidFill>
+                <a:latin typeface="Georgia"/>
+              </a:rPr>
+              <a:t>Website novo + manutenção</a:t>
+            </a:r>
+          </a:p>
+        </p:txBody>
+      </p:sp>
+      <p:cxnSp>
+        <p:nvCxnSpPr>
+          <p:cNvPr id="41" name="Connector 40"/>
+          <p:cNvCxnSpPr/>
+          <p:nvPr/>
+        </p:nvCxnSpPr>
+        <p:spPr>
+          <a:xfrm>
+            <a:off x="12984480" y="9116568"/>
+            <a:ext cx="4389120" cy="0"/>
+          </a:xfrm>
+          <a:prstGeom prst="line">
+            <a:avLst/>
+          </a:prstGeom>
+          <a:ln w="9525">
+            <a:solidFill>
+              <a:srgbClr val="E5E7EB"/>
+            </a:solidFill>
+          </a:ln>
+        </p:spPr>
+        <p:style>
+          <a:lnRef idx="2">
+            <a:schemeClr val="accent1"/>
+          </a:lnRef>
+          <a:fillRef idx="0">
+            <a:schemeClr val="accent1"/>
+          </a:fillRef>
+          <a:effectRef idx="1">
+            <a:schemeClr val="accent1"/>
+          </a:effectRef>
+          <a:fontRef idx="minor">
+            <a:schemeClr val="tx1"/>
+          </a:fontRef>
+        </p:style>
+      </p:cxnSp>
+      <p:sp>
+        <p:nvSpPr>
+          <p:cNvPr id="42" name="TextBox 41"/>
+          <p:cNvSpPr txBox="1"/>
+          <p:nvPr/>
+        </p:nvSpPr>
+        <p:spPr>
+          <a:xfrm>
+            <a:off x="914400" y="9235440"/>
+            <a:ext cx="5486400" cy="228600"/>
+          </a:xfrm>
+          <a:prstGeom prst="rect">
+            <a:avLst/>
+          </a:prstGeom>
+          <a:noFill/>
+        </p:spPr>
+        <p:txBody>
+          <a:bodyPr wrap="square" lIns="0" rIns="0" tIns="0" bIns="0" anchor="t">
+            <a:spAutoFit/>
+          </a:bodyPr>
+          <a:lstStyle/>
+          <a:p>
+            <a:pPr algn="l"/>
+            <a:r>
+              <a:rPr sz="900" b="0" i="0" spc="80">
+                <a:solidFill>
+                  <a:srgbClr val="6B7280"/>
+                </a:solidFill>
+                <a:latin typeface="Calibri"/>
+              </a:rPr>
+              <a:t>CLÍNICA DE ESTÉTICA · PORTUGAL</a:t>
+            </a:r>
+          </a:p>
+        </p:txBody>
+      </p:sp>
+      <p:cxnSp>
+        <p:nvCxnSpPr>
+          <p:cNvPr id="43" name="Connector 42"/>
+          <p:cNvCxnSpPr/>
+          <p:nvPr/>
+        </p:nvCxnSpPr>
+        <p:spPr>
+          <a:xfrm>
+            <a:off x="6858000" y="9308592"/>
+            <a:ext cx="1143000" cy="0"/>
+          </a:xfrm>
+          <a:prstGeom prst="line">
+            <a:avLst/>
+          </a:prstGeom>
+          <a:ln w="9525">
+            <a:solidFill>
+              <a:srgbClr val="E5E7EB"/>
+            </a:solidFill>
+          </a:ln>
+        </p:spPr>
+        <p:style>
+          <a:lnRef idx="2">
+            <a:schemeClr val="accent1"/>
+          </a:lnRef>
+          <a:fillRef idx="0">
+            <a:schemeClr val="accent1"/>
+          </a:fillRef>
+          <a:effectRef idx="1">
+            <a:schemeClr val="accent1"/>
+          </a:effectRef>
+          <a:fontRef idx="minor">
+            <a:schemeClr val="tx1"/>
+          </a:fontRef>
+        </p:style>
+      </p:cxnSp>
+      <p:sp>
+        <p:nvSpPr>
+          <p:cNvPr id="44" name="TextBox 43"/>
           <p:cNvSpPr txBox="1"/>
           <p:nvPr/>
         </p:nvSpPr>
         <p:spPr>
           <a:xfrm>
             <a:off x="8138160" y="9235440"/>
-            <a:ext cx="2743200" cy="228600"/>
+            <a:ext cx="3200400" cy="228600"/>
           </a:xfrm>
           <a:prstGeom prst="rect">
             <a:avLst/>
@@ -4291,14 +4609,14 @@
                 </a:solidFill>
                 <a:latin typeface="Calibri"/>
               </a:rPr>
-              <a:t>11 SLIDES · 9 FLUXOS</a:t>
-            </a:r>
-          </a:p>
-        </p:txBody>
-      </p:sp>
-      <p:sp>
-        <p:nvSpPr>
-          <p:cNvPr id="36" name="TextBox 35"/>
+              <a:t>14 SLIDES · 12 FLUXOS</a:t>
+            </a:r>
+          </a:p>
+        </p:txBody>
+      </p:sp>
+      <p:sp>
+        <p:nvSpPr>
+          <p:cNvPr id="45" name="TextBox 44"/>
           <p:cNvSpPr txBox="1"/>
           <p:nvPr/>
         </p:nvSpPr>
@@ -6189,7 +6507,7 @@
                 </a:solidFill>
                 <a:latin typeface="Calibri"/>
               </a:rPr>
-              <a:t>10 / 11</a:t>
+              <a:t>10 / 14</a:t>
             </a:r>
           </a:p>
         </p:txBody>
@@ -6238,6 +6556,5700 @@
 </file>
 
 <file path=ppt/slides/slide11.xml><?xml version="1.0" encoding="utf-8"?>
+<p:sld xmlns:a="http://schemas.openxmlformats.org/drawingml/2006/main" xmlns:p="http://schemas.openxmlformats.org/presentationml/2006/main" xmlns:r="http://schemas.openxmlformats.org/officeDocument/2006/relationships">
+  <p:cSld>
+    <p:bg>
+      <p:bgPr>
+        <a:solidFill>
+          <a:srgbClr val="F7F1E8"/>
+        </a:solidFill>
+        <a:effectLst/>
+      </p:bgPr>
+    </p:bg>
+    <p:spTree>
+      <p:nvGrpSpPr>
+        <p:cNvPr id="1" name=""/>
+        <p:cNvGrpSpPr/>
+        <p:nvPr/>
+      </p:nvGrpSpPr>
+      <p:grpSpPr/>
+      <p:sp>
+        <p:nvSpPr>
+          <p:cNvPr id="2" name="TextBox 1"/>
+          <p:cNvSpPr txBox="1"/>
+          <p:nvPr/>
+        </p:nvSpPr>
+        <p:spPr>
+          <a:xfrm>
+            <a:off x="914400" y="914400"/>
+            <a:ext cx="16459200" cy="274320"/>
+          </a:xfrm>
+          <a:prstGeom prst="rect">
+            <a:avLst/>
+          </a:prstGeom>
+          <a:noFill/>
+        </p:spPr>
+        <p:txBody>
+          <a:bodyPr wrap="square" lIns="0" rIns="0" tIns="0" bIns="0" anchor="t">
+            <a:spAutoFit/>
+          </a:bodyPr>
+          <a:lstStyle/>
+          <a:p>
+            <a:pPr algn="l"/>
+            <a:r>
+              <a:rPr sz="1350" b="0" i="0" spc="80">
+                <a:solidFill>
+                  <a:srgbClr val="FF8449"/>
+                </a:solidFill>
+                <a:latin typeface="Calibri"/>
+              </a:rPr>
+              <a:t>PROCESS FLOW · 10</a:t>
+            </a:r>
+          </a:p>
+        </p:txBody>
+      </p:sp>
+      <p:sp>
+        <p:nvSpPr>
+          <p:cNvPr id="3" name="TextBox 2"/>
+          <p:cNvSpPr txBox="1"/>
+          <p:nvPr/>
+        </p:nvSpPr>
+        <p:spPr>
+          <a:xfrm>
+            <a:off x="914400" y="1280160"/>
+            <a:ext cx="16459200" cy="914400"/>
+          </a:xfrm>
+          <a:prstGeom prst="rect">
+            <a:avLst/>
+          </a:prstGeom>
+          <a:noFill/>
+        </p:spPr>
+        <p:txBody>
+          <a:bodyPr wrap="square" lIns="0" rIns="0" tIns="0" bIns="0" anchor="t">
+            <a:spAutoFit/>
+          </a:bodyPr>
+          <a:lstStyle/>
+          <a:p>
+            <a:pPr algn="l"/>
+            <a:r>
+              <a:rPr sz="3800" b="0" i="0">
+                <a:solidFill>
+                  <a:srgbClr val="2D2D2D"/>
+                </a:solidFill>
+                <a:latin typeface="Georgia"/>
+              </a:rPr>
+              <a:t>Como o conteúdo de redes sociais é criado e publicado.</a:t>
+            </a:r>
+          </a:p>
+        </p:txBody>
+      </p:sp>
+      <p:sp>
+        <p:nvSpPr>
+          <p:cNvPr id="4" name="TextBox 3"/>
+          <p:cNvSpPr txBox="1"/>
+          <p:nvPr/>
+        </p:nvSpPr>
+        <p:spPr>
+          <a:xfrm>
+            <a:off x="914400" y="2331720"/>
+            <a:ext cx="15544800" cy="640080"/>
+          </a:xfrm>
+          <a:prstGeom prst="rect">
+            <a:avLst/>
+          </a:prstGeom>
+          <a:noFill/>
+        </p:spPr>
+        <p:txBody>
+          <a:bodyPr wrap="square" lIns="0" rIns="0" tIns="0" bIns="0" anchor="t">
+            <a:spAutoFit/>
+          </a:bodyPr>
+          <a:lstStyle/>
+          <a:p>
+            <a:pPr algn="l"/>
+            <a:r>
+              <a:rPr sz="1600" b="0" i="1">
+                <a:solidFill>
+                  <a:srgbClr val="4B5563"/>
+                </a:solidFill>
+                <a:latin typeface="Georgia"/>
+              </a:rPr>
+              <a:t>P5 em ação. Cowork pesquisa e redige; Code agenda e publica via Meta Graph + GMB API. Engagement volta para o sistema para alimentar o ciclo seguinte.</a:t>
+            </a:r>
+          </a:p>
+        </p:txBody>
+      </p:sp>
+      <p:sp>
+        <p:nvSpPr>
+          <p:cNvPr id="5" name="Rounded Rectangle 4"/>
+          <p:cNvSpPr/>
+          <p:nvPr/>
+        </p:nvSpPr>
+        <p:spPr>
+          <a:xfrm>
+            <a:off x="14173200" y="914400"/>
+            <a:ext cx="3200400" cy="457200"/>
+          </a:xfrm>
+          <a:prstGeom prst="roundRect">
+            <a:avLst>
+              <a:gd name="adj" fmla="val 25000"/>
+            </a:avLst>
+          </a:prstGeom>
+          <a:solidFill>
+            <a:srgbClr val="000000"/>
+          </a:solidFill>
+          <a:ln>
+            <a:noFill/>
+          </a:ln>
+          <a:effectLst/>
+        </p:spPr>
+        <p:style>
+          <a:lnRef idx="1">
+            <a:schemeClr val="accent1"/>
+          </a:lnRef>
+          <a:fillRef idx="3">
+            <a:schemeClr val="accent1"/>
+          </a:fillRef>
+          <a:effectRef idx="2">
+            <a:schemeClr val="accent1"/>
+          </a:effectRef>
+          <a:fontRef idx="minor">
+            <a:schemeClr val="lt1"/>
+          </a:fontRef>
+        </p:style>
+        <p:txBody>
+          <a:bodyPr rtlCol="0" anchor="ctr"/>
+          <a:lstStyle/>
+          <a:p>
+            <a:pPr algn="ctr"/>
+          </a:p>
+        </p:txBody>
+      </p:sp>
+      <p:sp>
+        <p:nvSpPr>
+          <p:cNvPr id="6" name="TextBox 5"/>
+          <p:cNvSpPr txBox="1"/>
+          <p:nvPr/>
+        </p:nvSpPr>
+        <p:spPr>
+          <a:xfrm>
+            <a:off x="14173200" y="987552"/>
+            <a:ext cx="3200400" cy="365760"/>
+          </a:xfrm>
+          <a:prstGeom prst="rect">
+            <a:avLst/>
+          </a:prstGeom>
+          <a:noFill/>
+        </p:spPr>
+        <p:txBody>
+          <a:bodyPr wrap="square" lIns="0" rIns="0" tIns="0" bIns="0" anchor="t">
+            <a:spAutoFit/>
+          </a:bodyPr>
+          <a:lstStyle/>
+          <a:p>
+            <a:pPr algn="ctr"/>
+            <a:r>
+              <a:rPr sz="1000" b="0" i="0" spc="80">
+                <a:solidFill>
+                  <a:srgbClr val="FFFFFF"/>
+                </a:solidFill>
+                <a:latin typeface="Calibri"/>
+              </a:rPr>
+              <a:t>RUNTIME · CODE + COWORK</a:t>
+            </a:r>
+          </a:p>
+        </p:txBody>
+      </p:sp>
+      <p:sp>
+        <p:nvSpPr>
+          <p:cNvPr id="7" name="Rounded Rectangle 6"/>
+          <p:cNvSpPr/>
+          <p:nvPr/>
+        </p:nvSpPr>
+        <p:spPr>
+          <a:xfrm>
+            <a:off x="786383" y="3657600"/>
+            <a:ext cx="2542032" cy="5120640"/>
+          </a:xfrm>
+          <a:prstGeom prst="roundRect">
+            <a:avLst>
+              <a:gd name="adj" fmla="val 5000"/>
+            </a:avLst>
+          </a:prstGeom>
+          <a:solidFill>
+            <a:srgbClr val="FFFFFF"/>
+          </a:solidFill>
+          <a:ln>
+            <a:noFill/>
+          </a:ln>
+          <a:effectLst/>
+        </p:spPr>
+        <p:style>
+          <a:lnRef idx="1">
+            <a:schemeClr val="accent1"/>
+          </a:lnRef>
+          <a:fillRef idx="3">
+            <a:schemeClr val="accent1"/>
+          </a:fillRef>
+          <a:effectRef idx="2">
+            <a:schemeClr val="accent1"/>
+          </a:effectRef>
+          <a:fontRef idx="minor">
+            <a:schemeClr val="lt1"/>
+          </a:fontRef>
+        </p:style>
+        <p:txBody>
+          <a:bodyPr rtlCol="0" anchor="ctr"/>
+          <a:lstStyle/>
+          <a:p>
+            <a:pPr algn="ctr"/>
+          </a:p>
+        </p:txBody>
+      </p:sp>
+      <p:sp>
+        <p:nvSpPr>
+          <p:cNvPr id="8" name="TextBox 7"/>
+          <p:cNvSpPr txBox="1"/>
+          <p:nvPr/>
+        </p:nvSpPr>
+        <p:spPr>
+          <a:xfrm>
+            <a:off x="1078991" y="3950208"/>
+            <a:ext cx="2084831" cy="502920"/>
+          </a:xfrm>
+          <a:prstGeom prst="rect">
+            <a:avLst/>
+          </a:prstGeom>
+          <a:noFill/>
+        </p:spPr>
+        <p:txBody>
+          <a:bodyPr wrap="square" lIns="0" rIns="0" tIns="0" bIns="0" anchor="t">
+            <a:spAutoFit/>
+          </a:bodyPr>
+          <a:lstStyle/>
+          <a:p>
+            <a:pPr algn="l"/>
+            <a:r>
+              <a:rPr sz="3000" b="0" i="0">
+                <a:solidFill>
+                  <a:srgbClr val="FF8449"/>
+                </a:solidFill>
+                <a:latin typeface="Georgia"/>
+              </a:rPr>
+              <a:t>01</a:t>
+            </a:r>
+          </a:p>
+        </p:txBody>
+      </p:sp>
+      <p:sp>
+        <p:nvSpPr>
+          <p:cNvPr id="9" name="TextBox 8"/>
+          <p:cNvSpPr txBox="1"/>
+          <p:nvPr/>
+        </p:nvSpPr>
+        <p:spPr>
+          <a:xfrm>
+            <a:off x="1078991" y="4617720"/>
+            <a:ext cx="1993391" cy="868680"/>
+          </a:xfrm>
+          <a:prstGeom prst="rect">
+            <a:avLst/>
+          </a:prstGeom>
+          <a:noFill/>
+        </p:spPr>
+        <p:txBody>
+          <a:bodyPr wrap="square" lIns="0" rIns="0" tIns="0" bIns="0" anchor="t">
+            <a:spAutoFit/>
+          </a:bodyPr>
+          <a:lstStyle/>
+          <a:p>
+            <a:pPr algn="l"/>
+            <a:r>
+              <a:rPr sz="1700" b="0" i="0">
+                <a:solidFill>
+                  <a:srgbClr val="2D2D2D"/>
+                </a:solidFill>
+                <a:latin typeface="Georgia"/>
+              </a:rPr>
+              <a:t>Disparador</a:t>
+            </a:r>
+          </a:p>
+        </p:txBody>
+      </p:sp>
+      <p:cxnSp>
+        <p:nvCxnSpPr>
+          <p:cNvPr id="10" name="Connector 9"/>
+          <p:cNvCxnSpPr/>
+          <p:nvPr/>
+        </p:nvCxnSpPr>
+        <p:spPr>
+          <a:xfrm>
+            <a:off x="1078991" y="5623560"/>
+            <a:ext cx="1956816" cy="0"/>
+          </a:xfrm>
+          <a:prstGeom prst="line">
+            <a:avLst/>
+          </a:prstGeom>
+          <a:ln w="9525">
+            <a:solidFill>
+              <a:srgbClr val="E5E7EB"/>
+            </a:solidFill>
+          </a:ln>
+        </p:spPr>
+        <p:style>
+          <a:lnRef idx="2">
+            <a:schemeClr val="accent1"/>
+          </a:lnRef>
+          <a:fillRef idx="0">
+            <a:schemeClr val="accent1"/>
+          </a:fillRef>
+          <a:effectRef idx="1">
+            <a:schemeClr val="accent1"/>
+          </a:effectRef>
+          <a:fontRef idx="minor">
+            <a:schemeClr val="tx1"/>
+          </a:fontRef>
+        </p:style>
+      </p:cxnSp>
+      <p:sp>
+        <p:nvSpPr>
+          <p:cNvPr id="11" name="TextBox 10"/>
+          <p:cNvSpPr txBox="1"/>
+          <p:nvPr/>
+        </p:nvSpPr>
+        <p:spPr>
+          <a:xfrm>
+            <a:off x="1078991" y="5760720"/>
+            <a:ext cx="1993391" cy="2377439"/>
+          </a:xfrm>
+          <a:prstGeom prst="rect">
+            <a:avLst/>
+          </a:prstGeom>
+          <a:noFill/>
+        </p:spPr>
+        <p:txBody>
+          <a:bodyPr wrap="square" lIns="0" rIns="0" tIns="0" bIns="0" anchor="t">
+            <a:spAutoFit/>
+          </a:bodyPr>
+          <a:lstStyle/>
+          <a:p>
+            <a:pPr algn="l"/>
+            <a:r>
+              <a:rPr sz="1100" b="0" i="0">
+                <a:solidFill>
+                  <a:srgbClr val="4B5563"/>
+                </a:solidFill>
+                <a:latin typeface="Calibri"/>
+              </a:rPr>
+              <a:t>Semanal (segunda-feira) ou pedido direto da Sara: «o que faço esta semana?»</a:t>
+            </a:r>
+          </a:p>
+        </p:txBody>
+      </p:sp>
+      <p:sp>
+        <p:nvSpPr>
+          <p:cNvPr id="12" name="TextBox 11"/>
+          <p:cNvSpPr txBox="1"/>
+          <p:nvPr/>
+        </p:nvSpPr>
+        <p:spPr>
+          <a:xfrm>
+            <a:off x="1078991" y="8275319"/>
+            <a:ext cx="1993391" cy="274320"/>
+          </a:xfrm>
+          <a:prstGeom prst="rect">
+            <a:avLst/>
+          </a:prstGeom>
+          <a:noFill/>
+        </p:spPr>
+        <p:txBody>
+          <a:bodyPr wrap="square" lIns="0" rIns="0" tIns="0" bIns="0" anchor="t">
+            <a:spAutoFit/>
+          </a:bodyPr>
+          <a:lstStyle/>
+          <a:p>
+            <a:pPr algn="l"/>
+            <a:r>
+              <a:rPr sz="900" b="0" i="0" spc="80">
+                <a:solidFill>
+                  <a:srgbClr val="FF8449"/>
+                </a:solidFill>
+                <a:latin typeface="Calibri"/>
+              </a:rPr>
+              <a:t>TRIGGER</a:t>
+            </a:r>
+          </a:p>
+        </p:txBody>
+      </p:sp>
+      <p:sp>
+        <p:nvSpPr>
+          <p:cNvPr id="13" name="Right Arrow 12"/>
+          <p:cNvSpPr/>
+          <p:nvPr/>
+        </p:nvSpPr>
+        <p:spPr>
+          <a:xfrm>
+            <a:off x="3364991" y="6099048"/>
+            <a:ext cx="219456" cy="237744"/>
+          </a:xfrm>
+          <a:prstGeom prst="rightArrow">
+            <a:avLst/>
+          </a:prstGeom>
+          <a:solidFill>
+            <a:srgbClr val="FF8449"/>
+          </a:solidFill>
+          <a:ln>
+            <a:noFill/>
+          </a:ln>
+          <a:effectLst/>
+        </p:spPr>
+        <p:style>
+          <a:lnRef idx="1">
+            <a:schemeClr val="accent1"/>
+          </a:lnRef>
+          <a:fillRef idx="3">
+            <a:schemeClr val="accent1"/>
+          </a:fillRef>
+          <a:effectRef idx="2">
+            <a:schemeClr val="accent1"/>
+          </a:effectRef>
+          <a:fontRef idx="minor">
+            <a:schemeClr val="lt1"/>
+          </a:fontRef>
+        </p:style>
+        <p:txBody>
+          <a:bodyPr rtlCol="0" anchor="ctr"/>
+          <a:lstStyle/>
+          <a:p>
+            <a:pPr algn="ctr"/>
+          </a:p>
+        </p:txBody>
+      </p:sp>
+      <p:sp>
+        <p:nvSpPr>
+          <p:cNvPr id="14" name="Rounded Rectangle 13"/>
+          <p:cNvSpPr/>
+          <p:nvPr/>
+        </p:nvSpPr>
+        <p:spPr>
+          <a:xfrm>
+            <a:off x="3621023" y="3657600"/>
+            <a:ext cx="2542032" cy="5120640"/>
+          </a:xfrm>
+          <a:prstGeom prst="roundRect">
+            <a:avLst>
+              <a:gd name="adj" fmla="val 5000"/>
+            </a:avLst>
+          </a:prstGeom>
+          <a:solidFill>
+            <a:srgbClr val="FFFFFF"/>
+          </a:solidFill>
+          <a:ln>
+            <a:noFill/>
+          </a:ln>
+          <a:effectLst/>
+        </p:spPr>
+        <p:style>
+          <a:lnRef idx="1">
+            <a:schemeClr val="accent1"/>
+          </a:lnRef>
+          <a:fillRef idx="3">
+            <a:schemeClr val="accent1"/>
+          </a:fillRef>
+          <a:effectRef idx="2">
+            <a:schemeClr val="accent1"/>
+          </a:effectRef>
+          <a:fontRef idx="minor">
+            <a:schemeClr val="lt1"/>
+          </a:fontRef>
+        </p:style>
+        <p:txBody>
+          <a:bodyPr rtlCol="0" anchor="ctr"/>
+          <a:lstStyle/>
+          <a:p>
+            <a:pPr algn="ctr"/>
+          </a:p>
+        </p:txBody>
+      </p:sp>
+      <p:sp>
+        <p:nvSpPr>
+          <p:cNvPr id="15" name="TextBox 14"/>
+          <p:cNvSpPr txBox="1"/>
+          <p:nvPr/>
+        </p:nvSpPr>
+        <p:spPr>
+          <a:xfrm>
+            <a:off x="3913631" y="3950208"/>
+            <a:ext cx="2084831" cy="502920"/>
+          </a:xfrm>
+          <a:prstGeom prst="rect">
+            <a:avLst/>
+          </a:prstGeom>
+          <a:noFill/>
+        </p:spPr>
+        <p:txBody>
+          <a:bodyPr wrap="square" lIns="0" rIns="0" tIns="0" bIns="0" anchor="t">
+            <a:spAutoFit/>
+          </a:bodyPr>
+          <a:lstStyle/>
+          <a:p>
+            <a:pPr algn="l"/>
+            <a:r>
+              <a:rPr sz="3000" b="0" i="0">
+                <a:solidFill>
+                  <a:srgbClr val="FF8449"/>
+                </a:solidFill>
+                <a:latin typeface="Georgia"/>
+              </a:rPr>
+              <a:t>02</a:t>
+            </a:r>
+          </a:p>
+        </p:txBody>
+      </p:sp>
+      <p:sp>
+        <p:nvSpPr>
+          <p:cNvPr id="16" name="TextBox 15"/>
+          <p:cNvSpPr txBox="1"/>
+          <p:nvPr/>
+        </p:nvSpPr>
+        <p:spPr>
+          <a:xfrm>
+            <a:off x="3913631" y="4617720"/>
+            <a:ext cx="1993391" cy="868680"/>
+          </a:xfrm>
+          <a:prstGeom prst="rect">
+            <a:avLst/>
+          </a:prstGeom>
+          <a:noFill/>
+        </p:spPr>
+        <p:txBody>
+          <a:bodyPr wrap="square" lIns="0" rIns="0" tIns="0" bIns="0" anchor="t">
+            <a:spAutoFit/>
+          </a:bodyPr>
+          <a:lstStyle/>
+          <a:p>
+            <a:pPr algn="l"/>
+            <a:r>
+              <a:rPr sz="1700" b="0" i="0">
+                <a:solidFill>
+                  <a:srgbClr val="2D2D2D"/>
+                </a:solidFill>
+                <a:latin typeface="Georgia"/>
+              </a:rPr>
+              <a:t>Cowork pesquisa</a:t>
+            </a:r>
+          </a:p>
+        </p:txBody>
+      </p:sp>
+      <p:cxnSp>
+        <p:nvCxnSpPr>
+          <p:cNvPr id="17" name="Connector 16"/>
+          <p:cNvCxnSpPr/>
+          <p:nvPr/>
+        </p:nvCxnSpPr>
+        <p:spPr>
+          <a:xfrm>
+            <a:off x="3913631" y="5623560"/>
+            <a:ext cx="1956816" cy="0"/>
+          </a:xfrm>
+          <a:prstGeom prst="line">
+            <a:avLst/>
+          </a:prstGeom>
+          <a:ln w="9525">
+            <a:solidFill>
+              <a:srgbClr val="E5E7EB"/>
+            </a:solidFill>
+          </a:ln>
+        </p:spPr>
+        <p:style>
+          <a:lnRef idx="2">
+            <a:schemeClr val="accent1"/>
+          </a:lnRef>
+          <a:fillRef idx="0">
+            <a:schemeClr val="accent1"/>
+          </a:fillRef>
+          <a:effectRef idx="1">
+            <a:schemeClr val="accent1"/>
+          </a:effectRef>
+          <a:fontRef idx="minor">
+            <a:schemeClr val="tx1"/>
+          </a:fontRef>
+        </p:style>
+      </p:cxnSp>
+      <p:sp>
+        <p:nvSpPr>
+          <p:cNvPr id="18" name="TextBox 17"/>
+          <p:cNvSpPr txBox="1"/>
+          <p:nvPr/>
+        </p:nvSpPr>
+        <p:spPr>
+          <a:xfrm>
+            <a:off x="3913631" y="5760720"/>
+            <a:ext cx="1993391" cy="2377439"/>
+          </a:xfrm>
+          <a:prstGeom prst="rect">
+            <a:avLst/>
+          </a:prstGeom>
+          <a:noFill/>
+        </p:spPr>
+        <p:txBody>
+          <a:bodyPr wrap="square" lIns="0" rIns="0" tIns="0" bIns="0" anchor="t">
+            <a:spAutoFit/>
+          </a:bodyPr>
+          <a:lstStyle/>
+          <a:p>
+            <a:pPr algn="l"/>
+            <a:r>
+              <a:rPr sz="1100" b="0" i="0">
+                <a:solidFill>
+                  <a:srgbClr val="4B5563"/>
+                </a:solidFill>
+                <a:latin typeface="Calibri"/>
+              </a:rPr>
+              <a:t>Tendências do setor, performance da semana anterior, calendário da clínica (eventos, tratamentos a destacar).</a:t>
+            </a:r>
+          </a:p>
+        </p:txBody>
+      </p:sp>
+      <p:sp>
+        <p:nvSpPr>
+          <p:cNvPr id="19" name="TextBox 18"/>
+          <p:cNvSpPr txBox="1"/>
+          <p:nvPr/>
+        </p:nvSpPr>
+        <p:spPr>
+          <a:xfrm>
+            <a:off x="3913631" y="8275319"/>
+            <a:ext cx="1993391" cy="274320"/>
+          </a:xfrm>
+          <a:prstGeom prst="rect">
+            <a:avLst/>
+          </a:prstGeom>
+          <a:noFill/>
+        </p:spPr>
+        <p:txBody>
+          <a:bodyPr wrap="square" lIns="0" rIns="0" tIns="0" bIns="0" anchor="t">
+            <a:spAutoFit/>
+          </a:bodyPr>
+          <a:lstStyle/>
+          <a:p>
+            <a:pPr algn="l"/>
+            <a:r>
+              <a:rPr sz="900" b="0" i="0" spc="80">
+                <a:solidFill>
+                  <a:srgbClr val="FF8449"/>
+                </a:solidFill>
+                <a:latin typeface="Calibri"/>
+              </a:rPr>
+              <a:t>RESEARCH</a:t>
+            </a:r>
+          </a:p>
+        </p:txBody>
+      </p:sp>
+      <p:sp>
+        <p:nvSpPr>
+          <p:cNvPr id="20" name="Right Arrow 19"/>
+          <p:cNvSpPr/>
+          <p:nvPr/>
+        </p:nvSpPr>
+        <p:spPr>
+          <a:xfrm>
+            <a:off x="6199631" y="6099048"/>
+            <a:ext cx="219456" cy="237744"/>
+          </a:xfrm>
+          <a:prstGeom prst="rightArrow">
+            <a:avLst/>
+          </a:prstGeom>
+          <a:solidFill>
+            <a:srgbClr val="FF8449"/>
+          </a:solidFill>
+          <a:ln>
+            <a:noFill/>
+          </a:ln>
+          <a:effectLst/>
+        </p:spPr>
+        <p:style>
+          <a:lnRef idx="1">
+            <a:schemeClr val="accent1"/>
+          </a:lnRef>
+          <a:fillRef idx="3">
+            <a:schemeClr val="accent1"/>
+          </a:fillRef>
+          <a:effectRef idx="2">
+            <a:schemeClr val="accent1"/>
+          </a:effectRef>
+          <a:fontRef idx="minor">
+            <a:schemeClr val="lt1"/>
+          </a:fontRef>
+        </p:style>
+        <p:txBody>
+          <a:bodyPr rtlCol="0" anchor="ctr"/>
+          <a:lstStyle/>
+          <a:p>
+            <a:pPr algn="ctr"/>
+          </a:p>
+        </p:txBody>
+      </p:sp>
+      <p:sp>
+        <p:nvSpPr>
+          <p:cNvPr id="21" name="Rounded Rectangle 20"/>
+          <p:cNvSpPr/>
+          <p:nvPr/>
+        </p:nvSpPr>
+        <p:spPr>
+          <a:xfrm>
+            <a:off x="6455663" y="3657600"/>
+            <a:ext cx="2542032" cy="5120640"/>
+          </a:xfrm>
+          <a:prstGeom prst="roundRect">
+            <a:avLst>
+              <a:gd name="adj" fmla="val 5000"/>
+            </a:avLst>
+          </a:prstGeom>
+          <a:solidFill>
+            <a:srgbClr val="FFFFFF"/>
+          </a:solidFill>
+          <a:ln>
+            <a:noFill/>
+          </a:ln>
+          <a:effectLst/>
+        </p:spPr>
+        <p:style>
+          <a:lnRef idx="1">
+            <a:schemeClr val="accent1"/>
+          </a:lnRef>
+          <a:fillRef idx="3">
+            <a:schemeClr val="accent1"/>
+          </a:fillRef>
+          <a:effectRef idx="2">
+            <a:schemeClr val="accent1"/>
+          </a:effectRef>
+          <a:fontRef idx="minor">
+            <a:schemeClr val="lt1"/>
+          </a:fontRef>
+        </p:style>
+        <p:txBody>
+          <a:bodyPr rtlCol="0" anchor="ctr"/>
+          <a:lstStyle/>
+          <a:p>
+            <a:pPr algn="ctr"/>
+          </a:p>
+        </p:txBody>
+      </p:sp>
+      <p:sp>
+        <p:nvSpPr>
+          <p:cNvPr id="22" name="TextBox 21"/>
+          <p:cNvSpPr txBox="1"/>
+          <p:nvPr/>
+        </p:nvSpPr>
+        <p:spPr>
+          <a:xfrm>
+            <a:off x="6748271" y="3950208"/>
+            <a:ext cx="2084831" cy="502920"/>
+          </a:xfrm>
+          <a:prstGeom prst="rect">
+            <a:avLst/>
+          </a:prstGeom>
+          <a:noFill/>
+        </p:spPr>
+        <p:txBody>
+          <a:bodyPr wrap="square" lIns="0" rIns="0" tIns="0" bIns="0" anchor="t">
+            <a:spAutoFit/>
+          </a:bodyPr>
+          <a:lstStyle/>
+          <a:p>
+            <a:pPr algn="l"/>
+            <a:r>
+              <a:rPr sz="3000" b="0" i="0">
+                <a:solidFill>
+                  <a:srgbClr val="FF8449"/>
+                </a:solidFill>
+                <a:latin typeface="Georgia"/>
+              </a:rPr>
+              <a:t>03</a:t>
+            </a:r>
+          </a:p>
+        </p:txBody>
+      </p:sp>
+      <p:sp>
+        <p:nvSpPr>
+          <p:cNvPr id="23" name="TextBox 22"/>
+          <p:cNvSpPr txBox="1"/>
+          <p:nvPr/>
+        </p:nvSpPr>
+        <p:spPr>
+          <a:xfrm>
+            <a:off x="6748271" y="4617720"/>
+            <a:ext cx="1993391" cy="868680"/>
+          </a:xfrm>
+          <a:prstGeom prst="rect">
+            <a:avLst/>
+          </a:prstGeom>
+          <a:noFill/>
+        </p:spPr>
+        <p:txBody>
+          <a:bodyPr wrap="square" lIns="0" rIns="0" tIns="0" bIns="0" anchor="t">
+            <a:spAutoFit/>
+          </a:bodyPr>
+          <a:lstStyle/>
+          <a:p>
+            <a:pPr algn="l"/>
+            <a:r>
+              <a:rPr sz="1700" b="0" i="0">
+                <a:solidFill>
+                  <a:srgbClr val="2D2D2D"/>
+                </a:solidFill>
+                <a:latin typeface="Georgia"/>
+              </a:rPr>
+              <a:t>Redige posts</a:t>
+            </a:r>
+          </a:p>
+        </p:txBody>
+      </p:sp>
+      <p:cxnSp>
+        <p:nvCxnSpPr>
+          <p:cNvPr id="24" name="Connector 23"/>
+          <p:cNvCxnSpPr/>
+          <p:nvPr/>
+        </p:nvCxnSpPr>
+        <p:spPr>
+          <a:xfrm>
+            <a:off x="6748271" y="5623560"/>
+            <a:ext cx="1956816" cy="0"/>
+          </a:xfrm>
+          <a:prstGeom prst="line">
+            <a:avLst/>
+          </a:prstGeom>
+          <a:ln w="9525">
+            <a:solidFill>
+              <a:srgbClr val="E5E7EB"/>
+            </a:solidFill>
+          </a:ln>
+        </p:spPr>
+        <p:style>
+          <a:lnRef idx="2">
+            <a:schemeClr val="accent1"/>
+          </a:lnRef>
+          <a:fillRef idx="0">
+            <a:schemeClr val="accent1"/>
+          </a:fillRef>
+          <a:effectRef idx="1">
+            <a:schemeClr val="accent1"/>
+          </a:effectRef>
+          <a:fontRef idx="minor">
+            <a:schemeClr val="tx1"/>
+          </a:fontRef>
+        </p:style>
+      </p:cxnSp>
+      <p:sp>
+        <p:nvSpPr>
+          <p:cNvPr id="25" name="TextBox 24"/>
+          <p:cNvSpPr txBox="1"/>
+          <p:nvPr/>
+        </p:nvSpPr>
+        <p:spPr>
+          <a:xfrm>
+            <a:off x="6748271" y="5760720"/>
+            <a:ext cx="1993391" cy="2377439"/>
+          </a:xfrm>
+          <a:prstGeom prst="rect">
+            <a:avLst/>
+          </a:prstGeom>
+          <a:noFill/>
+        </p:spPr>
+        <p:txBody>
+          <a:bodyPr wrap="square" lIns="0" rIns="0" tIns="0" bIns="0" anchor="t">
+            <a:spAutoFit/>
+          </a:bodyPr>
+          <a:lstStyle/>
+          <a:p>
+            <a:pPr algn="l"/>
+            <a:r>
+              <a:rPr sz="1100" b="0" i="0">
+                <a:solidFill>
+                  <a:srgbClr val="4B5563"/>
+                </a:solidFill>
+                <a:latin typeface="Calibri"/>
+              </a:rPr>
+              <a:t>Copy + sugestão de imagem/criativo + hashtags + CTA, no tom da clínica. Variantes Instagram, Facebook, GMB.</a:t>
+            </a:r>
+          </a:p>
+        </p:txBody>
+      </p:sp>
+      <p:sp>
+        <p:nvSpPr>
+          <p:cNvPr id="26" name="TextBox 25"/>
+          <p:cNvSpPr txBox="1"/>
+          <p:nvPr/>
+        </p:nvSpPr>
+        <p:spPr>
+          <a:xfrm>
+            <a:off x="6748271" y="8275319"/>
+            <a:ext cx="1993391" cy="274320"/>
+          </a:xfrm>
+          <a:prstGeom prst="rect">
+            <a:avLst/>
+          </a:prstGeom>
+          <a:noFill/>
+        </p:spPr>
+        <p:txBody>
+          <a:bodyPr wrap="square" lIns="0" rIns="0" tIns="0" bIns="0" anchor="t">
+            <a:spAutoFit/>
+          </a:bodyPr>
+          <a:lstStyle/>
+          <a:p>
+            <a:pPr algn="l"/>
+            <a:r>
+              <a:rPr sz="900" b="0" i="0" spc="80">
+                <a:solidFill>
+                  <a:srgbClr val="FF8449"/>
+                </a:solidFill>
+                <a:latin typeface="Calibri"/>
+              </a:rPr>
+              <a:t>DRAFT</a:t>
+            </a:r>
+          </a:p>
+        </p:txBody>
+      </p:sp>
+      <p:sp>
+        <p:nvSpPr>
+          <p:cNvPr id="27" name="Right Arrow 26"/>
+          <p:cNvSpPr/>
+          <p:nvPr/>
+        </p:nvSpPr>
+        <p:spPr>
+          <a:xfrm>
+            <a:off x="9034271" y="6099048"/>
+            <a:ext cx="219456" cy="237744"/>
+          </a:xfrm>
+          <a:prstGeom prst="rightArrow">
+            <a:avLst/>
+          </a:prstGeom>
+          <a:solidFill>
+            <a:srgbClr val="FF8449"/>
+          </a:solidFill>
+          <a:ln>
+            <a:noFill/>
+          </a:ln>
+          <a:effectLst/>
+        </p:spPr>
+        <p:style>
+          <a:lnRef idx="1">
+            <a:schemeClr val="accent1"/>
+          </a:lnRef>
+          <a:fillRef idx="3">
+            <a:schemeClr val="accent1"/>
+          </a:fillRef>
+          <a:effectRef idx="2">
+            <a:schemeClr val="accent1"/>
+          </a:effectRef>
+          <a:fontRef idx="minor">
+            <a:schemeClr val="lt1"/>
+          </a:fontRef>
+        </p:style>
+        <p:txBody>
+          <a:bodyPr rtlCol="0" anchor="ctr"/>
+          <a:lstStyle/>
+          <a:p>
+            <a:pPr algn="ctr"/>
+          </a:p>
+        </p:txBody>
+      </p:sp>
+      <p:sp>
+        <p:nvSpPr>
+          <p:cNvPr id="28" name="Rounded Rectangle 27"/>
+          <p:cNvSpPr/>
+          <p:nvPr/>
+        </p:nvSpPr>
+        <p:spPr>
+          <a:xfrm>
+            <a:off x="9290303" y="3657600"/>
+            <a:ext cx="2542032" cy="5120640"/>
+          </a:xfrm>
+          <a:prstGeom prst="roundRect">
+            <a:avLst>
+              <a:gd name="adj" fmla="val 5000"/>
+            </a:avLst>
+          </a:prstGeom>
+          <a:solidFill>
+            <a:srgbClr val="FFFFFF"/>
+          </a:solidFill>
+          <a:ln>
+            <a:noFill/>
+          </a:ln>
+          <a:effectLst/>
+        </p:spPr>
+        <p:style>
+          <a:lnRef idx="1">
+            <a:schemeClr val="accent1"/>
+          </a:lnRef>
+          <a:fillRef idx="3">
+            <a:schemeClr val="accent1"/>
+          </a:fillRef>
+          <a:effectRef idx="2">
+            <a:schemeClr val="accent1"/>
+          </a:effectRef>
+          <a:fontRef idx="minor">
+            <a:schemeClr val="lt1"/>
+          </a:fontRef>
+        </p:style>
+        <p:txBody>
+          <a:bodyPr rtlCol="0" anchor="ctr"/>
+          <a:lstStyle/>
+          <a:p>
+            <a:pPr algn="ctr"/>
+          </a:p>
+        </p:txBody>
+      </p:sp>
+      <p:sp>
+        <p:nvSpPr>
+          <p:cNvPr id="29" name="TextBox 28"/>
+          <p:cNvSpPr txBox="1"/>
+          <p:nvPr/>
+        </p:nvSpPr>
+        <p:spPr>
+          <a:xfrm>
+            <a:off x="9582911" y="3950208"/>
+            <a:ext cx="2084831" cy="502920"/>
+          </a:xfrm>
+          <a:prstGeom prst="rect">
+            <a:avLst/>
+          </a:prstGeom>
+          <a:noFill/>
+        </p:spPr>
+        <p:txBody>
+          <a:bodyPr wrap="square" lIns="0" rIns="0" tIns="0" bIns="0" anchor="t">
+            <a:spAutoFit/>
+          </a:bodyPr>
+          <a:lstStyle/>
+          <a:p>
+            <a:pPr algn="l"/>
+            <a:r>
+              <a:rPr sz="3000" b="0" i="0">
+                <a:solidFill>
+                  <a:srgbClr val="FF8449"/>
+                </a:solidFill>
+                <a:latin typeface="Georgia"/>
+              </a:rPr>
+              <a:t>04</a:t>
+            </a:r>
+          </a:p>
+        </p:txBody>
+      </p:sp>
+      <p:sp>
+        <p:nvSpPr>
+          <p:cNvPr id="30" name="TextBox 29"/>
+          <p:cNvSpPr txBox="1"/>
+          <p:nvPr/>
+        </p:nvSpPr>
+        <p:spPr>
+          <a:xfrm>
+            <a:off x="9582911" y="4617720"/>
+            <a:ext cx="1993391" cy="868680"/>
+          </a:xfrm>
+          <a:prstGeom prst="rect">
+            <a:avLst/>
+          </a:prstGeom>
+          <a:noFill/>
+        </p:spPr>
+        <p:txBody>
+          <a:bodyPr wrap="square" lIns="0" rIns="0" tIns="0" bIns="0" anchor="t">
+            <a:spAutoFit/>
+          </a:bodyPr>
+          <a:lstStyle/>
+          <a:p>
+            <a:pPr algn="l"/>
+            <a:r>
+              <a:rPr sz="1700" b="0" i="0">
+                <a:solidFill>
+                  <a:srgbClr val="2D2D2D"/>
+                </a:solidFill>
+                <a:latin typeface="Georgia"/>
+              </a:rPr>
+              <a:t>Sara aprova</a:t>
+            </a:r>
+          </a:p>
+        </p:txBody>
+      </p:sp>
+      <p:cxnSp>
+        <p:nvCxnSpPr>
+          <p:cNvPr id="31" name="Connector 30"/>
+          <p:cNvCxnSpPr/>
+          <p:nvPr/>
+        </p:nvCxnSpPr>
+        <p:spPr>
+          <a:xfrm>
+            <a:off x="9582911" y="5623560"/>
+            <a:ext cx="1956816" cy="0"/>
+          </a:xfrm>
+          <a:prstGeom prst="line">
+            <a:avLst/>
+          </a:prstGeom>
+          <a:ln w="9525">
+            <a:solidFill>
+              <a:srgbClr val="E5E7EB"/>
+            </a:solidFill>
+          </a:ln>
+        </p:spPr>
+        <p:style>
+          <a:lnRef idx="2">
+            <a:schemeClr val="accent1"/>
+          </a:lnRef>
+          <a:fillRef idx="0">
+            <a:schemeClr val="accent1"/>
+          </a:fillRef>
+          <a:effectRef idx="1">
+            <a:schemeClr val="accent1"/>
+          </a:effectRef>
+          <a:fontRef idx="minor">
+            <a:schemeClr val="tx1"/>
+          </a:fontRef>
+        </p:style>
+      </p:cxnSp>
+      <p:sp>
+        <p:nvSpPr>
+          <p:cNvPr id="32" name="TextBox 31"/>
+          <p:cNvSpPr txBox="1"/>
+          <p:nvPr/>
+        </p:nvSpPr>
+        <p:spPr>
+          <a:xfrm>
+            <a:off x="9582911" y="5760720"/>
+            <a:ext cx="1993391" cy="2377439"/>
+          </a:xfrm>
+          <a:prstGeom prst="rect">
+            <a:avLst/>
+          </a:prstGeom>
+          <a:noFill/>
+        </p:spPr>
+        <p:txBody>
+          <a:bodyPr wrap="square" lIns="0" rIns="0" tIns="0" bIns="0" anchor="t">
+            <a:spAutoFit/>
+          </a:bodyPr>
+          <a:lstStyle/>
+          <a:p>
+            <a:pPr algn="l"/>
+            <a:r>
+              <a:rPr sz="1100" b="0" i="0">
+                <a:solidFill>
+                  <a:srgbClr val="4B5563"/>
+                </a:solidFill>
+                <a:latin typeface="Calibri"/>
+              </a:rPr>
+              <a:t>Vê o calendário semanal completo em Cowork. Aprova em batch, ajusta variantes, ou rejeita.</a:t>
+            </a:r>
+          </a:p>
+        </p:txBody>
+      </p:sp>
+      <p:sp>
+        <p:nvSpPr>
+          <p:cNvPr id="33" name="TextBox 32"/>
+          <p:cNvSpPr txBox="1"/>
+          <p:nvPr/>
+        </p:nvSpPr>
+        <p:spPr>
+          <a:xfrm>
+            <a:off x="9582911" y="8275319"/>
+            <a:ext cx="1993391" cy="274320"/>
+          </a:xfrm>
+          <a:prstGeom prst="rect">
+            <a:avLst/>
+          </a:prstGeom>
+          <a:noFill/>
+        </p:spPr>
+        <p:txBody>
+          <a:bodyPr wrap="square" lIns="0" rIns="0" tIns="0" bIns="0" anchor="t">
+            <a:spAutoFit/>
+          </a:bodyPr>
+          <a:lstStyle/>
+          <a:p>
+            <a:pPr algn="l"/>
+            <a:r>
+              <a:rPr sz="900" b="0" i="0" spc="80">
+                <a:solidFill>
+                  <a:srgbClr val="FF8449"/>
+                </a:solidFill>
+                <a:latin typeface="Calibri"/>
+              </a:rPr>
+              <a:t>GATE</a:t>
+            </a:r>
+          </a:p>
+        </p:txBody>
+      </p:sp>
+      <p:sp>
+        <p:nvSpPr>
+          <p:cNvPr id="34" name="Right Arrow 33"/>
+          <p:cNvSpPr/>
+          <p:nvPr/>
+        </p:nvSpPr>
+        <p:spPr>
+          <a:xfrm>
+            <a:off x="11868911" y="6099048"/>
+            <a:ext cx="219456" cy="237744"/>
+          </a:xfrm>
+          <a:prstGeom prst="rightArrow">
+            <a:avLst/>
+          </a:prstGeom>
+          <a:solidFill>
+            <a:srgbClr val="FF8449"/>
+          </a:solidFill>
+          <a:ln>
+            <a:noFill/>
+          </a:ln>
+          <a:effectLst/>
+        </p:spPr>
+        <p:style>
+          <a:lnRef idx="1">
+            <a:schemeClr val="accent1"/>
+          </a:lnRef>
+          <a:fillRef idx="3">
+            <a:schemeClr val="accent1"/>
+          </a:fillRef>
+          <a:effectRef idx="2">
+            <a:schemeClr val="accent1"/>
+          </a:effectRef>
+          <a:fontRef idx="minor">
+            <a:schemeClr val="lt1"/>
+          </a:fontRef>
+        </p:style>
+        <p:txBody>
+          <a:bodyPr rtlCol="0" anchor="ctr"/>
+          <a:lstStyle/>
+          <a:p>
+            <a:pPr algn="ctr"/>
+          </a:p>
+        </p:txBody>
+      </p:sp>
+      <p:sp>
+        <p:nvSpPr>
+          <p:cNvPr id="35" name="Rounded Rectangle 34"/>
+          <p:cNvSpPr/>
+          <p:nvPr/>
+        </p:nvSpPr>
+        <p:spPr>
+          <a:xfrm>
+            <a:off x="12124943" y="3657600"/>
+            <a:ext cx="2542032" cy="5120640"/>
+          </a:xfrm>
+          <a:prstGeom prst="roundRect">
+            <a:avLst>
+              <a:gd name="adj" fmla="val 5000"/>
+            </a:avLst>
+          </a:prstGeom>
+          <a:solidFill>
+            <a:srgbClr val="FFFFFF"/>
+          </a:solidFill>
+          <a:ln>
+            <a:noFill/>
+          </a:ln>
+          <a:effectLst/>
+        </p:spPr>
+        <p:style>
+          <a:lnRef idx="1">
+            <a:schemeClr val="accent1"/>
+          </a:lnRef>
+          <a:fillRef idx="3">
+            <a:schemeClr val="accent1"/>
+          </a:fillRef>
+          <a:effectRef idx="2">
+            <a:schemeClr val="accent1"/>
+          </a:effectRef>
+          <a:fontRef idx="minor">
+            <a:schemeClr val="lt1"/>
+          </a:fontRef>
+        </p:style>
+        <p:txBody>
+          <a:bodyPr rtlCol="0" anchor="ctr"/>
+          <a:lstStyle/>
+          <a:p>
+            <a:pPr algn="ctr"/>
+          </a:p>
+        </p:txBody>
+      </p:sp>
+      <p:sp>
+        <p:nvSpPr>
+          <p:cNvPr id="36" name="TextBox 35"/>
+          <p:cNvSpPr txBox="1"/>
+          <p:nvPr/>
+        </p:nvSpPr>
+        <p:spPr>
+          <a:xfrm>
+            <a:off x="12417551" y="3950208"/>
+            <a:ext cx="2084831" cy="502920"/>
+          </a:xfrm>
+          <a:prstGeom prst="rect">
+            <a:avLst/>
+          </a:prstGeom>
+          <a:noFill/>
+        </p:spPr>
+        <p:txBody>
+          <a:bodyPr wrap="square" lIns="0" rIns="0" tIns="0" bIns="0" anchor="t">
+            <a:spAutoFit/>
+          </a:bodyPr>
+          <a:lstStyle/>
+          <a:p>
+            <a:pPr algn="l"/>
+            <a:r>
+              <a:rPr sz="3000" b="0" i="0">
+                <a:solidFill>
+                  <a:srgbClr val="FF8449"/>
+                </a:solidFill>
+                <a:latin typeface="Georgia"/>
+              </a:rPr>
+              <a:t>05</a:t>
+            </a:r>
+          </a:p>
+        </p:txBody>
+      </p:sp>
+      <p:sp>
+        <p:nvSpPr>
+          <p:cNvPr id="37" name="TextBox 36"/>
+          <p:cNvSpPr txBox="1"/>
+          <p:nvPr/>
+        </p:nvSpPr>
+        <p:spPr>
+          <a:xfrm>
+            <a:off x="12417551" y="4617720"/>
+            <a:ext cx="1993391" cy="868680"/>
+          </a:xfrm>
+          <a:prstGeom prst="rect">
+            <a:avLst/>
+          </a:prstGeom>
+          <a:noFill/>
+        </p:spPr>
+        <p:txBody>
+          <a:bodyPr wrap="square" lIns="0" rIns="0" tIns="0" bIns="0" anchor="t">
+            <a:spAutoFit/>
+          </a:bodyPr>
+          <a:lstStyle/>
+          <a:p>
+            <a:pPr algn="l"/>
+            <a:r>
+              <a:rPr sz="1700" b="0" i="0">
+                <a:solidFill>
+                  <a:srgbClr val="2D2D2D"/>
+                </a:solidFill>
+                <a:latin typeface="Georgia"/>
+              </a:rPr>
+              <a:t>Code agenda + publica</a:t>
+            </a:r>
+          </a:p>
+        </p:txBody>
+      </p:sp>
+      <p:cxnSp>
+        <p:nvCxnSpPr>
+          <p:cNvPr id="38" name="Connector 37"/>
+          <p:cNvCxnSpPr/>
+          <p:nvPr/>
+        </p:nvCxnSpPr>
+        <p:spPr>
+          <a:xfrm>
+            <a:off x="12417551" y="5623560"/>
+            <a:ext cx="1956816" cy="0"/>
+          </a:xfrm>
+          <a:prstGeom prst="line">
+            <a:avLst/>
+          </a:prstGeom>
+          <a:ln w="9525">
+            <a:solidFill>
+              <a:srgbClr val="E5E7EB"/>
+            </a:solidFill>
+          </a:ln>
+        </p:spPr>
+        <p:style>
+          <a:lnRef idx="2">
+            <a:schemeClr val="accent1"/>
+          </a:lnRef>
+          <a:fillRef idx="0">
+            <a:schemeClr val="accent1"/>
+          </a:fillRef>
+          <a:effectRef idx="1">
+            <a:schemeClr val="accent1"/>
+          </a:effectRef>
+          <a:fontRef idx="minor">
+            <a:schemeClr val="tx1"/>
+          </a:fontRef>
+        </p:style>
+      </p:cxnSp>
+      <p:sp>
+        <p:nvSpPr>
+          <p:cNvPr id="39" name="TextBox 38"/>
+          <p:cNvSpPr txBox="1"/>
+          <p:nvPr/>
+        </p:nvSpPr>
+        <p:spPr>
+          <a:xfrm>
+            <a:off x="12417551" y="5760720"/>
+            <a:ext cx="1993391" cy="2377439"/>
+          </a:xfrm>
+          <a:prstGeom prst="rect">
+            <a:avLst/>
+          </a:prstGeom>
+          <a:noFill/>
+        </p:spPr>
+        <p:txBody>
+          <a:bodyPr wrap="square" lIns="0" rIns="0" tIns="0" bIns="0" anchor="t">
+            <a:spAutoFit/>
+          </a:bodyPr>
+          <a:lstStyle/>
+          <a:p>
+            <a:pPr algn="l"/>
+            <a:r>
+              <a:rPr sz="1100" b="0" i="0">
+                <a:solidFill>
+                  <a:srgbClr val="4B5563"/>
+                </a:solidFill>
+                <a:latin typeface="Calibri"/>
+              </a:rPr>
+              <a:t>Calendário publicado pelo Code daemon via Meta Graph API + GMB API. Horários otimizados por canal.</a:t>
+            </a:r>
+          </a:p>
+        </p:txBody>
+      </p:sp>
+      <p:sp>
+        <p:nvSpPr>
+          <p:cNvPr id="40" name="TextBox 39"/>
+          <p:cNvSpPr txBox="1"/>
+          <p:nvPr/>
+        </p:nvSpPr>
+        <p:spPr>
+          <a:xfrm>
+            <a:off x="12417551" y="8275319"/>
+            <a:ext cx="1993391" cy="274320"/>
+          </a:xfrm>
+          <a:prstGeom prst="rect">
+            <a:avLst/>
+          </a:prstGeom>
+          <a:noFill/>
+        </p:spPr>
+        <p:txBody>
+          <a:bodyPr wrap="square" lIns="0" rIns="0" tIns="0" bIns="0" anchor="t">
+            <a:spAutoFit/>
+          </a:bodyPr>
+          <a:lstStyle/>
+          <a:p>
+            <a:pPr algn="l"/>
+            <a:r>
+              <a:rPr sz="900" b="0" i="0" spc="80">
+                <a:solidFill>
+                  <a:srgbClr val="FF8449"/>
+                </a:solidFill>
+                <a:latin typeface="Calibri"/>
+              </a:rPr>
+              <a:t>PUBLISH</a:t>
+            </a:r>
+          </a:p>
+        </p:txBody>
+      </p:sp>
+      <p:sp>
+        <p:nvSpPr>
+          <p:cNvPr id="41" name="Right Arrow 40"/>
+          <p:cNvSpPr/>
+          <p:nvPr/>
+        </p:nvSpPr>
+        <p:spPr>
+          <a:xfrm>
+            <a:off x="14703551" y="6099048"/>
+            <a:ext cx="219456" cy="237744"/>
+          </a:xfrm>
+          <a:prstGeom prst="rightArrow">
+            <a:avLst/>
+          </a:prstGeom>
+          <a:solidFill>
+            <a:srgbClr val="FF8449"/>
+          </a:solidFill>
+          <a:ln>
+            <a:noFill/>
+          </a:ln>
+          <a:effectLst/>
+        </p:spPr>
+        <p:style>
+          <a:lnRef idx="1">
+            <a:schemeClr val="accent1"/>
+          </a:lnRef>
+          <a:fillRef idx="3">
+            <a:schemeClr val="accent1"/>
+          </a:fillRef>
+          <a:effectRef idx="2">
+            <a:schemeClr val="accent1"/>
+          </a:effectRef>
+          <a:fontRef idx="minor">
+            <a:schemeClr val="lt1"/>
+          </a:fontRef>
+        </p:style>
+        <p:txBody>
+          <a:bodyPr rtlCol="0" anchor="ctr"/>
+          <a:lstStyle/>
+          <a:p>
+            <a:pPr algn="ctr"/>
+          </a:p>
+        </p:txBody>
+      </p:sp>
+      <p:sp>
+        <p:nvSpPr>
+          <p:cNvPr id="42" name="Rounded Rectangle 41"/>
+          <p:cNvSpPr/>
+          <p:nvPr/>
+        </p:nvSpPr>
+        <p:spPr>
+          <a:xfrm>
+            <a:off x="14959584" y="3657600"/>
+            <a:ext cx="2542032" cy="5120640"/>
+          </a:xfrm>
+          <a:prstGeom prst="roundRect">
+            <a:avLst>
+              <a:gd name="adj" fmla="val 5000"/>
+            </a:avLst>
+          </a:prstGeom>
+          <a:solidFill>
+            <a:srgbClr val="FFFFFF"/>
+          </a:solidFill>
+          <a:ln>
+            <a:noFill/>
+          </a:ln>
+          <a:effectLst/>
+        </p:spPr>
+        <p:style>
+          <a:lnRef idx="1">
+            <a:schemeClr val="accent1"/>
+          </a:lnRef>
+          <a:fillRef idx="3">
+            <a:schemeClr val="accent1"/>
+          </a:fillRef>
+          <a:effectRef idx="2">
+            <a:schemeClr val="accent1"/>
+          </a:effectRef>
+          <a:fontRef idx="minor">
+            <a:schemeClr val="lt1"/>
+          </a:fontRef>
+        </p:style>
+        <p:txBody>
+          <a:bodyPr rtlCol="0" anchor="ctr"/>
+          <a:lstStyle/>
+          <a:p>
+            <a:pPr algn="ctr"/>
+          </a:p>
+        </p:txBody>
+      </p:sp>
+      <p:sp>
+        <p:nvSpPr>
+          <p:cNvPr id="43" name="TextBox 42"/>
+          <p:cNvSpPr txBox="1"/>
+          <p:nvPr/>
+        </p:nvSpPr>
+        <p:spPr>
+          <a:xfrm>
+            <a:off x="15252192" y="3950208"/>
+            <a:ext cx="2084831" cy="502920"/>
+          </a:xfrm>
+          <a:prstGeom prst="rect">
+            <a:avLst/>
+          </a:prstGeom>
+          <a:noFill/>
+        </p:spPr>
+        <p:txBody>
+          <a:bodyPr wrap="square" lIns="0" rIns="0" tIns="0" bIns="0" anchor="t">
+            <a:spAutoFit/>
+          </a:bodyPr>
+          <a:lstStyle/>
+          <a:p>
+            <a:pPr algn="l"/>
+            <a:r>
+              <a:rPr sz="3000" b="0" i="0">
+                <a:solidFill>
+                  <a:srgbClr val="FF8449"/>
+                </a:solidFill>
+                <a:latin typeface="Georgia"/>
+              </a:rPr>
+              <a:t>06</a:t>
+            </a:r>
+          </a:p>
+        </p:txBody>
+      </p:sp>
+      <p:sp>
+        <p:nvSpPr>
+          <p:cNvPr id="44" name="TextBox 43"/>
+          <p:cNvSpPr txBox="1"/>
+          <p:nvPr/>
+        </p:nvSpPr>
+        <p:spPr>
+          <a:xfrm>
+            <a:off x="15252192" y="4617720"/>
+            <a:ext cx="1993391" cy="868680"/>
+          </a:xfrm>
+          <a:prstGeom prst="rect">
+            <a:avLst/>
+          </a:prstGeom>
+          <a:noFill/>
+        </p:spPr>
+        <p:txBody>
+          <a:bodyPr wrap="square" lIns="0" rIns="0" tIns="0" bIns="0" anchor="t">
+            <a:spAutoFit/>
+          </a:bodyPr>
+          <a:lstStyle/>
+          <a:p>
+            <a:pPr algn="l"/>
+            <a:r>
+              <a:rPr sz="1700" b="0" i="0">
+                <a:solidFill>
+                  <a:srgbClr val="2D2D2D"/>
+                </a:solidFill>
+                <a:latin typeface="Georgia"/>
+              </a:rPr>
+              <a:t>Engagement volta</a:t>
+            </a:r>
+          </a:p>
+        </p:txBody>
+      </p:sp>
+      <p:cxnSp>
+        <p:nvCxnSpPr>
+          <p:cNvPr id="45" name="Connector 44"/>
+          <p:cNvCxnSpPr/>
+          <p:nvPr/>
+        </p:nvCxnSpPr>
+        <p:spPr>
+          <a:xfrm>
+            <a:off x="15252192" y="5623560"/>
+            <a:ext cx="1956816" cy="0"/>
+          </a:xfrm>
+          <a:prstGeom prst="line">
+            <a:avLst/>
+          </a:prstGeom>
+          <a:ln w="9525">
+            <a:solidFill>
+              <a:srgbClr val="E5E7EB"/>
+            </a:solidFill>
+          </a:ln>
+        </p:spPr>
+        <p:style>
+          <a:lnRef idx="2">
+            <a:schemeClr val="accent1"/>
+          </a:lnRef>
+          <a:fillRef idx="0">
+            <a:schemeClr val="accent1"/>
+          </a:fillRef>
+          <a:effectRef idx="1">
+            <a:schemeClr val="accent1"/>
+          </a:effectRef>
+          <a:fontRef idx="minor">
+            <a:schemeClr val="tx1"/>
+          </a:fontRef>
+        </p:style>
+      </p:cxnSp>
+      <p:sp>
+        <p:nvSpPr>
+          <p:cNvPr id="46" name="TextBox 45"/>
+          <p:cNvSpPr txBox="1"/>
+          <p:nvPr/>
+        </p:nvSpPr>
+        <p:spPr>
+          <a:xfrm>
+            <a:off x="15252192" y="5760720"/>
+            <a:ext cx="1993391" cy="2377439"/>
+          </a:xfrm>
+          <a:prstGeom prst="rect">
+            <a:avLst/>
+          </a:prstGeom>
+          <a:noFill/>
+        </p:spPr>
+        <p:txBody>
+          <a:bodyPr wrap="square" lIns="0" rIns="0" tIns="0" bIns="0" anchor="t">
+            <a:spAutoFit/>
+          </a:bodyPr>
+          <a:lstStyle/>
+          <a:p>
+            <a:pPr algn="l"/>
+            <a:r>
+              <a:rPr sz="1100" b="0" i="0">
+                <a:solidFill>
+                  <a:srgbClr val="4B5563"/>
+                </a:solidFill>
+                <a:latin typeface="Calibri"/>
+              </a:rPr>
+              <a:t>Likes, comentários, mensagens DM, novos seguidores — tudo logged. Alimenta a pesquisa da semana seguinte.</a:t>
+            </a:r>
+          </a:p>
+        </p:txBody>
+      </p:sp>
+      <p:sp>
+        <p:nvSpPr>
+          <p:cNvPr id="47" name="TextBox 46"/>
+          <p:cNvSpPr txBox="1"/>
+          <p:nvPr/>
+        </p:nvSpPr>
+        <p:spPr>
+          <a:xfrm>
+            <a:off x="15252192" y="8275319"/>
+            <a:ext cx="1993391" cy="274320"/>
+          </a:xfrm>
+          <a:prstGeom prst="rect">
+            <a:avLst/>
+          </a:prstGeom>
+          <a:noFill/>
+        </p:spPr>
+        <p:txBody>
+          <a:bodyPr wrap="square" lIns="0" rIns="0" tIns="0" bIns="0" anchor="t">
+            <a:spAutoFit/>
+          </a:bodyPr>
+          <a:lstStyle/>
+          <a:p>
+            <a:pPr algn="l"/>
+            <a:r>
+              <a:rPr sz="900" b="0" i="0" spc="80">
+                <a:solidFill>
+                  <a:srgbClr val="FF8449"/>
+                </a:solidFill>
+                <a:latin typeface="Calibri"/>
+              </a:rPr>
+              <a:t>LEARN</a:t>
+            </a:r>
+          </a:p>
+        </p:txBody>
+      </p:sp>
+      <p:sp>
+        <p:nvSpPr>
+          <p:cNvPr id="48" name="TextBox 47"/>
+          <p:cNvSpPr txBox="1"/>
+          <p:nvPr/>
+        </p:nvSpPr>
+        <p:spPr>
+          <a:xfrm>
+            <a:off x="914400" y="9144000"/>
+            <a:ext cx="16459200" cy="640080"/>
+          </a:xfrm>
+          <a:prstGeom prst="rect">
+            <a:avLst/>
+          </a:prstGeom>
+          <a:noFill/>
+        </p:spPr>
+        <p:txBody>
+          <a:bodyPr wrap="square" lIns="0" rIns="0" tIns="0" bIns="0" anchor="t">
+            <a:spAutoFit/>
+          </a:bodyPr>
+          <a:lstStyle/>
+          <a:p>
+            <a:pPr algn="l"/>
+            <a:r>
+              <a:rPr sz="1300" b="0" i="1">
+                <a:solidFill>
+                  <a:srgbClr val="4B5563"/>
+                </a:solidFill>
+                <a:latin typeface="Georgia"/>
+              </a:rPr>
+              <a:t>A clínica deixa de depender da Sara escrever posts no meio das consultas — passa a ter uma operação editorial semanal.</a:t>
+            </a:r>
+          </a:p>
+        </p:txBody>
+      </p:sp>
+      <p:sp>
+        <p:nvSpPr>
+          <p:cNvPr id="49" name="TextBox 48"/>
+          <p:cNvSpPr txBox="1"/>
+          <p:nvPr/>
+        </p:nvSpPr>
+        <p:spPr>
+          <a:xfrm>
+            <a:off x="914400" y="9738360"/>
+            <a:ext cx="10972800" cy="228600"/>
+          </a:xfrm>
+          <a:prstGeom prst="rect">
+            <a:avLst/>
+          </a:prstGeom>
+          <a:noFill/>
+        </p:spPr>
+        <p:txBody>
+          <a:bodyPr wrap="square" lIns="0" rIns="0" tIns="0" bIns="0" anchor="t">
+            <a:spAutoFit/>
+          </a:bodyPr>
+          <a:lstStyle/>
+          <a:p>
+            <a:pPr algn="l"/>
+            <a:r>
+              <a:rPr sz="975" b="0" i="0" spc="40">
+                <a:solidFill>
+                  <a:srgbClr val="6B7280"/>
+                </a:solidFill>
+                <a:latin typeface="Calibri"/>
+              </a:rPr>
+              <a:t>PROCESS FLOW · 10 · CLÍNICA DA SARA</a:t>
+            </a:r>
+          </a:p>
+        </p:txBody>
+      </p:sp>
+      <p:sp>
+        <p:nvSpPr>
+          <p:cNvPr id="50" name="TextBox 49"/>
+          <p:cNvSpPr txBox="1"/>
+          <p:nvPr/>
+        </p:nvSpPr>
+        <p:spPr>
+          <a:xfrm>
+            <a:off x="15544800" y="9738360"/>
+            <a:ext cx="914400" cy="228600"/>
+          </a:xfrm>
+          <a:prstGeom prst="rect">
+            <a:avLst/>
+          </a:prstGeom>
+          <a:noFill/>
+        </p:spPr>
+        <p:txBody>
+          <a:bodyPr wrap="square" lIns="0" rIns="0" tIns="0" bIns="0" anchor="t">
+            <a:spAutoFit/>
+          </a:bodyPr>
+          <a:lstStyle/>
+          <a:p>
+            <a:pPr algn="r"/>
+            <a:r>
+              <a:rPr sz="975" b="0" i="0" spc="40">
+                <a:solidFill>
+                  <a:srgbClr val="6B7280"/>
+                </a:solidFill>
+                <a:latin typeface="Calibri"/>
+              </a:rPr>
+              <a:t>11 / 14</a:t>
+            </a:r>
+          </a:p>
+        </p:txBody>
+      </p:sp>
+      <p:sp>
+        <p:nvSpPr>
+          <p:cNvPr id="51" name="TextBox 50"/>
+          <p:cNvSpPr txBox="1"/>
+          <p:nvPr/>
+        </p:nvSpPr>
+        <p:spPr>
+          <a:xfrm>
+            <a:off x="16459200" y="9710928"/>
+            <a:ext cx="1645920" cy="274320"/>
+          </a:xfrm>
+          <a:prstGeom prst="rect">
+            <a:avLst/>
+          </a:prstGeom>
+          <a:noFill/>
+        </p:spPr>
+        <p:txBody>
+          <a:bodyPr wrap="square" lIns="0" rIns="0" tIns="0" bIns="0" anchor="t">
+            <a:spAutoFit/>
+          </a:bodyPr>
+          <a:lstStyle/>
+          <a:p>
+            <a:pPr algn="r"/>
+            <a:r>
+              <a:rPr sz="1000" b="1" i="0">
+                <a:solidFill>
+                  <a:srgbClr val="FF8449"/>
+                </a:solidFill>
+                <a:latin typeface="Georgia"/>
+              </a:rPr>
+              <a:t>OBLQ · AI</a:t>
+            </a:r>
+          </a:p>
+        </p:txBody>
+      </p:sp>
+    </p:spTree>
+  </p:cSld>
+  <p:clrMapOvr>
+    <a:masterClrMapping/>
+  </p:clrMapOvr>
+</p:sld>
+</file>
+
+<file path=ppt/slides/slide12.xml><?xml version="1.0" encoding="utf-8"?>
+<p:sld xmlns:a="http://schemas.openxmlformats.org/drawingml/2006/main" xmlns:p="http://schemas.openxmlformats.org/presentationml/2006/main" xmlns:r="http://schemas.openxmlformats.org/officeDocument/2006/relationships">
+  <p:cSld>
+    <p:bg>
+      <p:bgPr>
+        <a:solidFill>
+          <a:srgbClr val="F7F1E8"/>
+        </a:solidFill>
+        <a:effectLst/>
+      </p:bgPr>
+    </p:bg>
+    <p:spTree>
+      <p:nvGrpSpPr>
+        <p:cNvPr id="1" name=""/>
+        <p:cNvGrpSpPr/>
+        <p:nvPr/>
+      </p:nvGrpSpPr>
+      <p:grpSpPr/>
+      <p:sp>
+        <p:nvSpPr>
+          <p:cNvPr id="2" name="TextBox 1"/>
+          <p:cNvSpPr txBox="1"/>
+          <p:nvPr/>
+        </p:nvSpPr>
+        <p:spPr>
+          <a:xfrm>
+            <a:off x="914400" y="914400"/>
+            <a:ext cx="16459200" cy="274320"/>
+          </a:xfrm>
+          <a:prstGeom prst="rect">
+            <a:avLst/>
+          </a:prstGeom>
+          <a:noFill/>
+        </p:spPr>
+        <p:txBody>
+          <a:bodyPr wrap="square" lIns="0" rIns="0" tIns="0" bIns="0" anchor="t">
+            <a:spAutoFit/>
+          </a:bodyPr>
+          <a:lstStyle/>
+          <a:p>
+            <a:pPr algn="l"/>
+            <a:r>
+              <a:rPr sz="1350" b="0" i="0" spc="80">
+                <a:solidFill>
+                  <a:srgbClr val="FF8449"/>
+                </a:solidFill>
+                <a:latin typeface="Calibri"/>
+              </a:rPr>
+              <a:t>PROCESS FLOW · 11</a:t>
+            </a:r>
+          </a:p>
+        </p:txBody>
+      </p:sp>
+      <p:sp>
+        <p:nvSpPr>
+          <p:cNvPr id="3" name="TextBox 2"/>
+          <p:cNvSpPr txBox="1"/>
+          <p:nvPr/>
+        </p:nvSpPr>
+        <p:spPr>
+          <a:xfrm>
+            <a:off x="914400" y="1280160"/>
+            <a:ext cx="16459200" cy="914400"/>
+          </a:xfrm>
+          <a:prstGeom prst="rect">
+            <a:avLst/>
+          </a:prstGeom>
+          <a:noFill/>
+        </p:spPr>
+        <p:txBody>
+          <a:bodyPr wrap="square" lIns="0" rIns="0" tIns="0" bIns="0" anchor="t">
+            <a:spAutoFit/>
+          </a:bodyPr>
+          <a:lstStyle/>
+          <a:p>
+            <a:pPr algn="l"/>
+            <a:r>
+              <a:rPr sz="3800" b="0" i="0">
+                <a:solidFill>
+                  <a:srgbClr val="2D2D2D"/>
+                </a:solidFill>
+                <a:latin typeface="Georgia"/>
+              </a:rPr>
+              <a:t>Como os anúncios Google e Meta correm sem dashboard.</a:t>
+            </a:r>
+          </a:p>
+        </p:txBody>
+      </p:sp>
+      <p:sp>
+        <p:nvSpPr>
+          <p:cNvPr id="4" name="TextBox 3"/>
+          <p:cNvSpPr txBox="1"/>
+          <p:nvPr/>
+        </p:nvSpPr>
+        <p:spPr>
+          <a:xfrm>
+            <a:off x="914400" y="2331720"/>
+            <a:ext cx="15544800" cy="640080"/>
+          </a:xfrm>
+          <a:prstGeom prst="rect">
+            <a:avLst/>
+          </a:prstGeom>
+          <a:noFill/>
+        </p:spPr>
+        <p:txBody>
+          <a:bodyPr wrap="square" lIns="0" rIns="0" tIns="0" bIns="0" anchor="t">
+            <a:spAutoFit/>
+          </a:bodyPr>
+          <a:lstStyle/>
+          <a:p>
+            <a:pPr algn="l"/>
+            <a:r>
+              <a:rPr sz="1600" b="0" i="1">
+                <a:solidFill>
+                  <a:srgbClr val="4B5563"/>
+                </a:solidFill>
+                <a:latin typeface="Georgia"/>
+              </a:rPr>
+              <a:t>P6 e P7 partilham este fluxo. Cowork aprova; Code executa, monitoriza e afina. A Sara nunca abre o Google Ads ou o Gestor de Anúncios da Meta.</a:t>
+            </a:r>
+          </a:p>
+        </p:txBody>
+      </p:sp>
+      <p:sp>
+        <p:nvSpPr>
+          <p:cNvPr id="5" name="Rounded Rectangle 4"/>
+          <p:cNvSpPr/>
+          <p:nvPr/>
+        </p:nvSpPr>
+        <p:spPr>
+          <a:xfrm>
+            <a:off x="14173200" y="914400"/>
+            <a:ext cx="3200400" cy="457200"/>
+          </a:xfrm>
+          <a:prstGeom prst="roundRect">
+            <a:avLst>
+              <a:gd name="adj" fmla="val 25000"/>
+            </a:avLst>
+          </a:prstGeom>
+          <a:solidFill>
+            <a:srgbClr val="000000"/>
+          </a:solidFill>
+          <a:ln>
+            <a:noFill/>
+          </a:ln>
+          <a:effectLst/>
+        </p:spPr>
+        <p:style>
+          <a:lnRef idx="1">
+            <a:schemeClr val="accent1"/>
+          </a:lnRef>
+          <a:fillRef idx="3">
+            <a:schemeClr val="accent1"/>
+          </a:fillRef>
+          <a:effectRef idx="2">
+            <a:schemeClr val="accent1"/>
+          </a:effectRef>
+          <a:fontRef idx="minor">
+            <a:schemeClr val="lt1"/>
+          </a:fontRef>
+        </p:style>
+        <p:txBody>
+          <a:bodyPr rtlCol="0" anchor="ctr"/>
+          <a:lstStyle/>
+          <a:p>
+            <a:pPr algn="ctr"/>
+          </a:p>
+        </p:txBody>
+      </p:sp>
+      <p:sp>
+        <p:nvSpPr>
+          <p:cNvPr id="6" name="TextBox 5"/>
+          <p:cNvSpPr txBox="1"/>
+          <p:nvPr/>
+        </p:nvSpPr>
+        <p:spPr>
+          <a:xfrm>
+            <a:off x="14173200" y="987552"/>
+            <a:ext cx="3200400" cy="365760"/>
+          </a:xfrm>
+          <a:prstGeom prst="rect">
+            <a:avLst/>
+          </a:prstGeom>
+          <a:noFill/>
+        </p:spPr>
+        <p:txBody>
+          <a:bodyPr wrap="square" lIns="0" rIns="0" tIns="0" bIns="0" anchor="t">
+            <a:spAutoFit/>
+          </a:bodyPr>
+          <a:lstStyle/>
+          <a:p>
+            <a:pPr algn="ctr"/>
+            <a:r>
+              <a:rPr sz="1000" b="0" i="0" spc="80">
+                <a:solidFill>
+                  <a:srgbClr val="FFFFFF"/>
+                </a:solidFill>
+                <a:latin typeface="Calibri"/>
+              </a:rPr>
+              <a:t>RUNTIME · CODE + COWORK</a:t>
+            </a:r>
+          </a:p>
+        </p:txBody>
+      </p:sp>
+      <p:sp>
+        <p:nvSpPr>
+          <p:cNvPr id="7" name="Rounded Rectangle 6"/>
+          <p:cNvSpPr/>
+          <p:nvPr/>
+        </p:nvSpPr>
+        <p:spPr>
+          <a:xfrm>
+            <a:off x="786383" y="3657600"/>
+            <a:ext cx="2542032" cy="5120640"/>
+          </a:xfrm>
+          <a:prstGeom prst="roundRect">
+            <a:avLst>
+              <a:gd name="adj" fmla="val 5000"/>
+            </a:avLst>
+          </a:prstGeom>
+          <a:solidFill>
+            <a:srgbClr val="FFFFFF"/>
+          </a:solidFill>
+          <a:ln>
+            <a:noFill/>
+          </a:ln>
+          <a:effectLst/>
+        </p:spPr>
+        <p:style>
+          <a:lnRef idx="1">
+            <a:schemeClr val="accent1"/>
+          </a:lnRef>
+          <a:fillRef idx="3">
+            <a:schemeClr val="accent1"/>
+          </a:fillRef>
+          <a:effectRef idx="2">
+            <a:schemeClr val="accent1"/>
+          </a:effectRef>
+          <a:fontRef idx="minor">
+            <a:schemeClr val="lt1"/>
+          </a:fontRef>
+        </p:style>
+        <p:txBody>
+          <a:bodyPr rtlCol="0" anchor="ctr"/>
+          <a:lstStyle/>
+          <a:p>
+            <a:pPr algn="ctr"/>
+          </a:p>
+        </p:txBody>
+      </p:sp>
+      <p:sp>
+        <p:nvSpPr>
+          <p:cNvPr id="8" name="TextBox 7"/>
+          <p:cNvSpPr txBox="1"/>
+          <p:nvPr/>
+        </p:nvSpPr>
+        <p:spPr>
+          <a:xfrm>
+            <a:off x="1078991" y="3950208"/>
+            <a:ext cx="2084831" cy="502920"/>
+          </a:xfrm>
+          <a:prstGeom prst="rect">
+            <a:avLst/>
+          </a:prstGeom>
+          <a:noFill/>
+        </p:spPr>
+        <p:txBody>
+          <a:bodyPr wrap="square" lIns="0" rIns="0" tIns="0" bIns="0" anchor="t">
+            <a:spAutoFit/>
+          </a:bodyPr>
+          <a:lstStyle/>
+          <a:p>
+            <a:pPr algn="l"/>
+            <a:r>
+              <a:rPr sz="3000" b="0" i="0">
+                <a:solidFill>
+                  <a:srgbClr val="FF8449"/>
+                </a:solidFill>
+                <a:latin typeface="Georgia"/>
+              </a:rPr>
+              <a:t>01</a:t>
+            </a:r>
+          </a:p>
+        </p:txBody>
+      </p:sp>
+      <p:sp>
+        <p:nvSpPr>
+          <p:cNvPr id="9" name="TextBox 8"/>
+          <p:cNvSpPr txBox="1"/>
+          <p:nvPr/>
+        </p:nvSpPr>
+        <p:spPr>
+          <a:xfrm>
+            <a:off x="1078991" y="4617720"/>
+            <a:ext cx="1993391" cy="868680"/>
+          </a:xfrm>
+          <a:prstGeom prst="rect">
+            <a:avLst/>
+          </a:prstGeom>
+          <a:noFill/>
+        </p:spPr>
+        <p:txBody>
+          <a:bodyPr wrap="square" lIns="0" rIns="0" tIns="0" bIns="0" anchor="t">
+            <a:spAutoFit/>
+          </a:bodyPr>
+          <a:lstStyle/>
+          <a:p>
+            <a:pPr algn="l"/>
+            <a:r>
+              <a:rPr sz="1700" b="0" i="0">
+                <a:solidFill>
+                  <a:srgbClr val="2D2D2D"/>
+                </a:solidFill>
+                <a:latin typeface="Georgia"/>
+              </a:rPr>
+              <a:t>Cowork propõe</a:t>
+            </a:r>
+          </a:p>
+        </p:txBody>
+      </p:sp>
+      <p:cxnSp>
+        <p:nvCxnSpPr>
+          <p:cNvPr id="10" name="Connector 9"/>
+          <p:cNvCxnSpPr/>
+          <p:nvPr/>
+        </p:nvCxnSpPr>
+        <p:spPr>
+          <a:xfrm>
+            <a:off x="1078991" y="5623560"/>
+            <a:ext cx="1956816" cy="0"/>
+          </a:xfrm>
+          <a:prstGeom prst="line">
+            <a:avLst/>
+          </a:prstGeom>
+          <a:ln w="9525">
+            <a:solidFill>
+              <a:srgbClr val="E5E7EB"/>
+            </a:solidFill>
+          </a:ln>
+        </p:spPr>
+        <p:style>
+          <a:lnRef idx="2">
+            <a:schemeClr val="accent1"/>
+          </a:lnRef>
+          <a:fillRef idx="0">
+            <a:schemeClr val="accent1"/>
+          </a:fillRef>
+          <a:effectRef idx="1">
+            <a:schemeClr val="accent1"/>
+          </a:effectRef>
+          <a:fontRef idx="minor">
+            <a:schemeClr val="tx1"/>
+          </a:fontRef>
+        </p:style>
+      </p:cxnSp>
+      <p:sp>
+        <p:nvSpPr>
+          <p:cNvPr id="11" name="TextBox 10"/>
+          <p:cNvSpPr txBox="1"/>
+          <p:nvPr/>
+        </p:nvSpPr>
+        <p:spPr>
+          <a:xfrm>
+            <a:off x="1078991" y="5760720"/>
+            <a:ext cx="1993391" cy="2377439"/>
+          </a:xfrm>
+          <a:prstGeom prst="rect">
+            <a:avLst/>
+          </a:prstGeom>
+          <a:noFill/>
+        </p:spPr>
+        <p:txBody>
+          <a:bodyPr wrap="square" lIns="0" rIns="0" tIns="0" bIns="0" anchor="t">
+            <a:spAutoFit/>
+          </a:bodyPr>
+          <a:lstStyle/>
+          <a:p>
+            <a:pPr algn="l"/>
+            <a:r>
+              <a:rPr sz="1100" b="0" i="0">
+                <a:solidFill>
+                  <a:srgbClr val="4B5563"/>
+                </a:solidFill>
+                <a:latin typeface="Calibri"/>
+              </a:rPr>
+              <a:t>Campanhas: público, copy, criativos, palavras-chave (Google) ou interesses (Meta), orçamento, calendário.</a:t>
+            </a:r>
+          </a:p>
+        </p:txBody>
+      </p:sp>
+      <p:sp>
+        <p:nvSpPr>
+          <p:cNvPr id="12" name="TextBox 11"/>
+          <p:cNvSpPr txBox="1"/>
+          <p:nvPr/>
+        </p:nvSpPr>
+        <p:spPr>
+          <a:xfrm>
+            <a:off x="1078991" y="8275319"/>
+            <a:ext cx="1993391" cy="274320"/>
+          </a:xfrm>
+          <a:prstGeom prst="rect">
+            <a:avLst/>
+          </a:prstGeom>
+          <a:noFill/>
+        </p:spPr>
+        <p:txBody>
+          <a:bodyPr wrap="square" lIns="0" rIns="0" tIns="0" bIns="0" anchor="t">
+            <a:spAutoFit/>
+          </a:bodyPr>
+          <a:lstStyle/>
+          <a:p>
+            <a:pPr algn="l"/>
+            <a:r>
+              <a:rPr sz="900" b="0" i="0" spc="80">
+                <a:solidFill>
+                  <a:srgbClr val="FF8449"/>
+                </a:solidFill>
+                <a:latin typeface="Calibri"/>
+              </a:rPr>
+              <a:t>STRATEGY</a:t>
+            </a:r>
+          </a:p>
+        </p:txBody>
+      </p:sp>
+      <p:sp>
+        <p:nvSpPr>
+          <p:cNvPr id="13" name="Right Arrow 12"/>
+          <p:cNvSpPr/>
+          <p:nvPr/>
+        </p:nvSpPr>
+        <p:spPr>
+          <a:xfrm>
+            <a:off x="3364991" y="6099048"/>
+            <a:ext cx="219456" cy="237744"/>
+          </a:xfrm>
+          <a:prstGeom prst="rightArrow">
+            <a:avLst/>
+          </a:prstGeom>
+          <a:solidFill>
+            <a:srgbClr val="FF8449"/>
+          </a:solidFill>
+          <a:ln>
+            <a:noFill/>
+          </a:ln>
+          <a:effectLst/>
+        </p:spPr>
+        <p:style>
+          <a:lnRef idx="1">
+            <a:schemeClr val="accent1"/>
+          </a:lnRef>
+          <a:fillRef idx="3">
+            <a:schemeClr val="accent1"/>
+          </a:fillRef>
+          <a:effectRef idx="2">
+            <a:schemeClr val="accent1"/>
+          </a:effectRef>
+          <a:fontRef idx="minor">
+            <a:schemeClr val="lt1"/>
+          </a:fontRef>
+        </p:style>
+        <p:txBody>
+          <a:bodyPr rtlCol="0" anchor="ctr"/>
+          <a:lstStyle/>
+          <a:p>
+            <a:pPr algn="ctr"/>
+          </a:p>
+        </p:txBody>
+      </p:sp>
+      <p:sp>
+        <p:nvSpPr>
+          <p:cNvPr id="14" name="Rounded Rectangle 13"/>
+          <p:cNvSpPr/>
+          <p:nvPr/>
+        </p:nvSpPr>
+        <p:spPr>
+          <a:xfrm>
+            <a:off x="3621023" y="3657600"/>
+            <a:ext cx="2542032" cy="5120640"/>
+          </a:xfrm>
+          <a:prstGeom prst="roundRect">
+            <a:avLst>
+              <a:gd name="adj" fmla="val 5000"/>
+            </a:avLst>
+          </a:prstGeom>
+          <a:solidFill>
+            <a:srgbClr val="FFFFFF"/>
+          </a:solidFill>
+          <a:ln>
+            <a:noFill/>
+          </a:ln>
+          <a:effectLst/>
+        </p:spPr>
+        <p:style>
+          <a:lnRef idx="1">
+            <a:schemeClr val="accent1"/>
+          </a:lnRef>
+          <a:fillRef idx="3">
+            <a:schemeClr val="accent1"/>
+          </a:fillRef>
+          <a:effectRef idx="2">
+            <a:schemeClr val="accent1"/>
+          </a:effectRef>
+          <a:fontRef idx="minor">
+            <a:schemeClr val="lt1"/>
+          </a:fontRef>
+        </p:style>
+        <p:txBody>
+          <a:bodyPr rtlCol="0" anchor="ctr"/>
+          <a:lstStyle/>
+          <a:p>
+            <a:pPr algn="ctr"/>
+          </a:p>
+        </p:txBody>
+      </p:sp>
+      <p:sp>
+        <p:nvSpPr>
+          <p:cNvPr id="15" name="TextBox 14"/>
+          <p:cNvSpPr txBox="1"/>
+          <p:nvPr/>
+        </p:nvSpPr>
+        <p:spPr>
+          <a:xfrm>
+            <a:off x="3913631" y="3950208"/>
+            <a:ext cx="2084831" cy="502920"/>
+          </a:xfrm>
+          <a:prstGeom prst="rect">
+            <a:avLst/>
+          </a:prstGeom>
+          <a:noFill/>
+        </p:spPr>
+        <p:txBody>
+          <a:bodyPr wrap="square" lIns="0" rIns="0" tIns="0" bIns="0" anchor="t">
+            <a:spAutoFit/>
+          </a:bodyPr>
+          <a:lstStyle/>
+          <a:p>
+            <a:pPr algn="l"/>
+            <a:r>
+              <a:rPr sz="3000" b="0" i="0">
+                <a:solidFill>
+                  <a:srgbClr val="FF8449"/>
+                </a:solidFill>
+                <a:latin typeface="Georgia"/>
+              </a:rPr>
+              <a:t>02</a:t>
+            </a:r>
+          </a:p>
+        </p:txBody>
+      </p:sp>
+      <p:sp>
+        <p:nvSpPr>
+          <p:cNvPr id="16" name="TextBox 15"/>
+          <p:cNvSpPr txBox="1"/>
+          <p:nvPr/>
+        </p:nvSpPr>
+        <p:spPr>
+          <a:xfrm>
+            <a:off x="3913631" y="4617720"/>
+            <a:ext cx="1993391" cy="868680"/>
+          </a:xfrm>
+          <a:prstGeom prst="rect">
+            <a:avLst/>
+          </a:prstGeom>
+          <a:noFill/>
+        </p:spPr>
+        <p:txBody>
+          <a:bodyPr wrap="square" lIns="0" rIns="0" tIns="0" bIns="0" anchor="t">
+            <a:spAutoFit/>
+          </a:bodyPr>
+          <a:lstStyle/>
+          <a:p>
+            <a:pPr algn="l"/>
+            <a:r>
+              <a:rPr sz="1700" b="0" i="0">
+                <a:solidFill>
+                  <a:srgbClr val="2D2D2D"/>
+                </a:solidFill>
+                <a:latin typeface="Georgia"/>
+              </a:rPr>
+              <a:t>Sara aprova em conversa</a:t>
+            </a:r>
+          </a:p>
+        </p:txBody>
+      </p:sp>
+      <p:cxnSp>
+        <p:nvCxnSpPr>
+          <p:cNvPr id="17" name="Connector 16"/>
+          <p:cNvCxnSpPr/>
+          <p:nvPr/>
+        </p:nvCxnSpPr>
+        <p:spPr>
+          <a:xfrm>
+            <a:off x="3913631" y="5623560"/>
+            <a:ext cx="1956816" cy="0"/>
+          </a:xfrm>
+          <a:prstGeom prst="line">
+            <a:avLst/>
+          </a:prstGeom>
+          <a:ln w="9525">
+            <a:solidFill>
+              <a:srgbClr val="E5E7EB"/>
+            </a:solidFill>
+          </a:ln>
+        </p:spPr>
+        <p:style>
+          <a:lnRef idx="2">
+            <a:schemeClr val="accent1"/>
+          </a:lnRef>
+          <a:fillRef idx="0">
+            <a:schemeClr val="accent1"/>
+          </a:fillRef>
+          <a:effectRef idx="1">
+            <a:schemeClr val="accent1"/>
+          </a:effectRef>
+          <a:fontRef idx="minor">
+            <a:schemeClr val="tx1"/>
+          </a:fontRef>
+        </p:style>
+      </p:cxnSp>
+      <p:sp>
+        <p:nvSpPr>
+          <p:cNvPr id="18" name="TextBox 17"/>
+          <p:cNvSpPr txBox="1"/>
+          <p:nvPr/>
+        </p:nvSpPr>
+        <p:spPr>
+          <a:xfrm>
+            <a:off x="3913631" y="5760720"/>
+            <a:ext cx="1993391" cy="2377439"/>
+          </a:xfrm>
+          <a:prstGeom prst="rect">
+            <a:avLst/>
+          </a:prstGeom>
+          <a:noFill/>
+        </p:spPr>
+        <p:txBody>
+          <a:bodyPr wrap="square" lIns="0" rIns="0" tIns="0" bIns="0" anchor="t">
+            <a:spAutoFit/>
+          </a:bodyPr>
+          <a:lstStyle/>
+          <a:p>
+            <a:pPr algn="l"/>
+            <a:r>
+              <a:rPr sz="1100" b="0" i="0">
+                <a:solidFill>
+                  <a:srgbClr val="4B5563"/>
+                </a:solidFill>
+                <a:latin typeface="Calibri"/>
+              </a:rPr>
+              <a:t>Lê a proposta em Cowork. Pergunta, ajusta, aprova ou recusa. Sem painel — só conversa.</a:t>
+            </a:r>
+          </a:p>
+        </p:txBody>
+      </p:sp>
+      <p:sp>
+        <p:nvSpPr>
+          <p:cNvPr id="19" name="TextBox 18"/>
+          <p:cNvSpPr txBox="1"/>
+          <p:nvPr/>
+        </p:nvSpPr>
+        <p:spPr>
+          <a:xfrm>
+            <a:off x="3913631" y="8275319"/>
+            <a:ext cx="1993391" cy="274320"/>
+          </a:xfrm>
+          <a:prstGeom prst="rect">
+            <a:avLst/>
+          </a:prstGeom>
+          <a:noFill/>
+        </p:spPr>
+        <p:txBody>
+          <a:bodyPr wrap="square" lIns="0" rIns="0" tIns="0" bIns="0" anchor="t">
+            <a:spAutoFit/>
+          </a:bodyPr>
+          <a:lstStyle/>
+          <a:p>
+            <a:pPr algn="l"/>
+            <a:r>
+              <a:rPr sz="900" b="0" i="0" spc="80">
+                <a:solidFill>
+                  <a:srgbClr val="FF8449"/>
+                </a:solidFill>
+                <a:latin typeface="Calibri"/>
+              </a:rPr>
+              <a:t>GATE</a:t>
+            </a:r>
+          </a:p>
+        </p:txBody>
+      </p:sp>
+      <p:sp>
+        <p:nvSpPr>
+          <p:cNvPr id="20" name="Right Arrow 19"/>
+          <p:cNvSpPr/>
+          <p:nvPr/>
+        </p:nvSpPr>
+        <p:spPr>
+          <a:xfrm>
+            <a:off x="6199631" y="6099048"/>
+            <a:ext cx="219456" cy="237744"/>
+          </a:xfrm>
+          <a:prstGeom prst="rightArrow">
+            <a:avLst/>
+          </a:prstGeom>
+          <a:solidFill>
+            <a:srgbClr val="FF8449"/>
+          </a:solidFill>
+          <a:ln>
+            <a:noFill/>
+          </a:ln>
+          <a:effectLst/>
+        </p:spPr>
+        <p:style>
+          <a:lnRef idx="1">
+            <a:schemeClr val="accent1"/>
+          </a:lnRef>
+          <a:fillRef idx="3">
+            <a:schemeClr val="accent1"/>
+          </a:fillRef>
+          <a:effectRef idx="2">
+            <a:schemeClr val="accent1"/>
+          </a:effectRef>
+          <a:fontRef idx="minor">
+            <a:schemeClr val="lt1"/>
+          </a:fontRef>
+        </p:style>
+        <p:txBody>
+          <a:bodyPr rtlCol="0" anchor="ctr"/>
+          <a:lstStyle/>
+          <a:p>
+            <a:pPr algn="ctr"/>
+          </a:p>
+        </p:txBody>
+      </p:sp>
+      <p:sp>
+        <p:nvSpPr>
+          <p:cNvPr id="21" name="Rounded Rectangle 20"/>
+          <p:cNvSpPr/>
+          <p:nvPr/>
+        </p:nvSpPr>
+        <p:spPr>
+          <a:xfrm>
+            <a:off x="6455663" y="3657600"/>
+            <a:ext cx="2542032" cy="5120640"/>
+          </a:xfrm>
+          <a:prstGeom prst="roundRect">
+            <a:avLst>
+              <a:gd name="adj" fmla="val 5000"/>
+            </a:avLst>
+          </a:prstGeom>
+          <a:solidFill>
+            <a:srgbClr val="FFFFFF"/>
+          </a:solidFill>
+          <a:ln>
+            <a:noFill/>
+          </a:ln>
+          <a:effectLst/>
+        </p:spPr>
+        <p:style>
+          <a:lnRef idx="1">
+            <a:schemeClr val="accent1"/>
+          </a:lnRef>
+          <a:fillRef idx="3">
+            <a:schemeClr val="accent1"/>
+          </a:fillRef>
+          <a:effectRef idx="2">
+            <a:schemeClr val="accent1"/>
+          </a:effectRef>
+          <a:fontRef idx="minor">
+            <a:schemeClr val="lt1"/>
+          </a:fontRef>
+        </p:style>
+        <p:txBody>
+          <a:bodyPr rtlCol="0" anchor="ctr"/>
+          <a:lstStyle/>
+          <a:p>
+            <a:pPr algn="ctr"/>
+          </a:p>
+        </p:txBody>
+      </p:sp>
+      <p:sp>
+        <p:nvSpPr>
+          <p:cNvPr id="22" name="TextBox 21"/>
+          <p:cNvSpPr txBox="1"/>
+          <p:nvPr/>
+        </p:nvSpPr>
+        <p:spPr>
+          <a:xfrm>
+            <a:off x="6748271" y="3950208"/>
+            <a:ext cx="2084831" cy="502920"/>
+          </a:xfrm>
+          <a:prstGeom prst="rect">
+            <a:avLst/>
+          </a:prstGeom>
+          <a:noFill/>
+        </p:spPr>
+        <p:txBody>
+          <a:bodyPr wrap="square" lIns="0" rIns="0" tIns="0" bIns="0" anchor="t">
+            <a:spAutoFit/>
+          </a:bodyPr>
+          <a:lstStyle/>
+          <a:p>
+            <a:pPr algn="l"/>
+            <a:r>
+              <a:rPr sz="3000" b="0" i="0">
+                <a:solidFill>
+                  <a:srgbClr val="FF8449"/>
+                </a:solidFill>
+                <a:latin typeface="Georgia"/>
+              </a:rPr>
+              <a:t>03</a:t>
+            </a:r>
+          </a:p>
+        </p:txBody>
+      </p:sp>
+      <p:sp>
+        <p:nvSpPr>
+          <p:cNvPr id="23" name="TextBox 22"/>
+          <p:cNvSpPr txBox="1"/>
+          <p:nvPr/>
+        </p:nvSpPr>
+        <p:spPr>
+          <a:xfrm>
+            <a:off x="6748271" y="4617720"/>
+            <a:ext cx="1993391" cy="868680"/>
+          </a:xfrm>
+          <a:prstGeom prst="rect">
+            <a:avLst/>
+          </a:prstGeom>
+          <a:noFill/>
+        </p:spPr>
+        <p:txBody>
+          <a:bodyPr wrap="square" lIns="0" rIns="0" tIns="0" bIns="0" anchor="t">
+            <a:spAutoFit/>
+          </a:bodyPr>
+          <a:lstStyle/>
+          <a:p>
+            <a:pPr algn="l"/>
+            <a:r>
+              <a:rPr sz="1700" b="0" i="0">
+                <a:solidFill>
+                  <a:srgbClr val="2D2D2D"/>
+                </a:solidFill>
+                <a:latin typeface="Georgia"/>
+              </a:rPr>
+              <a:t>Code publica</a:t>
+            </a:r>
+          </a:p>
+        </p:txBody>
+      </p:sp>
+      <p:cxnSp>
+        <p:nvCxnSpPr>
+          <p:cNvPr id="24" name="Connector 23"/>
+          <p:cNvCxnSpPr/>
+          <p:nvPr/>
+        </p:nvCxnSpPr>
+        <p:spPr>
+          <a:xfrm>
+            <a:off x="6748271" y="5623560"/>
+            <a:ext cx="1956816" cy="0"/>
+          </a:xfrm>
+          <a:prstGeom prst="line">
+            <a:avLst/>
+          </a:prstGeom>
+          <a:ln w="9525">
+            <a:solidFill>
+              <a:srgbClr val="E5E7EB"/>
+            </a:solidFill>
+          </a:ln>
+        </p:spPr>
+        <p:style>
+          <a:lnRef idx="2">
+            <a:schemeClr val="accent1"/>
+          </a:lnRef>
+          <a:fillRef idx="0">
+            <a:schemeClr val="accent1"/>
+          </a:fillRef>
+          <a:effectRef idx="1">
+            <a:schemeClr val="accent1"/>
+          </a:effectRef>
+          <a:fontRef idx="minor">
+            <a:schemeClr val="tx1"/>
+          </a:fontRef>
+        </p:style>
+      </p:cxnSp>
+      <p:sp>
+        <p:nvSpPr>
+          <p:cNvPr id="25" name="TextBox 24"/>
+          <p:cNvSpPr txBox="1"/>
+          <p:nvPr/>
+        </p:nvSpPr>
+        <p:spPr>
+          <a:xfrm>
+            <a:off x="6748271" y="5760720"/>
+            <a:ext cx="1993391" cy="2377439"/>
+          </a:xfrm>
+          <a:prstGeom prst="rect">
+            <a:avLst/>
+          </a:prstGeom>
+          <a:noFill/>
+        </p:spPr>
+        <p:txBody>
+          <a:bodyPr wrap="square" lIns="0" rIns="0" tIns="0" bIns="0" anchor="t">
+            <a:spAutoFit/>
+          </a:bodyPr>
+          <a:lstStyle/>
+          <a:p>
+            <a:pPr algn="l"/>
+            <a:r>
+              <a:rPr sz="1100" b="0" i="0">
+                <a:solidFill>
+                  <a:srgbClr val="4B5563"/>
+                </a:solidFill>
+                <a:latin typeface="Calibri"/>
+              </a:rPr>
+              <a:t>Pushed live via Google Ads API ou Meta Marketing API. Tracking, pixel e conversões configurados.</a:t>
+            </a:r>
+          </a:p>
+        </p:txBody>
+      </p:sp>
+      <p:sp>
+        <p:nvSpPr>
+          <p:cNvPr id="26" name="TextBox 25"/>
+          <p:cNvSpPr txBox="1"/>
+          <p:nvPr/>
+        </p:nvSpPr>
+        <p:spPr>
+          <a:xfrm>
+            <a:off x="6748271" y="8275319"/>
+            <a:ext cx="1993391" cy="274320"/>
+          </a:xfrm>
+          <a:prstGeom prst="rect">
+            <a:avLst/>
+          </a:prstGeom>
+          <a:noFill/>
+        </p:spPr>
+        <p:txBody>
+          <a:bodyPr wrap="square" lIns="0" rIns="0" tIns="0" bIns="0" anchor="t">
+            <a:spAutoFit/>
+          </a:bodyPr>
+          <a:lstStyle/>
+          <a:p>
+            <a:pPr algn="l"/>
+            <a:r>
+              <a:rPr sz="900" b="0" i="0" spc="80">
+                <a:solidFill>
+                  <a:srgbClr val="FF8449"/>
+                </a:solidFill>
+                <a:latin typeface="Calibri"/>
+              </a:rPr>
+              <a:t>PUBLISH</a:t>
+            </a:r>
+          </a:p>
+        </p:txBody>
+      </p:sp>
+      <p:sp>
+        <p:nvSpPr>
+          <p:cNvPr id="27" name="Right Arrow 26"/>
+          <p:cNvSpPr/>
+          <p:nvPr/>
+        </p:nvSpPr>
+        <p:spPr>
+          <a:xfrm>
+            <a:off x="9034271" y="6099048"/>
+            <a:ext cx="219456" cy="237744"/>
+          </a:xfrm>
+          <a:prstGeom prst="rightArrow">
+            <a:avLst/>
+          </a:prstGeom>
+          <a:solidFill>
+            <a:srgbClr val="FF8449"/>
+          </a:solidFill>
+          <a:ln>
+            <a:noFill/>
+          </a:ln>
+          <a:effectLst/>
+        </p:spPr>
+        <p:style>
+          <a:lnRef idx="1">
+            <a:schemeClr val="accent1"/>
+          </a:lnRef>
+          <a:fillRef idx="3">
+            <a:schemeClr val="accent1"/>
+          </a:fillRef>
+          <a:effectRef idx="2">
+            <a:schemeClr val="accent1"/>
+          </a:effectRef>
+          <a:fontRef idx="minor">
+            <a:schemeClr val="lt1"/>
+          </a:fontRef>
+        </p:style>
+        <p:txBody>
+          <a:bodyPr rtlCol="0" anchor="ctr"/>
+          <a:lstStyle/>
+          <a:p>
+            <a:pPr algn="ctr"/>
+          </a:p>
+        </p:txBody>
+      </p:sp>
+      <p:sp>
+        <p:nvSpPr>
+          <p:cNvPr id="28" name="Rounded Rectangle 27"/>
+          <p:cNvSpPr/>
+          <p:nvPr/>
+        </p:nvSpPr>
+        <p:spPr>
+          <a:xfrm>
+            <a:off x="9290303" y="3657600"/>
+            <a:ext cx="2542032" cy="5120640"/>
+          </a:xfrm>
+          <a:prstGeom prst="roundRect">
+            <a:avLst>
+              <a:gd name="adj" fmla="val 5000"/>
+            </a:avLst>
+          </a:prstGeom>
+          <a:solidFill>
+            <a:srgbClr val="FFFFFF"/>
+          </a:solidFill>
+          <a:ln>
+            <a:noFill/>
+          </a:ln>
+          <a:effectLst/>
+        </p:spPr>
+        <p:style>
+          <a:lnRef idx="1">
+            <a:schemeClr val="accent1"/>
+          </a:lnRef>
+          <a:fillRef idx="3">
+            <a:schemeClr val="accent1"/>
+          </a:fillRef>
+          <a:effectRef idx="2">
+            <a:schemeClr val="accent1"/>
+          </a:effectRef>
+          <a:fontRef idx="minor">
+            <a:schemeClr val="lt1"/>
+          </a:fontRef>
+        </p:style>
+        <p:txBody>
+          <a:bodyPr rtlCol="0" anchor="ctr"/>
+          <a:lstStyle/>
+          <a:p>
+            <a:pPr algn="ctr"/>
+          </a:p>
+        </p:txBody>
+      </p:sp>
+      <p:sp>
+        <p:nvSpPr>
+          <p:cNvPr id="29" name="TextBox 28"/>
+          <p:cNvSpPr txBox="1"/>
+          <p:nvPr/>
+        </p:nvSpPr>
+        <p:spPr>
+          <a:xfrm>
+            <a:off x="9582911" y="3950208"/>
+            <a:ext cx="2084831" cy="502920"/>
+          </a:xfrm>
+          <a:prstGeom prst="rect">
+            <a:avLst/>
+          </a:prstGeom>
+          <a:noFill/>
+        </p:spPr>
+        <p:txBody>
+          <a:bodyPr wrap="square" lIns="0" rIns="0" tIns="0" bIns="0" anchor="t">
+            <a:spAutoFit/>
+          </a:bodyPr>
+          <a:lstStyle/>
+          <a:p>
+            <a:pPr algn="l"/>
+            <a:r>
+              <a:rPr sz="3000" b="0" i="0">
+                <a:solidFill>
+                  <a:srgbClr val="FF8449"/>
+                </a:solidFill>
+                <a:latin typeface="Georgia"/>
+              </a:rPr>
+              <a:t>04</a:t>
+            </a:r>
+          </a:p>
+        </p:txBody>
+      </p:sp>
+      <p:sp>
+        <p:nvSpPr>
+          <p:cNvPr id="30" name="TextBox 29"/>
+          <p:cNvSpPr txBox="1"/>
+          <p:nvPr/>
+        </p:nvSpPr>
+        <p:spPr>
+          <a:xfrm>
+            <a:off x="9582911" y="4617720"/>
+            <a:ext cx="1993391" cy="868680"/>
+          </a:xfrm>
+          <a:prstGeom prst="rect">
+            <a:avLst/>
+          </a:prstGeom>
+          <a:noFill/>
+        </p:spPr>
+        <p:txBody>
+          <a:bodyPr wrap="square" lIns="0" rIns="0" tIns="0" bIns="0" anchor="t">
+            <a:spAutoFit/>
+          </a:bodyPr>
+          <a:lstStyle/>
+          <a:p>
+            <a:pPr algn="l"/>
+            <a:r>
+              <a:rPr sz="1700" b="0" i="0">
+                <a:solidFill>
+                  <a:srgbClr val="2D2D2D"/>
+                </a:solidFill>
+                <a:latin typeface="Georgia"/>
+              </a:rPr>
+              <a:t>Tuning diário</a:t>
+            </a:r>
+          </a:p>
+        </p:txBody>
+      </p:sp>
+      <p:cxnSp>
+        <p:nvCxnSpPr>
+          <p:cNvPr id="31" name="Connector 30"/>
+          <p:cNvCxnSpPr/>
+          <p:nvPr/>
+        </p:nvCxnSpPr>
+        <p:spPr>
+          <a:xfrm>
+            <a:off x="9582911" y="5623560"/>
+            <a:ext cx="1956816" cy="0"/>
+          </a:xfrm>
+          <a:prstGeom prst="line">
+            <a:avLst/>
+          </a:prstGeom>
+          <a:ln w="9525">
+            <a:solidFill>
+              <a:srgbClr val="E5E7EB"/>
+            </a:solidFill>
+          </a:ln>
+        </p:spPr>
+        <p:style>
+          <a:lnRef idx="2">
+            <a:schemeClr val="accent1"/>
+          </a:lnRef>
+          <a:fillRef idx="0">
+            <a:schemeClr val="accent1"/>
+          </a:fillRef>
+          <a:effectRef idx="1">
+            <a:schemeClr val="accent1"/>
+          </a:effectRef>
+          <a:fontRef idx="minor">
+            <a:schemeClr val="tx1"/>
+          </a:fontRef>
+        </p:style>
+      </p:cxnSp>
+      <p:sp>
+        <p:nvSpPr>
+          <p:cNvPr id="32" name="TextBox 31"/>
+          <p:cNvSpPr txBox="1"/>
+          <p:nvPr/>
+        </p:nvSpPr>
+        <p:spPr>
+          <a:xfrm>
+            <a:off x="9582911" y="5760720"/>
+            <a:ext cx="1993391" cy="2377439"/>
+          </a:xfrm>
+          <a:prstGeom prst="rect">
+            <a:avLst/>
+          </a:prstGeom>
+          <a:noFill/>
+        </p:spPr>
+        <p:txBody>
+          <a:bodyPr wrap="square" lIns="0" rIns="0" tIns="0" bIns="0" anchor="t">
+            <a:spAutoFit/>
+          </a:bodyPr>
+          <a:lstStyle/>
+          <a:p>
+            <a:pPr algn="l"/>
+            <a:r>
+              <a:rPr sz="1100" b="0" i="0">
+                <a:solidFill>
+                  <a:srgbClr val="4B5563"/>
+                </a:solidFill>
+                <a:latin typeface="Calibri"/>
+              </a:rPr>
+              <a:t>Code monitoriza bids, CTR, CPC, conversões. Realoca verba dentro do budget. Pausa underperformers automaticamente.</a:t>
+            </a:r>
+          </a:p>
+        </p:txBody>
+      </p:sp>
+      <p:sp>
+        <p:nvSpPr>
+          <p:cNvPr id="33" name="TextBox 32"/>
+          <p:cNvSpPr txBox="1"/>
+          <p:nvPr/>
+        </p:nvSpPr>
+        <p:spPr>
+          <a:xfrm>
+            <a:off x="9582911" y="8275319"/>
+            <a:ext cx="1993391" cy="274320"/>
+          </a:xfrm>
+          <a:prstGeom prst="rect">
+            <a:avLst/>
+          </a:prstGeom>
+          <a:noFill/>
+        </p:spPr>
+        <p:txBody>
+          <a:bodyPr wrap="square" lIns="0" rIns="0" tIns="0" bIns="0" anchor="t">
+            <a:spAutoFit/>
+          </a:bodyPr>
+          <a:lstStyle/>
+          <a:p>
+            <a:pPr algn="l"/>
+            <a:r>
+              <a:rPr sz="900" b="0" i="0" spc="80">
+                <a:solidFill>
+                  <a:srgbClr val="FF8449"/>
+                </a:solidFill>
+                <a:latin typeface="Calibri"/>
+              </a:rPr>
+              <a:t>TUNE</a:t>
+            </a:r>
+          </a:p>
+        </p:txBody>
+      </p:sp>
+      <p:sp>
+        <p:nvSpPr>
+          <p:cNvPr id="34" name="Right Arrow 33"/>
+          <p:cNvSpPr/>
+          <p:nvPr/>
+        </p:nvSpPr>
+        <p:spPr>
+          <a:xfrm>
+            <a:off x="11868911" y="6099048"/>
+            <a:ext cx="219456" cy="237744"/>
+          </a:xfrm>
+          <a:prstGeom prst="rightArrow">
+            <a:avLst/>
+          </a:prstGeom>
+          <a:solidFill>
+            <a:srgbClr val="FF8449"/>
+          </a:solidFill>
+          <a:ln>
+            <a:noFill/>
+          </a:ln>
+          <a:effectLst/>
+        </p:spPr>
+        <p:style>
+          <a:lnRef idx="1">
+            <a:schemeClr val="accent1"/>
+          </a:lnRef>
+          <a:fillRef idx="3">
+            <a:schemeClr val="accent1"/>
+          </a:fillRef>
+          <a:effectRef idx="2">
+            <a:schemeClr val="accent1"/>
+          </a:effectRef>
+          <a:fontRef idx="minor">
+            <a:schemeClr val="lt1"/>
+          </a:fontRef>
+        </p:style>
+        <p:txBody>
+          <a:bodyPr rtlCol="0" anchor="ctr"/>
+          <a:lstStyle/>
+          <a:p>
+            <a:pPr algn="ctr"/>
+          </a:p>
+        </p:txBody>
+      </p:sp>
+      <p:sp>
+        <p:nvSpPr>
+          <p:cNvPr id="35" name="Rounded Rectangle 34"/>
+          <p:cNvSpPr/>
+          <p:nvPr/>
+        </p:nvSpPr>
+        <p:spPr>
+          <a:xfrm>
+            <a:off x="12124943" y="3657600"/>
+            <a:ext cx="2542032" cy="5120640"/>
+          </a:xfrm>
+          <a:prstGeom prst="roundRect">
+            <a:avLst>
+              <a:gd name="adj" fmla="val 5000"/>
+            </a:avLst>
+          </a:prstGeom>
+          <a:solidFill>
+            <a:srgbClr val="FFFFFF"/>
+          </a:solidFill>
+          <a:ln>
+            <a:noFill/>
+          </a:ln>
+          <a:effectLst/>
+        </p:spPr>
+        <p:style>
+          <a:lnRef idx="1">
+            <a:schemeClr val="accent1"/>
+          </a:lnRef>
+          <a:fillRef idx="3">
+            <a:schemeClr val="accent1"/>
+          </a:fillRef>
+          <a:effectRef idx="2">
+            <a:schemeClr val="accent1"/>
+          </a:effectRef>
+          <a:fontRef idx="minor">
+            <a:schemeClr val="lt1"/>
+          </a:fontRef>
+        </p:style>
+        <p:txBody>
+          <a:bodyPr rtlCol="0" anchor="ctr"/>
+          <a:lstStyle/>
+          <a:p>
+            <a:pPr algn="ctr"/>
+          </a:p>
+        </p:txBody>
+      </p:sp>
+      <p:sp>
+        <p:nvSpPr>
+          <p:cNvPr id="36" name="TextBox 35"/>
+          <p:cNvSpPr txBox="1"/>
+          <p:nvPr/>
+        </p:nvSpPr>
+        <p:spPr>
+          <a:xfrm>
+            <a:off x="12417551" y="3950208"/>
+            <a:ext cx="2084831" cy="502920"/>
+          </a:xfrm>
+          <a:prstGeom prst="rect">
+            <a:avLst/>
+          </a:prstGeom>
+          <a:noFill/>
+        </p:spPr>
+        <p:txBody>
+          <a:bodyPr wrap="square" lIns="0" rIns="0" tIns="0" bIns="0" anchor="t">
+            <a:spAutoFit/>
+          </a:bodyPr>
+          <a:lstStyle/>
+          <a:p>
+            <a:pPr algn="l"/>
+            <a:r>
+              <a:rPr sz="3000" b="0" i="0">
+                <a:solidFill>
+                  <a:srgbClr val="FF8449"/>
+                </a:solidFill>
+                <a:latin typeface="Georgia"/>
+              </a:rPr>
+              <a:t>05</a:t>
+            </a:r>
+          </a:p>
+        </p:txBody>
+      </p:sp>
+      <p:sp>
+        <p:nvSpPr>
+          <p:cNvPr id="37" name="TextBox 36"/>
+          <p:cNvSpPr txBox="1"/>
+          <p:nvPr/>
+        </p:nvSpPr>
+        <p:spPr>
+          <a:xfrm>
+            <a:off x="12417551" y="4617720"/>
+            <a:ext cx="1993391" cy="868680"/>
+          </a:xfrm>
+          <a:prstGeom prst="rect">
+            <a:avLst/>
+          </a:prstGeom>
+          <a:noFill/>
+        </p:spPr>
+        <p:txBody>
+          <a:bodyPr wrap="square" lIns="0" rIns="0" tIns="0" bIns="0" anchor="t">
+            <a:spAutoFit/>
+          </a:bodyPr>
+          <a:lstStyle/>
+          <a:p>
+            <a:pPr algn="l"/>
+            <a:r>
+              <a:rPr sz="1700" b="0" i="0">
+                <a:solidFill>
+                  <a:srgbClr val="2D2D2D"/>
+                </a:solidFill>
+                <a:latin typeface="Georgia"/>
+              </a:rPr>
+              <a:t>Alertas</a:t>
+            </a:r>
+          </a:p>
+        </p:txBody>
+      </p:sp>
+      <p:cxnSp>
+        <p:nvCxnSpPr>
+          <p:cNvPr id="38" name="Connector 37"/>
+          <p:cNvCxnSpPr/>
+          <p:nvPr/>
+        </p:nvCxnSpPr>
+        <p:spPr>
+          <a:xfrm>
+            <a:off x="12417551" y="5623560"/>
+            <a:ext cx="1956816" cy="0"/>
+          </a:xfrm>
+          <a:prstGeom prst="line">
+            <a:avLst/>
+          </a:prstGeom>
+          <a:ln w="9525">
+            <a:solidFill>
+              <a:srgbClr val="E5E7EB"/>
+            </a:solidFill>
+          </a:ln>
+        </p:spPr>
+        <p:style>
+          <a:lnRef idx="2">
+            <a:schemeClr val="accent1"/>
+          </a:lnRef>
+          <a:fillRef idx="0">
+            <a:schemeClr val="accent1"/>
+          </a:fillRef>
+          <a:effectRef idx="1">
+            <a:schemeClr val="accent1"/>
+          </a:effectRef>
+          <a:fontRef idx="minor">
+            <a:schemeClr val="tx1"/>
+          </a:fontRef>
+        </p:style>
+      </p:cxnSp>
+      <p:sp>
+        <p:nvSpPr>
+          <p:cNvPr id="39" name="TextBox 38"/>
+          <p:cNvSpPr txBox="1"/>
+          <p:nvPr/>
+        </p:nvSpPr>
+        <p:spPr>
+          <a:xfrm>
+            <a:off x="12417551" y="5760720"/>
+            <a:ext cx="1993391" cy="2377439"/>
+          </a:xfrm>
+          <a:prstGeom prst="rect">
+            <a:avLst/>
+          </a:prstGeom>
+          <a:noFill/>
+        </p:spPr>
+        <p:txBody>
+          <a:bodyPr wrap="square" lIns="0" rIns="0" tIns="0" bIns="0" anchor="t">
+            <a:spAutoFit/>
+          </a:bodyPr>
+          <a:lstStyle/>
+          <a:p>
+            <a:pPr algn="l"/>
+            <a:r>
+              <a:rPr sz="1100" b="0" i="0">
+                <a:solidFill>
+                  <a:srgbClr val="4B5563"/>
+                </a:solidFill>
+                <a:latin typeface="Calibri"/>
+              </a:rPr>
+              <a:t>Se gasto sobe acima do limite, CTR desce, ou houver problema técnico — Code escala à Sara em segundos.</a:t>
+            </a:r>
+          </a:p>
+        </p:txBody>
+      </p:sp>
+      <p:sp>
+        <p:nvSpPr>
+          <p:cNvPr id="40" name="TextBox 39"/>
+          <p:cNvSpPr txBox="1"/>
+          <p:nvPr/>
+        </p:nvSpPr>
+        <p:spPr>
+          <a:xfrm>
+            <a:off x="12417551" y="8275319"/>
+            <a:ext cx="1993391" cy="274320"/>
+          </a:xfrm>
+          <a:prstGeom prst="rect">
+            <a:avLst/>
+          </a:prstGeom>
+          <a:noFill/>
+        </p:spPr>
+        <p:txBody>
+          <a:bodyPr wrap="square" lIns="0" rIns="0" tIns="0" bIns="0" anchor="t">
+            <a:spAutoFit/>
+          </a:bodyPr>
+          <a:lstStyle/>
+          <a:p>
+            <a:pPr algn="l"/>
+            <a:r>
+              <a:rPr sz="900" b="0" i="0" spc="80">
+                <a:solidFill>
+                  <a:srgbClr val="FF8449"/>
+                </a:solidFill>
+                <a:latin typeface="Calibri"/>
+              </a:rPr>
+              <a:t>ALERT</a:t>
+            </a:r>
+          </a:p>
+        </p:txBody>
+      </p:sp>
+      <p:sp>
+        <p:nvSpPr>
+          <p:cNvPr id="41" name="Right Arrow 40"/>
+          <p:cNvSpPr/>
+          <p:nvPr/>
+        </p:nvSpPr>
+        <p:spPr>
+          <a:xfrm>
+            <a:off x="14703551" y="6099048"/>
+            <a:ext cx="219456" cy="237744"/>
+          </a:xfrm>
+          <a:prstGeom prst="rightArrow">
+            <a:avLst/>
+          </a:prstGeom>
+          <a:solidFill>
+            <a:srgbClr val="FF8449"/>
+          </a:solidFill>
+          <a:ln>
+            <a:noFill/>
+          </a:ln>
+          <a:effectLst/>
+        </p:spPr>
+        <p:style>
+          <a:lnRef idx="1">
+            <a:schemeClr val="accent1"/>
+          </a:lnRef>
+          <a:fillRef idx="3">
+            <a:schemeClr val="accent1"/>
+          </a:fillRef>
+          <a:effectRef idx="2">
+            <a:schemeClr val="accent1"/>
+          </a:effectRef>
+          <a:fontRef idx="minor">
+            <a:schemeClr val="lt1"/>
+          </a:fontRef>
+        </p:style>
+        <p:txBody>
+          <a:bodyPr rtlCol="0" anchor="ctr"/>
+          <a:lstStyle/>
+          <a:p>
+            <a:pPr algn="ctr"/>
+          </a:p>
+        </p:txBody>
+      </p:sp>
+      <p:sp>
+        <p:nvSpPr>
+          <p:cNvPr id="42" name="Rounded Rectangle 41"/>
+          <p:cNvSpPr/>
+          <p:nvPr/>
+        </p:nvSpPr>
+        <p:spPr>
+          <a:xfrm>
+            <a:off x="14959584" y="3657600"/>
+            <a:ext cx="2542032" cy="5120640"/>
+          </a:xfrm>
+          <a:prstGeom prst="roundRect">
+            <a:avLst>
+              <a:gd name="adj" fmla="val 5000"/>
+            </a:avLst>
+          </a:prstGeom>
+          <a:solidFill>
+            <a:srgbClr val="FFFFFF"/>
+          </a:solidFill>
+          <a:ln>
+            <a:noFill/>
+          </a:ln>
+          <a:effectLst/>
+        </p:spPr>
+        <p:style>
+          <a:lnRef idx="1">
+            <a:schemeClr val="accent1"/>
+          </a:lnRef>
+          <a:fillRef idx="3">
+            <a:schemeClr val="accent1"/>
+          </a:fillRef>
+          <a:effectRef idx="2">
+            <a:schemeClr val="accent1"/>
+          </a:effectRef>
+          <a:fontRef idx="minor">
+            <a:schemeClr val="lt1"/>
+          </a:fontRef>
+        </p:style>
+        <p:txBody>
+          <a:bodyPr rtlCol="0" anchor="ctr"/>
+          <a:lstStyle/>
+          <a:p>
+            <a:pPr algn="ctr"/>
+          </a:p>
+        </p:txBody>
+      </p:sp>
+      <p:sp>
+        <p:nvSpPr>
+          <p:cNvPr id="43" name="TextBox 42"/>
+          <p:cNvSpPr txBox="1"/>
+          <p:nvPr/>
+        </p:nvSpPr>
+        <p:spPr>
+          <a:xfrm>
+            <a:off x="15252192" y="3950208"/>
+            <a:ext cx="2084831" cy="502920"/>
+          </a:xfrm>
+          <a:prstGeom prst="rect">
+            <a:avLst/>
+          </a:prstGeom>
+          <a:noFill/>
+        </p:spPr>
+        <p:txBody>
+          <a:bodyPr wrap="square" lIns="0" rIns="0" tIns="0" bIns="0" anchor="t">
+            <a:spAutoFit/>
+          </a:bodyPr>
+          <a:lstStyle/>
+          <a:p>
+            <a:pPr algn="l"/>
+            <a:r>
+              <a:rPr sz="3000" b="0" i="0">
+                <a:solidFill>
+                  <a:srgbClr val="FF8449"/>
+                </a:solidFill>
+                <a:latin typeface="Georgia"/>
+              </a:rPr>
+              <a:t>06</a:t>
+            </a:r>
+          </a:p>
+        </p:txBody>
+      </p:sp>
+      <p:sp>
+        <p:nvSpPr>
+          <p:cNvPr id="44" name="TextBox 43"/>
+          <p:cNvSpPr txBox="1"/>
+          <p:nvPr/>
+        </p:nvSpPr>
+        <p:spPr>
+          <a:xfrm>
+            <a:off x="15252192" y="4617720"/>
+            <a:ext cx="1993391" cy="868680"/>
+          </a:xfrm>
+          <a:prstGeom prst="rect">
+            <a:avLst/>
+          </a:prstGeom>
+          <a:noFill/>
+        </p:spPr>
+        <p:txBody>
+          <a:bodyPr wrap="square" lIns="0" rIns="0" tIns="0" bIns="0" anchor="t">
+            <a:spAutoFit/>
+          </a:bodyPr>
+          <a:lstStyle/>
+          <a:p>
+            <a:pPr algn="l"/>
+            <a:r>
+              <a:rPr sz="1700" b="0" i="0">
+                <a:solidFill>
+                  <a:srgbClr val="2D2D2D"/>
+                </a:solidFill>
+                <a:latin typeface="Georgia"/>
+              </a:rPr>
+              <a:t>Relatório semanal</a:t>
+            </a:r>
+          </a:p>
+        </p:txBody>
+      </p:sp>
+      <p:cxnSp>
+        <p:nvCxnSpPr>
+          <p:cNvPr id="45" name="Connector 44"/>
+          <p:cNvCxnSpPr/>
+          <p:nvPr/>
+        </p:nvCxnSpPr>
+        <p:spPr>
+          <a:xfrm>
+            <a:off x="15252192" y="5623560"/>
+            <a:ext cx="1956816" cy="0"/>
+          </a:xfrm>
+          <a:prstGeom prst="line">
+            <a:avLst/>
+          </a:prstGeom>
+          <a:ln w="9525">
+            <a:solidFill>
+              <a:srgbClr val="E5E7EB"/>
+            </a:solidFill>
+          </a:ln>
+        </p:spPr>
+        <p:style>
+          <a:lnRef idx="2">
+            <a:schemeClr val="accent1"/>
+          </a:lnRef>
+          <a:fillRef idx="0">
+            <a:schemeClr val="accent1"/>
+          </a:fillRef>
+          <a:effectRef idx="1">
+            <a:schemeClr val="accent1"/>
+          </a:effectRef>
+          <a:fontRef idx="minor">
+            <a:schemeClr val="tx1"/>
+          </a:fontRef>
+        </p:style>
+      </p:cxnSp>
+      <p:sp>
+        <p:nvSpPr>
+          <p:cNvPr id="46" name="TextBox 45"/>
+          <p:cNvSpPr txBox="1"/>
+          <p:nvPr/>
+        </p:nvSpPr>
+        <p:spPr>
+          <a:xfrm>
+            <a:off x="15252192" y="5760720"/>
+            <a:ext cx="1993391" cy="2377439"/>
+          </a:xfrm>
+          <a:prstGeom prst="rect">
+            <a:avLst/>
+          </a:prstGeom>
+          <a:noFill/>
+        </p:spPr>
+        <p:txBody>
+          <a:bodyPr wrap="square" lIns="0" rIns="0" tIns="0" bIns="0" anchor="t">
+            <a:spAutoFit/>
+          </a:bodyPr>
+          <a:lstStyle/>
+          <a:p>
+            <a:pPr algn="l"/>
+            <a:r>
+              <a:rPr sz="1100" b="0" i="0">
+                <a:solidFill>
+                  <a:srgbClr val="4B5563"/>
+                </a:solidFill>
+                <a:latin typeface="Calibri"/>
+              </a:rPr>
+              <a:t>Cowork compila: gasto, alcance, conversões, recomendações para a próxima semana. Lê em 2 minutos.</a:t>
+            </a:r>
+          </a:p>
+        </p:txBody>
+      </p:sp>
+      <p:sp>
+        <p:nvSpPr>
+          <p:cNvPr id="47" name="TextBox 46"/>
+          <p:cNvSpPr txBox="1"/>
+          <p:nvPr/>
+        </p:nvSpPr>
+        <p:spPr>
+          <a:xfrm>
+            <a:off x="15252192" y="8275319"/>
+            <a:ext cx="1993391" cy="274320"/>
+          </a:xfrm>
+          <a:prstGeom prst="rect">
+            <a:avLst/>
+          </a:prstGeom>
+          <a:noFill/>
+        </p:spPr>
+        <p:txBody>
+          <a:bodyPr wrap="square" lIns="0" rIns="0" tIns="0" bIns="0" anchor="t">
+            <a:spAutoFit/>
+          </a:bodyPr>
+          <a:lstStyle/>
+          <a:p>
+            <a:pPr algn="l"/>
+            <a:r>
+              <a:rPr sz="900" b="0" i="0" spc="80">
+                <a:solidFill>
+                  <a:srgbClr val="FF8449"/>
+                </a:solidFill>
+                <a:latin typeface="Calibri"/>
+              </a:rPr>
+              <a:t>REPORT</a:t>
+            </a:r>
+          </a:p>
+        </p:txBody>
+      </p:sp>
+      <p:sp>
+        <p:nvSpPr>
+          <p:cNvPr id="48" name="TextBox 47"/>
+          <p:cNvSpPr txBox="1"/>
+          <p:nvPr/>
+        </p:nvSpPr>
+        <p:spPr>
+          <a:xfrm>
+            <a:off x="914400" y="9144000"/>
+            <a:ext cx="16459200" cy="640080"/>
+          </a:xfrm>
+          <a:prstGeom prst="rect">
+            <a:avLst/>
+          </a:prstGeom>
+          <a:noFill/>
+        </p:spPr>
+        <p:txBody>
+          <a:bodyPr wrap="square" lIns="0" rIns="0" tIns="0" bIns="0" anchor="t">
+            <a:spAutoFit/>
+          </a:bodyPr>
+          <a:lstStyle/>
+          <a:p>
+            <a:pPr algn="l"/>
+            <a:r>
+              <a:rPr sz="1300" b="0" i="1">
+                <a:solidFill>
+                  <a:srgbClr val="4B5563"/>
+                </a:solidFill>
+                <a:latin typeface="Georgia"/>
+              </a:rPr>
+              <a:t>Mesmo skill stack para Google e Meta — só o canal MCP muda. Adicionar TikTok ou outro canal é configuração, não rebuild.</a:t>
+            </a:r>
+          </a:p>
+        </p:txBody>
+      </p:sp>
+      <p:sp>
+        <p:nvSpPr>
+          <p:cNvPr id="49" name="TextBox 48"/>
+          <p:cNvSpPr txBox="1"/>
+          <p:nvPr/>
+        </p:nvSpPr>
+        <p:spPr>
+          <a:xfrm>
+            <a:off x="914400" y="9738360"/>
+            <a:ext cx="10972800" cy="228600"/>
+          </a:xfrm>
+          <a:prstGeom prst="rect">
+            <a:avLst/>
+          </a:prstGeom>
+          <a:noFill/>
+        </p:spPr>
+        <p:txBody>
+          <a:bodyPr wrap="square" lIns="0" rIns="0" tIns="0" bIns="0" anchor="t">
+            <a:spAutoFit/>
+          </a:bodyPr>
+          <a:lstStyle/>
+          <a:p>
+            <a:pPr algn="l"/>
+            <a:r>
+              <a:rPr sz="975" b="0" i="0" spc="40">
+                <a:solidFill>
+                  <a:srgbClr val="6B7280"/>
+                </a:solidFill>
+                <a:latin typeface="Calibri"/>
+              </a:rPr>
+              <a:t>PROCESS FLOW · 11 · CLÍNICA DA SARA</a:t>
+            </a:r>
+          </a:p>
+        </p:txBody>
+      </p:sp>
+      <p:sp>
+        <p:nvSpPr>
+          <p:cNvPr id="50" name="TextBox 49"/>
+          <p:cNvSpPr txBox="1"/>
+          <p:nvPr/>
+        </p:nvSpPr>
+        <p:spPr>
+          <a:xfrm>
+            <a:off x="15544800" y="9738360"/>
+            <a:ext cx="914400" cy="228600"/>
+          </a:xfrm>
+          <a:prstGeom prst="rect">
+            <a:avLst/>
+          </a:prstGeom>
+          <a:noFill/>
+        </p:spPr>
+        <p:txBody>
+          <a:bodyPr wrap="square" lIns="0" rIns="0" tIns="0" bIns="0" anchor="t">
+            <a:spAutoFit/>
+          </a:bodyPr>
+          <a:lstStyle/>
+          <a:p>
+            <a:pPr algn="r"/>
+            <a:r>
+              <a:rPr sz="975" b="0" i="0" spc="40">
+                <a:solidFill>
+                  <a:srgbClr val="6B7280"/>
+                </a:solidFill>
+                <a:latin typeface="Calibri"/>
+              </a:rPr>
+              <a:t>12 / 14</a:t>
+            </a:r>
+          </a:p>
+        </p:txBody>
+      </p:sp>
+      <p:sp>
+        <p:nvSpPr>
+          <p:cNvPr id="51" name="TextBox 50"/>
+          <p:cNvSpPr txBox="1"/>
+          <p:nvPr/>
+        </p:nvSpPr>
+        <p:spPr>
+          <a:xfrm>
+            <a:off x="16459200" y="9710928"/>
+            <a:ext cx="1645920" cy="274320"/>
+          </a:xfrm>
+          <a:prstGeom prst="rect">
+            <a:avLst/>
+          </a:prstGeom>
+          <a:noFill/>
+        </p:spPr>
+        <p:txBody>
+          <a:bodyPr wrap="square" lIns="0" rIns="0" tIns="0" bIns="0" anchor="t">
+            <a:spAutoFit/>
+          </a:bodyPr>
+          <a:lstStyle/>
+          <a:p>
+            <a:pPr algn="r"/>
+            <a:r>
+              <a:rPr sz="1000" b="1" i="0">
+                <a:solidFill>
+                  <a:srgbClr val="FF8449"/>
+                </a:solidFill>
+                <a:latin typeface="Georgia"/>
+              </a:rPr>
+              <a:t>OBLQ · AI</a:t>
+            </a:r>
+          </a:p>
+        </p:txBody>
+      </p:sp>
+    </p:spTree>
+  </p:cSld>
+  <p:clrMapOvr>
+    <a:masterClrMapping/>
+  </p:clrMapOvr>
+</p:sld>
+</file>
+
+<file path=ppt/slides/slide13.xml><?xml version="1.0" encoding="utf-8"?>
+<p:sld xmlns:a="http://schemas.openxmlformats.org/drawingml/2006/main" xmlns:p="http://schemas.openxmlformats.org/presentationml/2006/main" xmlns:r="http://schemas.openxmlformats.org/officeDocument/2006/relationships">
+  <p:cSld>
+    <p:bg>
+      <p:bgPr>
+        <a:solidFill>
+          <a:srgbClr val="F7F1E8"/>
+        </a:solidFill>
+        <a:effectLst/>
+      </p:bgPr>
+    </p:bg>
+    <p:spTree>
+      <p:nvGrpSpPr>
+        <p:cNvPr id="1" name=""/>
+        <p:cNvGrpSpPr/>
+        <p:nvPr/>
+      </p:nvGrpSpPr>
+      <p:grpSpPr/>
+      <p:sp>
+        <p:nvSpPr>
+          <p:cNvPr id="2" name="TextBox 1"/>
+          <p:cNvSpPr txBox="1"/>
+          <p:nvPr/>
+        </p:nvSpPr>
+        <p:spPr>
+          <a:xfrm>
+            <a:off x="914400" y="914400"/>
+            <a:ext cx="16459200" cy="274320"/>
+          </a:xfrm>
+          <a:prstGeom prst="rect">
+            <a:avLst/>
+          </a:prstGeom>
+          <a:noFill/>
+        </p:spPr>
+        <p:txBody>
+          <a:bodyPr wrap="square" lIns="0" rIns="0" tIns="0" bIns="0" anchor="t">
+            <a:spAutoFit/>
+          </a:bodyPr>
+          <a:lstStyle/>
+          <a:p>
+            <a:pPr algn="l"/>
+            <a:r>
+              <a:rPr sz="1350" b="0" i="0" spc="80">
+                <a:solidFill>
+                  <a:srgbClr val="FF8449"/>
+                </a:solidFill>
+                <a:latin typeface="Calibri"/>
+              </a:rPr>
+              <a:t>PROCESS FLOW · 12</a:t>
+            </a:r>
+          </a:p>
+        </p:txBody>
+      </p:sp>
+      <p:sp>
+        <p:nvSpPr>
+          <p:cNvPr id="3" name="TextBox 2"/>
+          <p:cNvSpPr txBox="1"/>
+          <p:nvPr/>
+        </p:nvSpPr>
+        <p:spPr>
+          <a:xfrm>
+            <a:off x="914400" y="1280160"/>
+            <a:ext cx="16459200" cy="914400"/>
+          </a:xfrm>
+          <a:prstGeom prst="rect">
+            <a:avLst/>
+          </a:prstGeom>
+          <a:noFill/>
+        </p:spPr>
+        <p:txBody>
+          <a:bodyPr wrap="square" lIns="0" rIns="0" tIns="0" bIns="0" anchor="t">
+            <a:spAutoFit/>
+          </a:bodyPr>
+          <a:lstStyle/>
+          <a:p>
+            <a:pPr algn="l"/>
+            <a:r>
+              <a:rPr sz="3800" b="0" i="0">
+                <a:solidFill>
+                  <a:srgbClr val="2D2D2D"/>
+                </a:solidFill>
+                <a:latin typeface="Georgia"/>
+              </a:rPr>
+              <a:t>Como o site novo se mantém vivo sem programador.</a:t>
+            </a:r>
+          </a:p>
+        </p:txBody>
+      </p:sp>
+      <p:sp>
+        <p:nvSpPr>
+          <p:cNvPr id="4" name="TextBox 3"/>
+          <p:cNvSpPr txBox="1"/>
+          <p:nvPr/>
+        </p:nvSpPr>
+        <p:spPr>
+          <a:xfrm>
+            <a:off x="914400" y="2331720"/>
+            <a:ext cx="15544800" cy="640080"/>
+          </a:xfrm>
+          <a:prstGeom prst="rect">
+            <a:avLst/>
+          </a:prstGeom>
+          <a:noFill/>
+        </p:spPr>
+        <p:txBody>
+          <a:bodyPr wrap="square" lIns="0" rIns="0" tIns="0" bIns="0" anchor="t">
+            <a:spAutoFit/>
+          </a:bodyPr>
+          <a:lstStyle/>
+          <a:p>
+            <a:pPr algn="l"/>
+            <a:r>
+              <a:rPr sz="1600" b="0" i="1">
+                <a:solidFill>
+                  <a:srgbClr val="4B5563"/>
+                </a:solidFill>
+                <a:latin typeface="Georgia"/>
+              </a:rPr>
+              <a:t>P8 em ação após o build inicial. Sara descreve a mudança em linguagem natural; Cowork redige; staging para verificação; Sara aprova; Code publica.</a:t>
+            </a:r>
+          </a:p>
+        </p:txBody>
+      </p:sp>
+      <p:sp>
+        <p:nvSpPr>
+          <p:cNvPr id="5" name="Rounded Rectangle 4"/>
+          <p:cNvSpPr/>
+          <p:nvPr/>
+        </p:nvSpPr>
+        <p:spPr>
+          <a:xfrm>
+            <a:off x="14173200" y="914400"/>
+            <a:ext cx="3200400" cy="457200"/>
+          </a:xfrm>
+          <a:prstGeom prst="roundRect">
+            <a:avLst>
+              <a:gd name="adj" fmla="val 25000"/>
+            </a:avLst>
+          </a:prstGeom>
+          <a:solidFill>
+            <a:srgbClr val="000000"/>
+          </a:solidFill>
+          <a:ln>
+            <a:noFill/>
+          </a:ln>
+          <a:effectLst/>
+        </p:spPr>
+        <p:style>
+          <a:lnRef idx="1">
+            <a:schemeClr val="accent1"/>
+          </a:lnRef>
+          <a:fillRef idx="3">
+            <a:schemeClr val="accent1"/>
+          </a:fillRef>
+          <a:effectRef idx="2">
+            <a:schemeClr val="accent1"/>
+          </a:effectRef>
+          <a:fontRef idx="minor">
+            <a:schemeClr val="lt1"/>
+          </a:fontRef>
+        </p:style>
+        <p:txBody>
+          <a:bodyPr rtlCol="0" anchor="ctr"/>
+          <a:lstStyle/>
+          <a:p>
+            <a:pPr algn="ctr"/>
+          </a:p>
+        </p:txBody>
+      </p:sp>
+      <p:sp>
+        <p:nvSpPr>
+          <p:cNvPr id="6" name="TextBox 5"/>
+          <p:cNvSpPr txBox="1"/>
+          <p:nvPr/>
+        </p:nvSpPr>
+        <p:spPr>
+          <a:xfrm>
+            <a:off x="14173200" y="987552"/>
+            <a:ext cx="3200400" cy="365760"/>
+          </a:xfrm>
+          <a:prstGeom prst="rect">
+            <a:avLst/>
+          </a:prstGeom>
+          <a:noFill/>
+        </p:spPr>
+        <p:txBody>
+          <a:bodyPr wrap="square" lIns="0" rIns="0" tIns="0" bIns="0" anchor="t">
+            <a:spAutoFit/>
+          </a:bodyPr>
+          <a:lstStyle/>
+          <a:p>
+            <a:pPr algn="ctr"/>
+            <a:r>
+              <a:rPr sz="1000" b="0" i="0" spc="80">
+                <a:solidFill>
+                  <a:srgbClr val="FFFFFF"/>
+                </a:solidFill>
+                <a:latin typeface="Calibri"/>
+              </a:rPr>
+              <a:t>RUNTIME · CODE + COWORK</a:t>
+            </a:r>
+          </a:p>
+        </p:txBody>
+      </p:sp>
+      <p:sp>
+        <p:nvSpPr>
+          <p:cNvPr id="7" name="Rounded Rectangle 6"/>
+          <p:cNvSpPr/>
+          <p:nvPr/>
+        </p:nvSpPr>
+        <p:spPr>
+          <a:xfrm>
+            <a:off x="786383" y="3657600"/>
+            <a:ext cx="2542032" cy="5120640"/>
+          </a:xfrm>
+          <a:prstGeom prst="roundRect">
+            <a:avLst>
+              <a:gd name="adj" fmla="val 5000"/>
+            </a:avLst>
+          </a:prstGeom>
+          <a:solidFill>
+            <a:srgbClr val="FFFFFF"/>
+          </a:solidFill>
+          <a:ln>
+            <a:noFill/>
+          </a:ln>
+          <a:effectLst/>
+        </p:spPr>
+        <p:style>
+          <a:lnRef idx="1">
+            <a:schemeClr val="accent1"/>
+          </a:lnRef>
+          <a:fillRef idx="3">
+            <a:schemeClr val="accent1"/>
+          </a:fillRef>
+          <a:effectRef idx="2">
+            <a:schemeClr val="accent1"/>
+          </a:effectRef>
+          <a:fontRef idx="minor">
+            <a:schemeClr val="lt1"/>
+          </a:fontRef>
+        </p:style>
+        <p:txBody>
+          <a:bodyPr rtlCol="0" anchor="ctr"/>
+          <a:lstStyle/>
+          <a:p>
+            <a:pPr algn="ctr"/>
+          </a:p>
+        </p:txBody>
+      </p:sp>
+      <p:sp>
+        <p:nvSpPr>
+          <p:cNvPr id="8" name="TextBox 7"/>
+          <p:cNvSpPr txBox="1"/>
+          <p:nvPr/>
+        </p:nvSpPr>
+        <p:spPr>
+          <a:xfrm>
+            <a:off x="1078991" y="3950208"/>
+            <a:ext cx="2084831" cy="502920"/>
+          </a:xfrm>
+          <a:prstGeom prst="rect">
+            <a:avLst/>
+          </a:prstGeom>
+          <a:noFill/>
+        </p:spPr>
+        <p:txBody>
+          <a:bodyPr wrap="square" lIns="0" rIns="0" tIns="0" bIns="0" anchor="t">
+            <a:spAutoFit/>
+          </a:bodyPr>
+          <a:lstStyle/>
+          <a:p>
+            <a:pPr algn="l"/>
+            <a:r>
+              <a:rPr sz="3000" b="0" i="0">
+                <a:solidFill>
+                  <a:srgbClr val="FF8449"/>
+                </a:solidFill>
+                <a:latin typeface="Georgia"/>
+              </a:rPr>
+              <a:t>01</a:t>
+            </a:r>
+          </a:p>
+        </p:txBody>
+      </p:sp>
+      <p:sp>
+        <p:nvSpPr>
+          <p:cNvPr id="9" name="TextBox 8"/>
+          <p:cNvSpPr txBox="1"/>
+          <p:nvPr/>
+        </p:nvSpPr>
+        <p:spPr>
+          <a:xfrm>
+            <a:off x="1078991" y="4617720"/>
+            <a:ext cx="1993391" cy="868680"/>
+          </a:xfrm>
+          <a:prstGeom prst="rect">
+            <a:avLst/>
+          </a:prstGeom>
+          <a:noFill/>
+        </p:spPr>
+        <p:txBody>
+          <a:bodyPr wrap="square" lIns="0" rIns="0" tIns="0" bIns="0" anchor="t">
+            <a:spAutoFit/>
+          </a:bodyPr>
+          <a:lstStyle/>
+          <a:p>
+            <a:pPr algn="l"/>
+            <a:r>
+              <a:rPr sz="1700" b="0" i="0">
+                <a:solidFill>
+                  <a:srgbClr val="2D2D2D"/>
+                </a:solidFill>
+                <a:latin typeface="Georgia"/>
+              </a:rPr>
+              <a:t>Sara descreve</a:t>
+            </a:r>
+          </a:p>
+        </p:txBody>
+      </p:sp>
+      <p:cxnSp>
+        <p:nvCxnSpPr>
+          <p:cNvPr id="10" name="Connector 9"/>
+          <p:cNvCxnSpPr/>
+          <p:nvPr/>
+        </p:nvCxnSpPr>
+        <p:spPr>
+          <a:xfrm>
+            <a:off x="1078991" y="5623560"/>
+            <a:ext cx="1956816" cy="0"/>
+          </a:xfrm>
+          <a:prstGeom prst="line">
+            <a:avLst/>
+          </a:prstGeom>
+          <a:ln w="9525">
+            <a:solidFill>
+              <a:srgbClr val="E5E7EB"/>
+            </a:solidFill>
+          </a:ln>
+        </p:spPr>
+        <p:style>
+          <a:lnRef idx="2">
+            <a:schemeClr val="accent1"/>
+          </a:lnRef>
+          <a:fillRef idx="0">
+            <a:schemeClr val="accent1"/>
+          </a:fillRef>
+          <a:effectRef idx="1">
+            <a:schemeClr val="accent1"/>
+          </a:effectRef>
+          <a:fontRef idx="minor">
+            <a:schemeClr val="tx1"/>
+          </a:fontRef>
+        </p:style>
+      </p:cxnSp>
+      <p:sp>
+        <p:nvSpPr>
+          <p:cNvPr id="11" name="TextBox 10"/>
+          <p:cNvSpPr txBox="1"/>
+          <p:nvPr/>
+        </p:nvSpPr>
+        <p:spPr>
+          <a:xfrm>
+            <a:off x="1078991" y="5760720"/>
+            <a:ext cx="1993391" cy="2377439"/>
+          </a:xfrm>
+          <a:prstGeom prst="rect">
+            <a:avLst/>
+          </a:prstGeom>
+          <a:noFill/>
+        </p:spPr>
+        <p:txBody>
+          <a:bodyPr wrap="square" lIns="0" rIns="0" tIns="0" bIns="0" anchor="t">
+            <a:spAutoFit/>
+          </a:bodyPr>
+          <a:lstStyle/>
+          <a:p>
+            <a:pPr algn="l"/>
+            <a:r>
+              <a:rPr sz="1100" b="0" i="0">
+                <a:solidFill>
+                  <a:srgbClr val="4B5563"/>
+                </a:solidFill>
+                <a:latin typeface="Calibri"/>
+              </a:rPr>
+              <a:t>«Adiciona uma secção sobre o novo tratamento de laser.» Ou «muda o preço do pacote X.» Conversa, não ticket.</a:t>
+            </a:r>
+          </a:p>
+        </p:txBody>
+      </p:sp>
+      <p:sp>
+        <p:nvSpPr>
+          <p:cNvPr id="12" name="TextBox 11"/>
+          <p:cNvSpPr txBox="1"/>
+          <p:nvPr/>
+        </p:nvSpPr>
+        <p:spPr>
+          <a:xfrm>
+            <a:off x="1078991" y="8275319"/>
+            <a:ext cx="1993391" cy="274320"/>
+          </a:xfrm>
+          <a:prstGeom prst="rect">
+            <a:avLst/>
+          </a:prstGeom>
+          <a:noFill/>
+        </p:spPr>
+        <p:txBody>
+          <a:bodyPr wrap="square" lIns="0" rIns="0" tIns="0" bIns="0" anchor="t">
+            <a:spAutoFit/>
+          </a:bodyPr>
+          <a:lstStyle/>
+          <a:p>
+            <a:pPr algn="l"/>
+            <a:r>
+              <a:rPr sz="900" b="0" i="0" spc="80">
+                <a:solidFill>
+                  <a:srgbClr val="FF8449"/>
+                </a:solidFill>
+                <a:latin typeface="Calibri"/>
+              </a:rPr>
+              <a:t>BRIEF</a:t>
+            </a:r>
+          </a:p>
+        </p:txBody>
+      </p:sp>
+      <p:sp>
+        <p:nvSpPr>
+          <p:cNvPr id="13" name="Right Arrow 12"/>
+          <p:cNvSpPr/>
+          <p:nvPr/>
+        </p:nvSpPr>
+        <p:spPr>
+          <a:xfrm>
+            <a:off x="3364991" y="6099048"/>
+            <a:ext cx="219456" cy="237744"/>
+          </a:xfrm>
+          <a:prstGeom prst="rightArrow">
+            <a:avLst/>
+          </a:prstGeom>
+          <a:solidFill>
+            <a:srgbClr val="FF8449"/>
+          </a:solidFill>
+          <a:ln>
+            <a:noFill/>
+          </a:ln>
+          <a:effectLst/>
+        </p:spPr>
+        <p:style>
+          <a:lnRef idx="1">
+            <a:schemeClr val="accent1"/>
+          </a:lnRef>
+          <a:fillRef idx="3">
+            <a:schemeClr val="accent1"/>
+          </a:fillRef>
+          <a:effectRef idx="2">
+            <a:schemeClr val="accent1"/>
+          </a:effectRef>
+          <a:fontRef idx="minor">
+            <a:schemeClr val="lt1"/>
+          </a:fontRef>
+        </p:style>
+        <p:txBody>
+          <a:bodyPr rtlCol="0" anchor="ctr"/>
+          <a:lstStyle/>
+          <a:p>
+            <a:pPr algn="ctr"/>
+          </a:p>
+        </p:txBody>
+      </p:sp>
+      <p:sp>
+        <p:nvSpPr>
+          <p:cNvPr id="14" name="Rounded Rectangle 13"/>
+          <p:cNvSpPr/>
+          <p:nvPr/>
+        </p:nvSpPr>
+        <p:spPr>
+          <a:xfrm>
+            <a:off x="3621023" y="3657600"/>
+            <a:ext cx="2542032" cy="5120640"/>
+          </a:xfrm>
+          <a:prstGeom prst="roundRect">
+            <a:avLst>
+              <a:gd name="adj" fmla="val 5000"/>
+            </a:avLst>
+          </a:prstGeom>
+          <a:solidFill>
+            <a:srgbClr val="FFFFFF"/>
+          </a:solidFill>
+          <a:ln>
+            <a:noFill/>
+          </a:ln>
+          <a:effectLst/>
+        </p:spPr>
+        <p:style>
+          <a:lnRef idx="1">
+            <a:schemeClr val="accent1"/>
+          </a:lnRef>
+          <a:fillRef idx="3">
+            <a:schemeClr val="accent1"/>
+          </a:fillRef>
+          <a:effectRef idx="2">
+            <a:schemeClr val="accent1"/>
+          </a:effectRef>
+          <a:fontRef idx="minor">
+            <a:schemeClr val="lt1"/>
+          </a:fontRef>
+        </p:style>
+        <p:txBody>
+          <a:bodyPr rtlCol="0" anchor="ctr"/>
+          <a:lstStyle/>
+          <a:p>
+            <a:pPr algn="ctr"/>
+          </a:p>
+        </p:txBody>
+      </p:sp>
+      <p:sp>
+        <p:nvSpPr>
+          <p:cNvPr id="15" name="TextBox 14"/>
+          <p:cNvSpPr txBox="1"/>
+          <p:nvPr/>
+        </p:nvSpPr>
+        <p:spPr>
+          <a:xfrm>
+            <a:off x="3913631" y="3950208"/>
+            <a:ext cx="2084831" cy="502920"/>
+          </a:xfrm>
+          <a:prstGeom prst="rect">
+            <a:avLst/>
+          </a:prstGeom>
+          <a:noFill/>
+        </p:spPr>
+        <p:txBody>
+          <a:bodyPr wrap="square" lIns="0" rIns="0" tIns="0" bIns="0" anchor="t">
+            <a:spAutoFit/>
+          </a:bodyPr>
+          <a:lstStyle/>
+          <a:p>
+            <a:pPr algn="l"/>
+            <a:r>
+              <a:rPr sz="3000" b="0" i="0">
+                <a:solidFill>
+                  <a:srgbClr val="FF8449"/>
+                </a:solidFill>
+                <a:latin typeface="Georgia"/>
+              </a:rPr>
+              <a:t>02</a:t>
+            </a:r>
+          </a:p>
+        </p:txBody>
+      </p:sp>
+      <p:sp>
+        <p:nvSpPr>
+          <p:cNvPr id="16" name="TextBox 15"/>
+          <p:cNvSpPr txBox="1"/>
+          <p:nvPr/>
+        </p:nvSpPr>
+        <p:spPr>
+          <a:xfrm>
+            <a:off x="3913631" y="4617720"/>
+            <a:ext cx="1993391" cy="868680"/>
+          </a:xfrm>
+          <a:prstGeom prst="rect">
+            <a:avLst/>
+          </a:prstGeom>
+          <a:noFill/>
+        </p:spPr>
+        <p:txBody>
+          <a:bodyPr wrap="square" lIns="0" rIns="0" tIns="0" bIns="0" anchor="t">
+            <a:spAutoFit/>
+          </a:bodyPr>
+          <a:lstStyle/>
+          <a:p>
+            <a:pPr algn="l"/>
+            <a:r>
+              <a:rPr sz="1700" b="0" i="0">
+                <a:solidFill>
+                  <a:srgbClr val="2D2D2D"/>
+                </a:solidFill>
+                <a:latin typeface="Georgia"/>
+              </a:rPr>
+              <a:t>Cowork redige</a:t>
+            </a:r>
+          </a:p>
+        </p:txBody>
+      </p:sp>
+      <p:cxnSp>
+        <p:nvCxnSpPr>
+          <p:cNvPr id="17" name="Connector 16"/>
+          <p:cNvCxnSpPr/>
+          <p:nvPr/>
+        </p:nvCxnSpPr>
+        <p:spPr>
+          <a:xfrm>
+            <a:off x="3913631" y="5623560"/>
+            <a:ext cx="1956816" cy="0"/>
+          </a:xfrm>
+          <a:prstGeom prst="line">
+            <a:avLst/>
+          </a:prstGeom>
+          <a:ln w="9525">
+            <a:solidFill>
+              <a:srgbClr val="E5E7EB"/>
+            </a:solidFill>
+          </a:ln>
+        </p:spPr>
+        <p:style>
+          <a:lnRef idx="2">
+            <a:schemeClr val="accent1"/>
+          </a:lnRef>
+          <a:fillRef idx="0">
+            <a:schemeClr val="accent1"/>
+          </a:fillRef>
+          <a:effectRef idx="1">
+            <a:schemeClr val="accent1"/>
+          </a:effectRef>
+          <a:fontRef idx="minor">
+            <a:schemeClr val="tx1"/>
+          </a:fontRef>
+        </p:style>
+      </p:cxnSp>
+      <p:sp>
+        <p:nvSpPr>
+          <p:cNvPr id="18" name="TextBox 17"/>
+          <p:cNvSpPr txBox="1"/>
+          <p:nvPr/>
+        </p:nvSpPr>
+        <p:spPr>
+          <a:xfrm>
+            <a:off x="3913631" y="5760720"/>
+            <a:ext cx="1993391" cy="2377439"/>
+          </a:xfrm>
+          <a:prstGeom prst="rect">
+            <a:avLst/>
+          </a:prstGeom>
+          <a:noFill/>
+        </p:spPr>
+        <p:txBody>
+          <a:bodyPr wrap="square" lIns="0" rIns="0" tIns="0" bIns="0" anchor="t">
+            <a:spAutoFit/>
+          </a:bodyPr>
+          <a:lstStyle/>
+          <a:p>
+            <a:pPr algn="l"/>
+            <a:r>
+              <a:rPr sz="1100" b="0" i="0">
+                <a:solidFill>
+                  <a:srgbClr val="4B5563"/>
+                </a:solidFill>
+                <a:latin typeface="Calibri"/>
+              </a:rPr>
+              <a:t>Gera a página ou secção — copy, layout, CTAs — na voz da clínica. Mostra preview em staging.</a:t>
+            </a:r>
+          </a:p>
+        </p:txBody>
+      </p:sp>
+      <p:sp>
+        <p:nvSpPr>
+          <p:cNvPr id="19" name="TextBox 18"/>
+          <p:cNvSpPr txBox="1"/>
+          <p:nvPr/>
+        </p:nvSpPr>
+        <p:spPr>
+          <a:xfrm>
+            <a:off x="3913631" y="8275319"/>
+            <a:ext cx="1993391" cy="274320"/>
+          </a:xfrm>
+          <a:prstGeom prst="rect">
+            <a:avLst/>
+          </a:prstGeom>
+          <a:noFill/>
+        </p:spPr>
+        <p:txBody>
+          <a:bodyPr wrap="square" lIns="0" rIns="0" tIns="0" bIns="0" anchor="t">
+            <a:spAutoFit/>
+          </a:bodyPr>
+          <a:lstStyle/>
+          <a:p>
+            <a:pPr algn="l"/>
+            <a:r>
+              <a:rPr sz="900" b="0" i="0" spc="80">
+                <a:solidFill>
+                  <a:srgbClr val="FF8449"/>
+                </a:solidFill>
+                <a:latin typeface="Calibri"/>
+              </a:rPr>
+              <a:t>DRAFT</a:t>
+            </a:r>
+          </a:p>
+        </p:txBody>
+      </p:sp>
+      <p:sp>
+        <p:nvSpPr>
+          <p:cNvPr id="20" name="Right Arrow 19"/>
+          <p:cNvSpPr/>
+          <p:nvPr/>
+        </p:nvSpPr>
+        <p:spPr>
+          <a:xfrm>
+            <a:off x="6199631" y="6099048"/>
+            <a:ext cx="219456" cy="237744"/>
+          </a:xfrm>
+          <a:prstGeom prst="rightArrow">
+            <a:avLst/>
+          </a:prstGeom>
+          <a:solidFill>
+            <a:srgbClr val="FF8449"/>
+          </a:solidFill>
+          <a:ln>
+            <a:noFill/>
+          </a:ln>
+          <a:effectLst/>
+        </p:spPr>
+        <p:style>
+          <a:lnRef idx="1">
+            <a:schemeClr val="accent1"/>
+          </a:lnRef>
+          <a:fillRef idx="3">
+            <a:schemeClr val="accent1"/>
+          </a:fillRef>
+          <a:effectRef idx="2">
+            <a:schemeClr val="accent1"/>
+          </a:effectRef>
+          <a:fontRef idx="minor">
+            <a:schemeClr val="lt1"/>
+          </a:fontRef>
+        </p:style>
+        <p:txBody>
+          <a:bodyPr rtlCol="0" anchor="ctr"/>
+          <a:lstStyle/>
+          <a:p>
+            <a:pPr algn="ctr"/>
+          </a:p>
+        </p:txBody>
+      </p:sp>
+      <p:sp>
+        <p:nvSpPr>
+          <p:cNvPr id="21" name="Rounded Rectangle 20"/>
+          <p:cNvSpPr/>
+          <p:nvPr/>
+        </p:nvSpPr>
+        <p:spPr>
+          <a:xfrm>
+            <a:off x="6455663" y="3657600"/>
+            <a:ext cx="2542032" cy="5120640"/>
+          </a:xfrm>
+          <a:prstGeom prst="roundRect">
+            <a:avLst>
+              <a:gd name="adj" fmla="val 5000"/>
+            </a:avLst>
+          </a:prstGeom>
+          <a:solidFill>
+            <a:srgbClr val="FFFFFF"/>
+          </a:solidFill>
+          <a:ln>
+            <a:noFill/>
+          </a:ln>
+          <a:effectLst/>
+        </p:spPr>
+        <p:style>
+          <a:lnRef idx="1">
+            <a:schemeClr val="accent1"/>
+          </a:lnRef>
+          <a:fillRef idx="3">
+            <a:schemeClr val="accent1"/>
+          </a:fillRef>
+          <a:effectRef idx="2">
+            <a:schemeClr val="accent1"/>
+          </a:effectRef>
+          <a:fontRef idx="minor">
+            <a:schemeClr val="lt1"/>
+          </a:fontRef>
+        </p:style>
+        <p:txBody>
+          <a:bodyPr rtlCol="0" anchor="ctr"/>
+          <a:lstStyle/>
+          <a:p>
+            <a:pPr algn="ctr"/>
+          </a:p>
+        </p:txBody>
+      </p:sp>
+      <p:sp>
+        <p:nvSpPr>
+          <p:cNvPr id="22" name="TextBox 21"/>
+          <p:cNvSpPr txBox="1"/>
+          <p:nvPr/>
+        </p:nvSpPr>
+        <p:spPr>
+          <a:xfrm>
+            <a:off x="6748271" y="3950208"/>
+            <a:ext cx="2084831" cy="502920"/>
+          </a:xfrm>
+          <a:prstGeom prst="rect">
+            <a:avLst/>
+          </a:prstGeom>
+          <a:noFill/>
+        </p:spPr>
+        <p:txBody>
+          <a:bodyPr wrap="square" lIns="0" rIns="0" tIns="0" bIns="0" anchor="t">
+            <a:spAutoFit/>
+          </a:bodyPr>
+          <a:lstStyle/>
+          <a:p>
+            <a:pPr algn="l"/>
+            <a:r>
+              <a:rPr sz="3000" b="0" i="0">
+                <a:solidFill>
+                  <a:srgbClr val="FF8449"/>
+                </a:solidFill>
+                <a:latin typeface="Georgia"/>
+              </a:rPr>
+              <a:t>03</a:t>
+            </a:r>
+          </a:p>
+        </p:txBody>
+      </p:sp>
+      <p:sp>
+        <p:nvSpPr>
+          <p:cNvPr id="23" name="TextBox 22"/>
+          <p:cNvSpPr txBox="1"/>
+          <p:nvPr/>
+        </p:nvSpPr>
+        <p:spPr>
+          <a:xfrm>
+            <a:off x="6748271" y="4617720"/>
+            <a:ext cx="1993391" cy="868680"/>
+          </a:xfrm>
+          <a:prstGeom prst="rect">
+            <a:avLst/>
+          </a:prstGeom>
+          <a:noFill/>
+        </p:spPr>
+        <p:txBody>
+          <a:bodyPr wrap="square" lIns="0" rIns="0" tIns="0" bIns="0" anchor="t">
+            <a:spAutoFit/>
+          </a:bodyPr>
+          <a:lstStyle/>
+          <a:p>
+            <a:pPr algn="l"/>
+            <a:r>
+              <a:rPr sz="1700" b="0" i="0">
+                <a:solidFill>
+                  <a:srgbClr val="2D2D2D"/>
+                </a:solidFill>
+                <a:latin typeface="Georgia"/>
+              </a:rPr>
+              <a:t>Sara revê</a:t>
+            </a:r>
+          </a:p>
+        </p:txBody>
+      </p:sp>
+      <p:cxnSp>
+        <p:nvCxnSpPr>
+          <p:cNvPr id="24" name="Connector 23"/>
+          <p:cNvCxnSpPr/>
+          <p:nvPr/>
+        </p:nvCxnSpPr>
+        <p:spPr>
+          <a:xfrm>
+            <a:off x="6748271" y="5623560"/>
+            <a:ext cx="1956816" cy="0"/>
+          </a:xfrm>
+          <a:prstGeom prst="line">
+            <a:avLst/>
+          </a:prstGeom>
+          <a:ln w="9525">
+            <a:solidFill>
+              <a:srgbClr val="E5E7EB"/>
+            </a:solidFill>
+          </a:ln>
+        </p:spPr>
+        <p:style>
+          <a:lnRef idx="2">
+            <a:schemeClr val="accent1"/>
+          </a:lnRef>
+          <a:fillRef idx="0">
+            <a:schemeClr val="accent1"/>
+          </a:fillRef>
+          <a:effectRef idx="1">
+            <a:schemeClr val="accent1"/>
+          </a:effectRef>
+          <a:fontRef idx="minor">
+            <a:schemeClr val="tx1"/>
+          </a:fontRef>
+        </p:style>
+      </p:cxnSp>
+      <p:sp>
+        <p:nvSpPr>
+          <p:cNvPr id="25" name="TextBox 24"/>
+          <p:cNvSpPr txBox="1"/>
+          <p:nvPr/>
+        </p:nvSpPr>
+        <p:spPr>
+          <a:xfrm>
+            <a:off x="6748271" y="5760720"/>
+            <a:ext cx="1993391" cy="2377439"/>
+          </a:xfrm>
+          <a:prstGeom prst="rect">
+            <a:avLst/>
+          </a:prstGeom>
+          <a:noFill/>
+        </p:spPr>
+        <p:txBody>
+          <a:bodyPr wrap="square" lIns="0" rIns="0" tIns="0" bIns="0" anchor="t">
+            <a:spAutoFit/>
+          </a:bodyPr>
+          <a:lstStyle/>
+          <a:p>
+            <a:pPr algn="l"/>
+            <a:r>
+              <a:rPr sz="1100" b="0" i="0">
+                <a:solidFill>
+                  <a:srgbClr val="4B5563"/>
+                </a:solidFill>
+                <a:latin typeface="Calibri"/>
+              </a:rPr>
+              <a:t>Vê a mudança lado a lado com o site atual. Aprova, ajusta, ou pede variantes.</a:t>
+            </a:r>
+          </a:p>
+        </p:txBody>
+      </p:sp>
+      <p:sp>
+        <p:nvSpPr>
+          <p:cNvPr id="26" name="TextBox 25"/>
+          <p:cNvSpPr txBox="1"/>
+          <p:nvPr/>
+        </p:nvSpPr>
+        <p:spPr>
+          <a:xfrm>
+            <a:off x="6748271" y="8275319"/>
+            <a:ext cx="1993391" cy="274320"/>
+          </a:xfrm>
+          <a:prstGeom prst="rect">
+            <a:avLst/>
+          </a:prstGeom>
+          <a:noFill/>
+        </p:spPr>
+        <p:txBody>
+          <a:bodyPr wrap="square" lIns="0" rIns="0" tIns="0" bIns="0" anchor="t">
+            <a:spAutoFit/>
+          </a:bodyPr>
+          <a:lstStyle/>
+          <a:p>
+            <a:pPr algn="l"/>
+            <a:r>
+              <a:rPr sz="900" b="0" i="0" spc="80">
+                <a:solidFill>
+                  <a:srgbClr val="FF8449"/>
+                </a:solidFill>
+                <a:latin typeface="Calibri"/>
+              </a:rPr>
+              <a:t>REVIEW</a:t>
+            </a:r>
+          </a:p>
+        </p:txBody>
+      </p:sp>
+      <p:sp>
+        <p:nvSpPr>
+          <p:cNvPr id="27" name="Right Arrow 26"/>
+          <p:cNvSpPr/>
+          <p:nvPr/>
+        </p:nvSpPr>
+        <p:spPr>
+          <a:xfrm>
+            <a:off x="9034271" y="6099048"/>
+            <a:ext cx="219456" cy="237744"/>
+          </a:xfrm>
+          <a:prstGeom prst="rightArrow">
+            <a:avLst/>
+          </a:prstGeom>
+          <a:solidFill>
+            <a:srgbClr val="FF8449"/>
+          </a:solidFill>
+          <a:ln>
+            <a:noFill/>
+          </a:ln>
+          <a:effectLst/>
+        </p:spPr>
+        <p:style>
+          <a:lnRef idx="1">
+            <a:schemeClr val="accent1"/>
+          </a:lnRef>
+          <a:fillRef idx="3">
+            <a:schemeClr val="accent1"/>
+          </a:fillRef>
+          <a:effectRef idx="2">
+            <a:schemeClr val="accent1"/>
+          </a:effectRef>
+          <a:fontRef idx="minor">
+            <a:schemeClr val="lt1"/>
+          </a:fontRef>
+        </p:style>
+        <p:txBody>
+          <a:bodyPr rtlCol="0" anchor="ctr"/>
+          <a:lstStyle/>
+          <a:p>
+            <a:pPr algn="ctr"/>
+          </a:p>
+        </p:txBody>
+      </p:sp>
+      <p:sp>
+        <p:nvSpPr>
+          <p:cNvPr id="28" name="Rounded Rectangle 27"/>
+          <p:cNvSpPr/>
+          <p:nvPr/>
+        </p:nvSpPr>
+        <p:spPr>
+          <a:xfrm>
+            <a:off x="9290303" y="3657600"/>
+            <a:ext cx="2542032" cy="5120640"/>
+          </a:xfrm>
+          <a:prstGeom prst="roundRect">
+            <a:avLst>
+              <a:gd name="adj" fmla="val 5000"/>
+            </a:avLst>
+          </a:prstGeom>
+          <a:solidFill>
+            <a:srgbClr val="FFFFFF"/>
+          </a:solidFill>
+          <a:ln>
+            <a:noFill/>
+          </a:ln>
+          <a:effectLst/>
+        </p:spPr>
+        <p:style>
+          <a:lnRef idx="1">
+            <a:schemeClr val="accent1"/>
+          </a:lnRef>
+          <a:fillRef idx="3">
+            <a:schemeClr val="accent1"/>
+          </a:fillRef>
+          <a:effectRef idx="2">
+            <a:schemeClr val="accent1"/>
+          </a:effectRef>
+          <a:fontRef idx="minor">
+            <a:schemeClr val="lt1"/>
+          </a:fontRef>
+        </p:style>
+        <p:txBody>
+          <a:bodyPr rtlCol="0" anchor="ctr"/>
+          <a:lstStyle/>
+          <a:p>
+            <a:pPr algn="ctr"/>
+          </a:p>
+        </p:txBody>
+      </p:sp>
+      <p:sp>
+        <p:nvSpPr>
+          <p:cNvPr id="29" name="TextBox 28"/>
+          <p:cNvSpPr txBox="1"/>
+          <p:nvPr/>
+        </p:nvSpPr>
+        <p:spPr>
+          <a:xfrm>
+            <a:off x="9582911" y="3950208"/>
+            <a:ext cx="2084831" cy="502920"/>
+          </a:xfrm>
+          <a:prstGeom prst="rect">
+            <a:avLst/>
+          </a:prstGeom>
+          <a:noFill/>
+        </p:spPr>
+        <p:txBody>
+          <a:bodyPr wrap="square" lIns="0" rIns="0" tIns="0" bIns="0" anchor="t">
+            <a:spAutoFit/>
+          </a:bodyPr>
+          <a:lstStyle/>
+          <a:p>
+            <a:pPr algn="l"/>
+            <a:r>
+              <a:rPr sz="3000" b="0" i="0">
+                <a:solidFill>
+                  <a:srgbClr val="FF8449"/>
+                </a:solidFill>
+                <a:latin typeface="Georgia"/>
+              </a:rPr>
+              <a:t>04</a:t>
+            </a:r>
+          </a:p>
+        </p:txBody>
+      </p:sp>
+      <p:sp>
+        <p:nvSpPr>
+          <p:cNvPr id="30" name="TextBox 29"/>
+          <p:cNvSpPr txBox="1"/>
+          <p:nvPr/>
+        </p:nvSpPr>
+        <p:spPr>
+          <a:xfrm>
+            <a:off x="9582911" y="4617720"/>
+            <a:ext cx="1993391" cy="868680"/>
+          </a:xfrm>
+          <a:prstGeom prst="rect">
+            <a:avLst/>
+          </a:prstGeom>
+          <a:noFill/>
+        </p:spPr>
+        <p:txBody>
+          <a:bodyPr wrap="square" lIns="0" rIns="0" tIns="0" bIns="0" anchor="t">
+            <a:spAutoFit/>
+          </a:bodyPr>
+          <a:lstStyle/>
+          <a:p>
+            <a:pPr algn="l"/>
+            <a:r>
+              <a:rPr sz="1700" b="0" i="0">
+                <a:solidFill>
+                  <a:srgbClr val="2D2D2D"/>
+                </a:solidFill>
+                <a:latin typeface="Georgia"/>
+              </a:rPr>
+              <a:t>Push para staging</a:t>
+            </a:r>
+          </a:p>
+        </p:txBody>
+      </p:sp>
+      <p:cxnSp>
+        <p:nvCxnSpPr>
+          <p:cNvPr id="31" name="Connector 30"/>
+          <p:cNvCxnSpPr/>
+          <p:nvPr/>
+        </p:nvCxnSpPr>
+        <p:spPr>
+          <a:xfrm>
+            <a:off x="9582911" y="5623560"/>
+            <a:ext cx="1956816" cy="0"/>
+          </a:xfrm>
+          <a:prstGeom prst="line">
+            <a:avLst/>
+          </a:prstGeom>
+          <a:ln w="9525">
+            <a:solidFill>
+              <a:srgbClr val="E5E7EB"/>
+            </a:solidFill>
+          </a:ln>
+        </p:spPr>
+        <p:style>
+          <a:lnRef idx="2">
+            <a:schemeClr val="accent1"/>
+          </a:lnRef>
+          <a:fillRef idx="0">
+            <a:schemeClr val="accent1"/>
+          </a:fillRef>
+          <a:effectRef idx="1">
+            <a:schemeClr val="accent1"/>
+          </a:effectRef>
+          <a:fontRef idx="minor">
+            <a:schemeClr val="tx1"/>
+          </a:fontRef>
+        </p:style>
+      </p:cxnSp>
+      <p:sp>
+        <p:nvSpPr>
+          <p:cNvPr id="32" name="TextBox 31"/>
+          <p:cNvSpPr txBox="1"/>
+          <p:nvPr/>
+        </p:nvSpPr>
+        <p:spPr>
+          <a:xfrm>
+            <a:off x="9582911" y="5760720"/>
+            <a:ext cx="1993391" cy="2377439"/>
+          </a:xfrm>
+          <a:prstGeom prst="rect">
+            <a:avLst/>
+          </a:prstGeom>
+          <a:noFill/>
+        </p:spPr>
+        <p:txBody>
+          <a:bodyPr wrap="square" lIns="0" rIns="0" tIns="0" bIns="0" anchor="t">
+            <a:spAutoFit/>
+          </a:bodyPr>
+          <a:lstStyle/>
+          <a:p>
+            <a:pPr algn="l"/>
+            <a:r>
+              <a:rPr sz="1100" b="0" i="0">
+                <a:solidFill>
+                  <a:srgbClr val="4B5563"/>
+                </a:solidFill>
+                <a:latin typeface="Calibri"/>
+              </a:rPr>
+              <a:t>Via website MCP. Sara vê o preview no URL de staging antes de qualquer coisa ir para o ar.</a:t>
+            </a:r>
+          </a:p>
+        </p:txBody>
+      </p:sp>
+      <p:sp>
+        <p:nvSpPr>
+          <p:cNvPr id="33" name="TextBox 32"/>
+          <p:cNvSpPr txBox="1"/>
+          <p:nvPr/>
+        </p:nvSpPr>
+        <p:spPr>
+          <a:xfrm>
+            <a:off x="9582911" y="8275319"/>
+            <a:ext cx="1993391" cy="274320"/>
+          </a:xfrm>
+          <a:prstGeom prst="rect">
+            <a:avLst/>
+          </a:prstGeom>
+          <a:noFill/>
+        </p:spPr>
+        <p:txBody>
+          <a:bodyPr wrap="square" lIns="0" rIns="0" tIns="0" bIns="0" anchor="t">
+            <a:spAutoFit/>
+          </a:bodyPr>
+          <a:lstStyle/>
+          <a:p>
+            <a:pPr algn="l"/>
+            <a:r>
+              <a:rPr sz="900" b="0" i="0" spc="80">
+                <a:solidFill>
+                  <a:srgbClr val="FF8449"/>
+                </a:solidFill>
+                <a:latin typeface="Calibri"/>
+              </a:rPr>
+              <a:t>STAGE</a:t>
+            </a:r>
+          </a:p>
+        </p:txBody>
+      </p:sp>
+      <p:sp>
+        <p:nvSpPr>
+          <p:cNvPr id="34" name="Right Arrow 33"/>
+          <p:cNvSpPr/>
+          <p:nvPr/>
+        </p:nvSpPr>
+        <p:spPr>
+          <a:xfrm>
+            <a:off x="11868911" y="6099048"/>
+            <a:ext cx="219456" cy="237744"/>
+          </a:xfrm>
+          <a:prstGeom prst="rightArrow">
+            <a:avLst/>
+          </a:prstGeom>
+          <a:solidFill>
+            <a:srgbClr val="FF8449"/>
+          </a:solidFill>
+          <a:ln>
+            <a:noFill/>
+          </a:ln>
+          <a:effectLst/>
+        </p:spPr>
+        <p:style>
+          <a:lnRef idx="1">
+            <a:schemeClr val="accent1"/>
+          </a:lnRef>
+          <a:fillRef idx="3">
+            <a:schemeClr val="accent1"/>
+          </a:fillRef>
+          <a:effectRef idx="2">
+            <a:schemeClr val="accent1"/>
+          </a:effectRef>
+          <a:fontRef idx="minor">
+            <a:schemeClr val="lt1"/>
+          </a:fontRef>
+        </p:style>
+        <p:txBody>
+          <a:bodyPr rtlCol="0" anchor="ctr"/>
+          <a:lstStyle/>
+          <a:p>
+            <a:pPr algn="ctr"/>
+          </a:p>
+        </p:txBody>
+      </p:sp>
+      <p:sp>
+        <p:nvSpPr>
+          <p:cNvPr id="35" name="Rounded Rectangle 34"/>
+          <p:cNvSpPr/>
+          <p:nvPr/>
+        </p:nvSpPr>
+        <p:spPr>
+          <a:xfrm>
+            <a:off x="12124943" y="3657600"/>
+            <a:ext cx="2542032" cy="5120640"/>
+          </a:xfrm>
+          <a:prstGeom prst="roundRect">
+            <a:avLst>
+              <a:gd name="adj" fmla="val 5000"/>
+            </a:avLst>
+          </a:prstGeom>
+          <a:solidFill>
+            <a:srgbClr val="FFFFFF"/>
+          </a:solidFill>
+          <a:ln>
+            <a:noFill/>
+          </a:ln>
+          <a:effectLst/>
+        </p:spPr>
+        <p:style>
+          <a:lnRef idx="1">
+            <a:schemeClr val="accent1"/>
+          </a:lnRef>
+          <a:fillRef idx="3">
+            <a:schemeClr val="accent1"/>
+          </a:fillRef>
+          <a:effectRef idx="2">
+            <a:schemeClr val="accent1"/>
+          </a:effectRef>
+          <a:fontRef idx="minor">
+            <a:schemeClr val="lt1"/>
+          </a:fontRef>
+        </p:style>
+        <p:txBody>
+          <a:bodyPr rtlCol="0" anchor="ctr"/>
+          <a:lstStyle/>
+          <a:p>
+            <a:pPr algn="ctr"/>
+          </a:p>
+        </p:txBody>
+      </p:sp>
+      <p:sp>
+        <p:nvSpPr>
+          <p:cNvPr id="36" name="TextBox 35"/>
+          <p:cNvSpPr txBox="1"/>
+          <p:nvPr/>
+        </p:nvSpPr>
+        <p:spPr>
+          <a:xfrm>
+            <a:off x="12417551" y="3950208"/>
+            <a:ext cx="2084831" cy="502920"/>
+          </a:xfrm>
+          <a:prstGeom prst="rect">
+            <a:avLst/>
+          </a:prstGeom>
+          <a:noFill/>
+        </p:spPr>
+        <p:txBody>
+          <a:bodyPr wrap="square" lIns="0" rIns="0" tIns="0" bIns="0" anchor="t">
+            <a:spAutoFit/>
+          </a:bodyPr>
+          <a:lstStyle/>
+          <a:p>
+            <a:pPr algn="l"/>
+            <a:r>
+              <a:rPr sz="3000" b="0" i="0">
+                <a:solidFill>
+                  <a:srgbClr val="FF8449"/>
+                </a:solidFill>
+                <a:latin typeface="Georgia"/>
+              </a:rPr>
+              <a:t>05</a:t>
+            </a:r>
+          </a:p>
+        </p:txBody>
+      </p:sp>
+      <p:sp>
+        <p:nvSpPr>
+          <p:cNvPr id="37" name="TextBox 36"/>
+          <p:cNvSpPr txBox="1"/>
+          <p:nvPr/>
+        </p:nvSpPr>
+        <p:spPr>
+          <a:xfrm>
+            <a:off x="12417551" y="4617720"/>
+            <a:ext cx="1993391" cy="868680"/>
+          </a:xfrm>
+          <a:prstGeom prst="rect">
+            <a:avLst/>
+          </a:prstGeom>
+          <a:noFill/>
+        </p:spPr>
+        <p:txBody>
+          <a:bodyPr wrap="square" lIns="0" rIns="0" tIns="0" bIns="0" anchor="t">
+            <a:spAutoFit/>
+          </a:bodyPr>
+          <a:lstStyle/>
+          <a:p>
+            <a:pPr algn="l"/>
+            <a:r>
+              <a:rPr sz="1700" b="0" i="0">
+                <a:solidFill>
+                  <a:srgbClr val="2D2D2D"/>
+                </a:solidFill>
+                <a:latin typeface="Georgia"/>
+              </a:rPr>
+              <a:t>Sara aprova go-live</a:t>
+            </a:r>
+          </a:p>
+        </p:txBody>
+      </p:sp>
+      <p:cxnSp>
+        <p:nvCxnSpPr>
+          <p:cNvPr id="38" name="Connector 37"/>
+          <p:cNvCxnSpPr/>
+          <p:nvPr/>
+        </p:nvCxnSpPr>
+        <p:spPr>
+          <a:xfrm>
+            <a:off x="12417551" y="5623560"/>
+            <a:ext cx="1956816" cy="0"/>
+          </a:xfrm>
+          <a:prstGeom prst="line">
+            <a:avLst/>
+          </a:prstGeom>
+          <a:ln w="9525">
+            <a:solidFill>
+              <a:srgbClr val="E5E7EB"/>
+            </a:solidFill>
+          </a:ln>
+        </p:spPr>
+        <p:style>
+          <a:lnRef idx="2">
+            <a:schemeClr val="accent1"/>
+          </a:lnRef>
+          <a:fillRef idx="0">
+            <a:schemeClr val="accent1"/>
+          </a:fillRef>
+          <a:effectRef idx="1">
+            <a:schemeClr val="accent1"/>
+          </a:effectRef>
+          <a:fontRef idx="minor">
+            <a:schemeClr val="tx1"/>
+          </a:fontRef>
+        </p:style>
+      </p:cxnSp>
+      <p:sp>
+        <p:nvSpPr>
+          <p:cNvPr id="39" name="TextBox 38"/>
+          <p:cNvSpPr txBox="1"/>
+          <p:nvPr/>
+        </p:nvSpPr>
+        <p:spPr>
+          <a:xfrm>
+            <a:off x="12417551" y="5760720"/>
+            <a:ext cx="1993391" cy="2377439"/>
+          </a:xfrm>
+          <a:prstGeom prst="rect">
+            <a:avLst/>
+          </a:prstGeom>
+          <a:noFill/>
+        </p:spPr>
+        <p:txBody>
+          <a:bodyPr wrap="square" lIns="0" rIns="0" tIns="0" bIns="0" anchor="t">
+            <a:spAutoFit/>
+          </a:bodyPr>
+          <a:lstStyle/>
+          <a:p>
+            <a:pPr algn="l"/>
+            <a:r>
+              <a:rPr sz="1100" b="0" i="0">
+                <a:solidFill>
+                  <a:srgbClr val="4B5563"/>
+                </a:solidFill>
+                <a:latin typeface="Calibri"/>
+              </a:rPr>
+              <a:t>Uma palavra em Cowork. Sem CMS, sem version-control, sem ticket a programador.</a:t>
+            </a:r>
+          </a:p>
+        </p:txBody>
+      </p:sp>
+      <p:sp>
+        <p:nvSpPr>
+          <p:cNvPr id="40" name="TextBox 39"/>
+          <p:cNvSpPr txBox="1"/>
+          <p:nvPr/>
+        </p:nvSpPr>
+        <p:spPr>
+          <a:xfrm>
+            <a:off x="12417551" y="8275319"/>
+            <a:ext cx="1993391" cy="274320"/>
+          </a:xfrm>
+          <a:prstGeom prst="rect">
+            <a:avLst/>
+          </a:prstGeom>
+          <a:noFill/>
+        </p:spPr>
+        <p:txBody>
+          <a:bodyPr wrap="square" lIns="0" rIns="0" tIns="0" bIns="0" anchor="t">
+            <a:spAutoFit/>
+          </a:bodyPr>
+          <a:lstStyle/>
+          <a:p>
+            <a:pPr algn="l"/>
+            <a:r>
+              <a:rPr sz="900" b="0" i="0" spc="80">
+                <a:solidFill>
+                  <a:srgbClr val="FF8449"/>
+                </a:solidFill>
+                <a:latin typeface="Calibri"/>
+              </a:rPr>
+              <a:t>APPROVE</a:t>
+            </a:r>
+          </a:p>
+        </p:txBody>
+      </p:sp>
+      <p:sp>
+        <p:nvSpPr>
+          <p:cNvPr id="41" name="Right Arrow 40"/>
+          <p:cNvSpPr/>
+          <p:nvPr/>
+        </p:nvSpPr>
+        <p:spPr>
+          <a:xfrm>
+            <a:off x="14703551" y="6099048"/>
+            <a:ext cx="219456" cy="237744"/>
+          </a:xfrm>
+          <a:prstGeom prst="rightArrow">
+            <a:avLst/>
+          </a:prstGeom>
+          <a:solidFill>
+            <a:srgbClr val="FF8449"/>
+          </a:solidFill>
+          <a:ln>
+            <a:noFill/>
+          </a:ln>
+          <a:effectLst/>
+        </p:spPr>
+        <p:style>
+          <a:lnRef idx="1">
+            <a:schemeClr val="accent1"/>
+          </a:lnRef>
+          <a:fillRef idx="3">
+            <a:schemeClr val="accent1"/>
+          </a:fillRef>
+          <a:effectRef idx="2">
+            <a:schemeClr val="accent1"/>
+          </a:effectRef>
+          <a:fontRef idx="minor">
+            <a:schemeClr val="lt1"/>
+          </a:fontRef>
+        </p:style>
+        <p:txBody>
+          <a:bodyPr rtlCol="0" anchor="ctr"/>
+          <a:lstStyle/>
+          <a:p>
+            <a:pPr algn="ctr"/>
+          </a:p>
+        </p:txBody>
+      </p:sp>
+      <p:sp>
+        <p:nvSpPr>
+          <p:cNvPr id="42" name="Rounded Rectangle 41"/>
+          <p:cNvSpPr/>
+          <p:nvPr/>
+        </p:nvSpPr>
+        <p:spPr>
+          <a:xfrm>
+            <a:off x="14959584" y="3657600"/>
+            <a:ext cx="2542032" cy="5120640"/>
+          </a:xfrm>
+          <a:prstGeom prst="roundRect">
+            <a:avLst>
+              <a:gd name="adj" fmla="val 5000"/>
+            </a:avLst>
+          </a:prstGeom>
+          <a:solidFill>
+            <a:srgbClr val="FFFFFF"/>
+          </a:solidFill>
+          <a:ln>
+            <a:noFill/>
+          </a:ln>
+          <a:effectLst/>
+        </p:spPr>
+        <p:style>
+          <a:lnRef idx="1">
+            <a:schemeClr val="accent1"/>
+          </a:lnRef>
+          <a:fillRef idx="3">
+            <a:schemeClr val="accent1"/>
+          </a:fillRef>
+          <a:effectRef idx="2">
+            <a:schemeClr val="accent1"/>
+          </a:effectRef>
+          <a:fontRef idx="minor">
+            <a:schemeClr val="lt1"/>
+          </a:fontRef>
+        </p:style>
+        <p:txBody>
+          <a:bodyPr rtlCol="0" anchor="ctr"/>
+          <a:lstStyle/>
+          <a:p>
+            <a:pPr algn="ctr"/>
+          </a:p>
+        </p:txBody>
+      </p:sp>
+      <p:sp>
+        <p:nvSpPr>
+          <p:cNvPr id="43" name="TextBox 42"/>
+          <p:cNvSpPr txBox="1"/>
+          <p:nvPr/>
+        </p:nvSpPr>
+        <p:spPr>
+          <a:xfrm>
+            <a:off x="15252192" y="3950208"/>
+            <a:ext cx="2084831" cy="502920"/>
+          </a:xfrm>
+          <a:prstGeom prst="rect">
+            <a:avLst/>
+          </a:prstGeom>
+          <a:noFill/>
+        </p:spPr>
+        <p:txBody>
+          <a:bodyPr wrap="square" lIns="0" rIns="0" tIns="0" bIns="0" anchor="t">
+            <a:spAutoFit/>
+          </a:bodyPr>
+          <a:lstStyle/>
+          <a:p>
+            <a:pPr algn="l"/>
+            <a:r>
+              <a:rPr sz="3000" b="0" i="0">
+                <a:solidFill>
+                  <a:srgbClr val="FF8449"/>
+                </a:solidFill>
+                <a:latin typeface="Georgia"/>
+              </a:rPr>
+              <a:t>06</a:t>
+            </a:r>
+          </a:p>
+        </p:txBody>
+      </p:sp>
+      <p:sp>
+        <p:nvSpPr>
+          <p:cNvPr id="44" name="TextBox 43"/>
+          <p:cNvSpPr txBox="1"/>
+          <p:nvPr/>
+        </p:nvSpPr>
+        <p:spPr>
+          <a:xfrm>
+            <a:off x="15252192" y="4617720"/>
+            <a:ext cx="1993391" cy="868680"/>
+          </a:xfrm>
+          <a:prstGeom prst="rect">
+            <a:avLst/>
+          </a:prstGeom>
+          <a:noFill/>
+        </p:spPr>
+        <p:txBody>
+          <a:bodyPr wrap="square" lIns="0" rIns="0" tIns="0" bIns="0" anchor="t">
+            <a:spAutoFit/>
+          </a:bodyPr>
+          <a:lstStyle/>
+          <a:p>
+            <a:pPr algn="l"/>
+            <a:r>
+              <a:rPr sz="1700" b="0" i="0">
+                <a:solidFill>
+                  <a:srgbClr val="2D2D2D"/>
+                </a:solidFill>
+                <a:latin typeface="Georgia"/>
+              </a:rPr>
+              <a:t>Publicado + logged</a:t>
+            </a:r>
+          </a:p>
+        </p:txBody>
+      </p:sp>
+      <p:cxnSp>
+        <p:nvCxnSpPr>
+          <p:cNvPr id="45" name="Connector 44"/>
+          <p:cNvCxnSpPr/>
+          <p:nvPr/>
+        </p:nvCxnSpPr>
+        <p:spPr>
+          <a:xfrm>
+            <a:off x="15252192" y="5623560"/>
+            <a:ext cx="1956816" cy="0"/>
+          </a:xfrm>
+          <a:prstGeom prst="line">
+            <a:avLst/>
+          </a:prstGeom>
+          <a:ln w="9525">
+            <a:solidFill>
+              <a:srgbClr val="E5E7EB"/>
+            </a:solidFill>
+          </a:ln>
+        </p:spPr>
+        <p:style>
+          <a:lnRef idx="2">
+            <a:schemeClr val="accent1"/>
+          </a:lnRef>
+          <a:fillRef idx="0">
+            <a:schemeClr val="accent1"/>
+          </a:fillRef>
+          <a:effectRef idx="1">
+            <a:schemeClr val="accent1"/>
+          </a:effectRef>
+          <a:fontRef idx="minor">
+            <a:schemeClr val="tx1"/>
+          </a:fontRef>
+        </p:style>
+      </p:cxnSp>
+      <p:sp>
+        <p:nvSpPr>
+          <p:cNvPr id="46" name="TextBox 45"/>
+          <p:cNvSpPr txBox="1"/>
+          <p:nvPr/>
+        </p:nvSpPr>
+        <p:spPr>
+          <a:xfrm>
+            <a:off x="15252192" y="5760720"/>
+            <a:ext cx="1993391" cy="2377439"/>
+          </a:xfrm>
+          <a:prstGeom prst="rect">
+            <a:avLst/>
+          </a:prstGeom>
+          <a:noFill/>
+        </p:spPr>
+        <p:txBody>
+          <a:bodyPr wrap="square" lIns="0" rIns="0" tIns="0" bIns="0" anchor="t">
+            <a:spAutoFit/>
+          </a:bodyPr>
+          <a:lstStyle/>
+          <a:p>
+            <a:pPr algn="l"/>
+            <a:r>
+              <a:rPr sz="1100" b="0" i="0">
+                <a:solidFill>
+                  <a:srgbClr val="4B5563"/>
+                </a:solidFill>
+                <a:latin typeface="Calibri"/>
+              </a:rPr>
+              <a:t>Publicado no site da clínica. Mudança registada com timestamp, razão, e diff. Fácil de reverter.</a:t>
+            </a:r>
+          </a:p>
+        </p:txBody>
+      </p:sp>
+      <p:sp>
+        <p:nvSpPr>
+          <p:cNvPr id="47" name="TextBox 46"/>
+          <p:cNvSpPr txBox="1"/>
+          <p:nvPr/>
+        </p:nvSpPr>
+        <p:spPr>
+          <a:xfrm>
+            <a:off x="15252192" y="8275319"/>
+            <a:ext cx="1993391" cy="274320"/>
+          </a:xfrm>
+          <a:prstGeom prst="rect">
+            <a:avLst/>
+          </a:prstGeom>
+          <a:noFill/>
+        </p:spPr>
+        <p:txBody>
+          <a:bodyPr wrap="square" lIns="0" rIns="0" tIns="0" bIns="0" anchor="t">
+            <a:spAutoFit/>
+          </a:bodyPr>
+          <a:lstStyle/>
+          <a:p>
+            <a:pPr algn="l"/>
+            <a:r>
+              <a:rPr sz="900" b="0" i="0" spc="80">
+                <a:solidFill>
+                  <a:srgbClr val="FF8449"/>
+                </a:solidFill>
+                <a:latin typeface="Calibri"/>
+              </a:rPr>
+              <a:t>SHIP</a:t>
+            </a:r>
+          </a:p>
+        </p:txBody>
+      </p:sp>
+      <p:sp>
+        <p:nvSpPr>
+          <p:cNvPr id="48" name="TextBox 47"/>
+          <p:cNvSpPr txBox="1"/>
+          <p:nvPr/>
+        </p:nvSpPr>
+        <p:spPr>
+          <a:xfrm>
+            <a:off x="914400" y="9144000"/>
+            <a:ext cx="16459200" cy="640080"/>
+          </a:xfrm>
+          <a:prstGeom prst="rect">
+            <a:avLst/>
+          </a:prstGeom>
+          <a:noFill/>
+        </p:spPr>
+        <p:txBody>
+          <a:bodyPr wrap="square" lIns="0" rIns="0" tIns="0" bIns="0" anchor="t">
+            <a:spAutoFit/>
+          </a:bodyPr>
+          <a:lstStyle/>
+          <a:p>
+            <a:pPr algn="l"/>
+            <a:r>
+              <a:rPr sz="1300" b="0" i="1">
+                <a:solidFill>
+                  <a:srgbClr val="4B5563"/>
+                </a:solidFill>
+                <a:latin typeface="Georgia"/>
+              </a:rPr>
+              <a:t>O site fica vivo sem programador. Quando se pensa numa mudança, ela vai ao ar no mesmo dia — não em três semanas.</a:t>
+            </a:r>
+          </a:p>
+        </p:txBody>
+      </p:sp>
+      <p:sp>
+        <p:nvSpPr>
+          <p:cNvPr id="49" name="TextBox 48"/>
+          <p:cNvSpPr txBox="1"/>
+          <p:nvPr/>
+        </p:nvSpPr>
+        <p:spPr>
+          <a:xfrm>
+            <a:off x="914400" y="9738360"/>
+            <a:ext cx="10972800" cy="228600"/>
+          </a:xfrm>
+          <a:prstGeom prst="rect">
+            <a:avLst/>
+          </a:prstGeom>
+          <a:noFill/>
+        </p:spPr>
+        <p:txBody>
+          <a:bodyPr wrap="square" lIns="0" rIns="0" tIns="0" bIns="0" anchor="t">
+            <a:spAutoFit/>
+          </a:bodyPr>
+          <a:lstStyle/>
+          <a:p>
+            <a:pPr algn="l"/>
+            <a:r>
+              <a:rPr sz="975" b="0" i="0" spc="40">
+                <a:solidFill>
+                  <a:srgbClr val="6B7280"/>
+                </a:solidFill>
+                <a:latin typeface="Calibri"/>
+              </a:rPr>
+              <a:t>PROCESS FLOW · 12 · CLÍNICA DA SARA</a:t>
+            </a:r>
+          </a:p>
+        </p:txBody>
+      </p:sp>
+      <p:sp>
+        <p:nvSpPr>
+          <p:cNvPr id="50" name="TextBox 49"/>
+          <p:cNvSpPr txBox="1"/>
+          <p:nvPr/>
+        </p:nvSpPr>
+        <p:spPr>
+          <a:xfrm>
+            <a:off x="15544800" y="9738360"/>
+            <a:ext cx="914400" cy="228600"/>
+          </a:xfrm>
+          <a:prstGeom prst="rect">
+            <a:avLst/>
+          </a:prstGeom>
+          <a:noFill/>
+        </p:spPr>
+        <p:txBody>
+          <a:bodyPr wrap="square" lIns="0" rIns="0" tIns="0" bIns="0" anchor="t">
+            <a:spAutoFit/>
+          </a:bodyPr>
+          <a:lstStyle/>
+          <a:p>
+            <a:pPr algn="r"/>
+            <a:r>
+              <a:rPr sz="975" b="0" i="0" spc="40">
+                <a:solidFill>
+                  <a:srgbClr val="6B7280"/>
+                </a:solidFill>
+                <a:latin typeface="Calibri"/>
+              </a:rPr>
+              <a:t>13 / 14</a:t>
+            </a:r>
+          </a:p>
+        </p:txBody>
+      </p:sp>
+      <p:sp>
+        <p:nvSpPr>
+          <p:cNvPr id="51" name="TextBox 50"/>
+          <p:cNvSpPr txBox="1"/>
+          <p:nvPr/>
+        </p:nvSpPr>
+        <p:spPr>
+          <a:xfrm>
+            <a:off x="16459200" y="9710928"/>
+            <a:ext cx="1645920" cy="274320"/>
+          </a:xfrm>
+          <a:prstGeom prst="rect">
+            <a:avLst/>
+          </a:prstGeom>
+          <a:noFill/>
+        </p:spPr>
+        <p:txBody>
+          <a:bodyPr wrap="square" lIns="0" rIns="0" tIns="0" bIns="0" anchor="t">
+            <a:spAutoFit/>
+          </a:bodyPr>
+          <a:lstStyle/>
+          <a:p>
+            <a:pPr algn="r"/>
+            <a:r>
+              <a:rPr sz="1000" b="1" i="0">
+                <a:solidFill>
+                  <a:srgbClr val="FF8449"/>
+                </a:solidFill>
+                <a:latin typeface="Georgia"/>
+              </a:rPr>
+              <a:t>OBLQ · AI</a:t>
+            </a:r>
+          </a:p>
+        </p:txBody>
+      </p:sp>
+    </p:spTree>
+  </p:cSld>
+  <p:clrMapOvr>
+    <a:masterClrMapping/>
+  </p:clrMapOvr>
+</p:sld>
+</file>
+
+<file path=ppt/slides/slide14.xml><?xml version="1.0" encoding="utf-8"?>
 <p:sld xmlns:a="http://schemas.openxmlformats.org/drawingml/2006/main" xmlns:p="http://schemas.openxmlformats.org/presentationml/2006/main" xmlns:r="http://schemas.openxmlformats.org/officeDocument/2006/relationships">
   <p:cSld>
     <p:bg>
@@ -6320,7 +12332,7 @@
                 </a:solidFill>
                 <a:latin typeface="Georgia"/>
               </a:rPr>
-              <a:t>Um sistema. Nove fluxos. Uma dona — a Sara.</a:t>
+              <a:t>Um sistema. Doze fluxos. Uma dona — a Sara.</a:t>
             </a:r>
           </a:p>
         </p:txBody>
@@ -6334,28 +12346,28 @@
         <p:spPr>
           <a:xfrm>
             <a:off x="914400" y="2743200"/>
-            <a:ext cx="15544800" cy="731520"/>
-          </a:xfrm>
-          <a:prstGeom prst="rect">
-            <a:avLst/>
-          </a:prstGeom>
-          <a:noFill/>
-        </p:spPr>
-        <p:txBody>
-          <a:bodyPr wrap="square" lIns="0" rIns="0" tIns="0" bIns="0" anchor="t">
-            <a:spAutoFit/>
-          </a:bodyPr>
-          <a:lstStyle/>
-          <a:p>
-            <a:pPr algn="l"/>
-            <a:r>
-              <a:rPr sz="1600" b="0" i="0">
+            <a:ext cx="15544800" cy="822960"/>
+          </a:xfrm>
+          <a:prstGeom prst="rect">
+            <a:avLst/>
+          </a:prstGeom>
+          <a:noFill/>
+        </p:spPr>
+        <p:txBody>
+          <a:bodyPr wrap="square" lIns="0" rIns="0" tIns="0" bIns="0" anchor="t">
+            <a:spAutoFit/>
+          </a:bodyPr>
+          <a:lstStyle/>
+          <a:p>
+            <a:pPr algn="l"/>
+            <a:r>
+              <a:rPr sz="1500" b="0" i="0">
                 <a:solidFill>
                   <a:srgbClr val="D4D4D8"/>
                 </a:solidFill>
                 <a:latin typeface="Calibri"/>
               </a:rPr>
-              <a:t>Cada fluxo corre através do Code ou Cowork (ou ambos) — mesma base de dados, mesmas ferramentas, mesmo ciclo de aprovação. Adicionar fluxos não significa mais ferramentas; significa expandir o que o mesmo sistema sabe fazer.</a:t>
+              <a:t>Do paciente à aquisição. Cada fluxo corre através do Code ou Cowork (ou ambos) — mesma base de dados, mesmas ferramentas, mesmo ciclo de aprovação. Adicionar fluxos não significa mais ferramentas; significa expandir o que o mesmo sistema sabe fazer.</a:t>
             </a:r>
           </a:p>
         </p:txBody>
@@ -6368,8 +12380,8 @@
         </p:nvSpPr>
         <p:spPr>
           <a:xfrm>
-            <a:off x="914400" y="3931920"/>
-            <a:ext cx="5330952" cy="1737360"/>
+            <a:off x="914400" y="3794760"/>
+            <a:ext cx="3941063" cy="1691640"/>
           </a:xfrm>
           <a:prstGeom prst="roundRect">
             <a:avLst>
@@ -6414,23 +12426,23 @@
         </p:nvSpPr>
         <p:spPr>
           <a:xfrm>
-            <a:off x="1188720" y="4096511"/>
-            <a:ext cx="822960" cy="365760"/>
-          </a:xfrm>
-          <a:prstGeom prst="rect">
-            <a:avLst/>
-          </a:prstGeom>
-          <a:noFill/>
-        </p:spPr>
-        <p:txBody>
-          <a:bodyPr wrap="square" lIns="0" rIns="0" tIns="0" bIns="0" anchor="t">
-            <a:spAutoFit/>
-          </a:bodyPr>
-          <a:lstStyle/>
-          <a:p>
-            <a:pPr algn="l"/>
-            <a:r>
-              <a:rPr sz="1800" b="0" i="0">
+            <a:off x="1143000" y="3931920"/>
+            <a:ext cx="685800" cy="320040"/>
+          </a:xfrm>
+          <a:prstGeom prst="rect">
+            <a:avLst/>
+          </a:prstGeom>
+          <a:noFill/>
+        </p:spPr>
+        <p:txBody>
+          <a:bodyPr wrap="square" lIns="0" rIns="0" tIns="0" bIns="0" anchor="t">
+            <a:spAutoFit/>
+          </a:bodyPr>
+          <a:lstStyle/>
+          <a:p>
+            <a:pPr algn="l"/>
+            <a:r>
+              <a:rPr sz="1500" b="0" i="0">
                 <a:solidFill>
                   <a:srgbClr val="FF8449"/>
                 </a:solidFill>
@@ -6449,23 +12461,23 @@
         </p:nvSpPr>
         <p:spPr>
           <a:xfrm>
-            <a:off x="1920240" y="4114800"/>
-            <a:ext cx="4050791" cy="457200"/>
-          </a:xfrm>
-          <a:prstGeom prst="rect">
-            <a:avLst/>
-          </a:prstGeom>
-          <a:noFill/>
-        </p:spPr>
-        <p:txBody>
-          <a:bodyPr wrap="square" lIns="0" rIns="0" tIns="0" bIns="0" anchor="t">
-            <a:spAutoFit/>
-          </a:bodyPr>
-          <a:lstStyle/>
-          <a:p>
-            <a:pPr algn="l"/>
-            <a:r>
-              <a:rPr sz="1400" b="0" i="0">
+            <a:off x="1783080" y="3950208"/>
+            <a:ext cx="2843783" cy="411480"/>
+          </a:xfrm>
+          <a:prstGeom prst="rect">
+            <a:avLst/>
+          </a:prstGeom>
+          <a:noFill/>
+        </p:spPr>
+        <p:txBody>
+          <a:bodyPr wrap="square" lIns="0" rIns="0" tIns="0" bIns="0" anchor="t">
+            <a:spAutoFit/>
+          </a:bodyPr>
+          <a:lstStyle/>
+          <a:p>
+            <a:pPr algn="l"/>
+            <a:r>
+              <a:rPr sz="1200" b="0" i="0">
                 <a:solidFill>
                   <a:srgbClr val="000000"/>
                 </a:solidFill>
@@ -6484,23 +12496,23 @@
         </p:nvSpPr>
         <p:spPr>
           <a:xfrm>
-            <a:off x="1188720" y="4709159"/>
-            <a:ext cx="4782312" cy="822959"/>
-          </a:xfrm>
-          <a:prstGeom prst="rect">
-            <a:avLst/>
-          </a:prstGeom>
-          <a:noFill/>
-        </p:spPr>
-        <p:txBody>
-          <a:bodyPr wrap="square" lIns="0" rIns="0" tIns="0" bIns="0" anchor="t">
-            <a:spAutoFit/>
-          </a:bodyPr>
-          <a:lstStyle/>
-          <a:p>
-            <a:pPr algn="l"/>
-            <a:r>
-              <a:rPr sz="1050" b="0" i="0">
+            <a:off x="1143000" y="4480560"/>
+            <a:ext cx="3483863" cy="914400"/>
+          </a:xfrm>
+          <a:prstGeom prst="rect">
+            <a:avLst/>
+          </a:prstGeom>
+          <a:noFill/>
+        </p:spPr>
+        <p:txBody>
+          <a:bodyPr wrap="square" lIns="0" rIns="0" tIns="0" bIns="0" anchor="t">
+            <a:spAutoFit/>
+          </a:bodyPr>
+          <a:lstStyle/>
+          <a:p>
+            <a:pPr algn="l"/>
+            <a:r>
+              <a:rPr sz="950" b="0" i="0">
                 <a:solidFill>
                   <a:srgbClr val="4B5563"/>
                 </a:solidFill>
@@ -6519,8 +12531,8 @@
         </p:nvSpPr>
         <p:spPr>
           <a:xfrm>
-            <a:off x="6473952" y="3931920"/>
-            <a:ext cx="5330952" cy="1737360"/>
+            <a:off x="5084064" y="3794760"/>
+            <a:ext cx="3941063" cy="1691640"/>
           </a:xfrm>
           <a:prstGeom prst="roundRect">
             <a:avLst>
@@ -6565,23 +12577,23 @@
         </p:nvSpPr>
         <p:spPr>
           <a:xfrm>
-            <a:off x="6748272" y="4096511"/>
-            <a:ext cx="822960" cy="365760"/>
-          </a:xfrm>
-          <a:prstGeom prst="rect">
-            <a:avLst/>
-          </a:prstGeom>
-          <a:noFill/>
-        </p:spPr>
-        <p:txBody>
-          <a:bodyPr wrap="square" lIns="0" rIns="0" tIns="0" bIns="0" anchor="t">
-            <a:spAutoFit/>
-          </a:bodyPr>
-          <a:lstStyle/>
-          <a:p>
-            <a:pPr algn="l"/>
-            <a:r>
-              <a:rPr sz="1800" b="0" i="0">
+            <a:off x="5312664" y="3931920"/>
+            <a:ext cx="685800" cy="320040"/>
+          </a:xfrm>
+          <a:prstGeom prst="rect">
+            <a:avLst/>
+          </a:prstGeom>
+          <a:noFill/>
+        </p:spPr>
+        <p:txBody>
+          <a:bodyPr wrap="square" lIns="0" rIns="0" tIns="0" bIns="0" anchor="t">
+            <a:spAutoFit/>
+          </a:bodyPr>
+          <a:lstStyle/>
+          <a:p>
+            <a:pPr algn="l"/>
+            <a:r>
+              <a:rPr sz="1500" b="0" i="0">
                 <a:solidFill>
                   <a:srgbClr val="FF8449"/>
                 </a:solidFill>
@@ -6600,23 +12612,23 @@
         </p:nvSpPr>
         <p:spPr>
           <a:xfrm>
-            <a:off x="7479792" y="4114800"/>
-            <a:ext cx="4050791" cy="457200"/>
-          </a:xfrm>
-          <a:prstGeom prst="rect">
-            <a:avLst/>
-          </a:prstGeom>
-          <a:noFill/>
-        </p:spPr>
-        <p:txBody>
-          <a:bodyPr wrap="square" lIns="0" rIns="0" tIns="0" bIns="0" anchor="t">
-            <a:spAutoFit/>
-          </a:bodyPr>
-          <a:lstStyle/>
-          <a:p>
-            <a:pPr algn="l"/>
-            <a:r>
-              <a:rPr sz="1400" b="0" i="0">
+            <a:off x="5952744" y="3950208"/>
+            <a:ext cx="2843783" cy="411480"/>
+          </a:xfrm>
+          <a:prstGeom prst="rect">
+            <a:avLst/>
+          </a:prstGeom>
+          <a:noFill/>
+        </p:spPr>
+        <p:txBody>
+          <a:bodyPr wrap="square" lIns="0" rIns="0" tIns="0" bIns="0" anchor="t">
+            <a:spAutoFit/>
+          </a:bodyPr>
+          <a:lstStyle/>
+          <a:p>
+            <a:pPr algn="l"/>
+            <a:r>
+              <a:rPr sz="1200" b="0" i="0">
                 <a:solidFill>
                   <a:srgbClr val="000000"/>
                 </a:solidFill>
@@ -6635,23 +12647,23 @@
         </p:nvSpPr>
         <p:spPr>
           <a:xfrm>
-            <a:off x="6748272" y="4709159"/>
-            <a:ext cx="4782312" cy="822959"/>
-          </a:xfrm>
-          <a:prstGeom prst="rect">
-            <a:avLst/>
-          </a:prstGeom>
-          <a:noFill/>
-        </p:spPr>
-        <p:txBody>
-          <a:bodyPr wrap="square" lIns="0" rIns="0" tIns="0" bIns="0" anchor="t">
-            <a:spAutoFit/>
-          </a:bodyPr>
-          <a:lstStyle/>
-          <a:p>
-            <a:pPr algn="l"/>
-            <a:r>
-              <a:rPr sz="1050" b="0" i="0">
+            <a:off x="5312664" y="4480560"/>
+            <a:ext cx="3483863" cy="914400"/>
+          </a:xfrm>
+          <a:prstGeom prst="rect">
+            <a:avLst/>
+          </a:prstGeom>
+          <a:noFill/>
+        </p:spPr>
+        <p:txBody>
+          <a:bodyPr wrap="square" lIns="0" rIns="0" tIns="0" bIns="0" anchor="t">
+            <a:spAutoFit/>
+          </a:bodyPr>
+          <a:lstStyle/>
+          <a:p>
+            <a:pPr algn="l"/>
+            <a:r>
+              <a:rPr sz="950" b="0" i="0">
                 <a:solidFill>
                   <a:srgbClr val="4B5563"/>
                 </a:solidFill>
@@ -6670,8 +12682,8 @@
         </p:nvSpPr>
         <p:spPr>
           <a:xfrm>
-            <a:off x="12033504" y="3931920"/>
-            <a:ext cx="5330952" cy="1737360"/>
+            <a:off x="9253728" y="3794760"/>
+            <a:ext cx="3941063" cy="1691640"/>
           </a:xfrm>
           <a:prstGeom prst="roundRect">
             <a:avLst>
@@ -6716,23 +12728,23 @@
         </p:nvSpPr>
         <p:spPr>
           <a:xfrm>
-            <a:off x="12307824" y="4096511"/>
-            <a:ext cx="822960" cy="365760"/>
-          </a:xfrm>
-          <a:prstGeom prst="rect">
-            <a:avLst/>
-          </a:prstGeom>
-          <a:noFill/>
-        </p:spPr>
-        <p:txBody>
-          <a:bodyPr wrap="square" lIns="0" rIns="0" tIns="0" bIns="0" anchor="t">
-            <a:spAutoFit/>
-          </a:bodyPr>
-          <a:lstStyle/>
-          <a:p>
-            <a:pPr algn="l"/>
-            <a:r>
-              <a:rPr sz="1800" b="0" i="0">
+            <a:off x="9482328" y="3931920"/>
+            <a:ext cx="685800" cy="320040"/>
+          </a:xfrm>
+          <a:prstGeom prst="rect">
+            <a:avLst/>
+          </a:prstGeom>
+          <a:noFill/>
+        </p:spPr>
+        <p:txBody>
+          <a:bodyPr wrap="square" lIns="0" rIns="0" tIns="0" bIns="0" anchor="t">
+            <a:spAutoFit/>
+          </a:bodyPr>
+          <a:lstStyle/>
+          <a:p>
+            <a:pPr algn="l"/>
+            <a:r>
+              <a:rPr sz="1500" b="0" i="0">
                 <a:solidFill>
                   <a:srgbClr val="FF8449"/>
                 </a:solidFill>
@@ -6751,23 +12763,23 @@
         </p:nvSpPr>
         <p:spPr>
           <a:xfrm>
-            <a:off x="13039344" y="4114800"/>
-            <a:ext cx="4050791" cy="457200"/>
-          </a:xfrm>
-          <a:prstGeom prst="rect">
-            <a:avLst/>
-          </a:prstGeom>
-          <a:noFill/>
-        </p:spPr>
-        <p:txBody>
-          <a:bodyPr wrap="square" lIns="0" rIns="0" tIns="0" bIns="0" anchor="t">
-            <a:spAutoFit/>
-          </a:bodyPr>
-          <a:lstStyle/>
-          <a:p>
-            <a:pPr algn="l"/>
-            <a:r>
-              <a:rPr sz="1400" b="0" i="0">
+            <a:off x="10122407" y="3950208"/>
+            <a:ext cx="2843783" cy="411480"/>
+          </a:xfrm>
+          <a:prstGeom prst="rect">
+            <a:avLst/>
+          </a:prstGeom>
+          <a:noFill/>
+        </p:spPr>
+        <p:txBody>
+          <a:bodyPr wrap="square" lIns="0" rIns="0" tIns="0" bIns="0" anchor="t">
+            <a:spAutoFit/>
+          </a:bodyPr>
+          <a:lstStyle/>
+          <a:p>
+            <a:pPr algn="l"/>
+            <a:r>
+              <a:rPr sz="1200" b="0" i="0">
                 <a:solidFill>
                   <a:srgbClr val="000000"/>
                 </a:solidFill>
@@ -6786,23 +12798,23 @@
         </p:nvSpPr>
         <p:spPr>
           <a:xfrm>
-            <a:off x="12307824" y="4709159"/>
-            <a:ext cx="4782312" cy="822959"/>
-          </a:xfrm>
-          <a:prstGeom prst="rect">
-            <a:avLst/>
-          </a:prstGeom>
-          <a:noFill/>
-        </p:spPr>
-        <p:txBody>
-          <a:bodyPr wrap="square" lIns="0" rIns="0" tIns="0" bIns="0" anchor="t">
-            <a:spAutoFit/>
-          </a:bodyPr>
-          <a:lstStyle/>
-          <a:p>
-            <a:pPr algn="l"/>
-            <a:r>
-              <a:rPr sz="1050" b="0" i="0">
+            <a:off x="9482328" y="4480560"/>
+            <a:ext cx="3483863" cy="914400"/>
+          </a:xfrm>
+          <a:prstGeom prst="rect">
+            <a:avLst/>
+          </a:prstGeom>
+          <a:noFill/>
+        </p:spPr>
+        <p:txBody>
+          <a:bodyPr wrap="square" lIns="0" rIns="0" tIns="0" bIns="0" anchor="t">
+            <a:spAutoFit/>
+          </a:bodyPr>
+          <a:lstStyle/>
+          <a:p>
+            <a:pPr algn="l"/>
+            <a:r>
+              <a:rPr sz="950" b="0" i="0">
                 <a:solidFill>
                   <a:srgbClr val="4B5563"/>
                 </a:solidFill>
@@ -6821,8 +12833,8 @@
         </p:nvSpPr>
         <p:spPr>
           <a:xfrm>
-            <a:off x="914400" y="5943600"/>
-            <a:ext cx="5330952" cy="1737360"/>
+            <a:off x="13423392" y="3794760"/>
+            <a:ext cx="3941063" cy="1691640"/>
           </a:xfrm>
           <a:prstGeom prst="roundRect">
             <a:avLst>
@@ -6867,23 +12879,23 @@
         </p:nvSpPr>
         <p:spPr>
           <a:xfrm>
-            <a:off x="1188720" y="6108192"/>
-            <a:ext cx="822960" cy="365760"/>
-          </a:xfrm>
-          <a:prstGeom prst="rect">
-            <a:avLst/>
-          </a:prstGeom>
-          <a:noFill/>
-        </p:spPr>
-        <p:txBody>
-          <a:bodyPr wrap="square" lIns="0" rIns="0" tIns="0" bIns="0" anchor="t">
-            <a:spAutoFit/>
-          </a:bodyPr>
-          <a:lstStyle/>
-          <a:p>
-            <a:pPr algn="l"/>
-            <a:r>
-              <a:rPr sz="1800" b="0" i="0">
+            <a:off x="13651992" y="3931920"/>
+            <a:ext cx="685800" cy="320040"/>
+          </a:xfrm>
+          <a:prstGeom prst="rect">
+            <a:avLst/>
+          </a:prstGeom>
+          <a:noFill/>
+        </p:spPr>
+        <p:txBody>
+          <a:bodyPr wrap="square" lIns="0" rIns="0" tIns="0" bIns="0" anchor="t">
+            <a:spAutoFit/>
+          </a:bodyPr>
+          <a:lstStyle/>
+          <a:p>
+            <a:pPr algn="l"/>
+            <a:r>
+              <a:rPr sz="1500" b="0" i="0">
                 <a:solidFill>
                   <a:srgbClr val="FF8449"/>
                 </a:solidFill>
@@ -6902,23 +12914,23 @@
         </p:nvSpPr>
         <p:spPr>
           <a:xfrm>
-            <a:off x="1920240" y="6126480"/>
-            <a:ext cx="4050791" cy="457200"/>
-          </a:xfrm>
-          <a:prstGeom prst="rect">
-            <a:avLst/>
-          </a:prstGeom>
-          <a:noFill/>
-        </p:spPr>
-        <p:txBody>
-          <a:bodyPr wrap="square" lIns="0" rIns="0" tIns="0" bIns="0" anchor="t">
-            <a:spAutoFit/>
-          </a:bodyPr>
-          <a:lstStyle/>
-          <a:p>
-            <a:pPr algn="l"/>
-            <a:r>
-              <a:rPr sz="1400" b="0" i="0">
+            <a:off x="14292072" y="3950208"/>
+            <a:ext cx="2843783" cy="411480"/>
+          </a:xfrm>
+          <a:prstGeom prst="rect">
+            <a:avLst/>
+          </a:prstGeom>
+          <a:noFill/>
+        </p:spPr>
+        <p:txBody>
+          <a:bodyPr wrap="square" lIns="0" rIns="0" tIns="0" bIns="0" anchor="t">
+            <a:spAutoFit/>
+          </a:bodyPr>
+          <a:lstStyle/>
+          <a:p>
+            <a:pPr algn="l"/>
+            <a:r>
+              <a:rPr sz="1200" b="0" i="0">
                 <a:solidFill>
                   <a:srgbClr val="000000"/>
                 </a:solidFill>
@@ -6937,23 +12949,23 @@
         </p:nvSpPr>
         <p:spPr>
           <a:xfrm>
-            <a:off x="1188720" y="6720840"/>
-            <a:ext cx="4782312" cy="822959"/>
-          </a:xfrm>
-          <a:prstGeom prst="rect">
-            <a:avLst/>
-          </a:prstGeom>
-          <a:noFill/>
-        </p:spPr>
-        <p:txBody>
-          <a:bodyPr wrap="square" lIns="0" rIns="0" tIns="0" bIns="0" anchor="t">
-            <a:spAutoFit/>
-          </a:bodyPr>
-          <a:lstStyle/>
-          <a:p>
-            <a:pPr algn="l"/>
-            <a:r>
-              <a:rPr sz="1050" b="0" i="0">
+            <a:off x="13651992" y="4480560"/>
+            <a:ext cx="3483863" cy="914400"/>
+          </a:xfrm>
+          <a:prstGeom prst="rect">
+            <a:avLst/>
+          </a:prstGeom>
+          <a:noFill/>
+        </p:spPr>
+        <p:txBody>
+          <a:bodyPr wrap="square" lIns="0" rIns="0" tIns="0" bIns="0" anchor="t">
+            <a:spAutoFit/>
+          </a:bodyPr>
+          <a:lstStyle/>
+          <a:p>
+            <a:pPr algn="l"/>
+            <a:r>
+              <a:rPr sz="950" b="0" i="0">
                 <a:solidFill>
                   <a:srgbClr val="4B5563"/>
                 </a:solidFill>
@@ -6972,8 +12984,8 @@
         </p:nvSpPr>
         <p:spPr>
           <a:xfrm>
-            <a:off x="6473952" y="5943600"/>
-            <a:ext cx="5330952" cy="1737360"/>
+            <a:off x="914400" y="5687568"/>
+            <a:ext cx="3941063" cy="1691640"/>
           </a:xfrm>
           <a:prstGeom prst="roundRect">
             <a:avLst>
@@ -7018,23 +13030,23 @@
         </p:nvSpPr>
         <p:spPr>
           <a:xfrm>
-            <a:off x="6748272" y="6108192"/>
-            <a:ext cx="822960" cy="365760"/>
-          </a:xfrm>
-          <a:prstGeom prst="rect">
-            <a:avLst/>
-          </a:prstGeom>
-          <a:noFill/>
-        </p:spPr>
-        <p:txBody>
-          <a:bodyPr wrap="square" lIns="0" rIns="0" tIns="0" bIns="0" anchor="t">
-            <a:spAutoFit/>
-          </a:bodyPr>
-          <a:lstStyle/>
-          <a:p>
-            <a:pPr algn="l"/>
-            <a:r>
-              <a:rPr sz="1800" b="0" i="0">
+            <a:off x="1143000" y="5824728"/>
+            <a:ext cx="685800" cy="320040"/>
+          </a:xfrm>
+          <a:prstGeom prst="rect">
+            <a:avLst/>
+          </a:prstGeom>
+          <a:noFill/>
+        </p:spPr>
+        <p:txBody>
+          <a:bodyPr wrap="square" lIns="0" rIns="0" tIns="0" bIns="0" anchor="t">
+            <a:spAutoFit/>
+          </a:bodyPr>
+          <a:lstStyle/>
+          <a:p>
+            <a:pPr algn="l"/>
+            <a:r>
+              <a:rPr sz="1500" b="0" i="0">
                 <a:solidFill>
                   <a:srgbClr val="FF8449"/>
                 </a:solidFill>
@@ -7053,23 +13065,23 @@
         </p:nvSpPr>
         <p:spPr>
           <a:xfrm>
-            <a:off x="7479792" y="6126480"/>
-            <a:ext cx="4050791" cy="457200"/>
-          </a:xfrm>
-          <a:prstGeom prst="rect">
-            <a:avLst/>
-          </a:prstGeom>
-          <a:noFill/>
-        </p:spPr>
-        <p:txBody>
-          <a:bodyPr wrap="square" lIns="0" rIns="0" tIns="0" bIns="0" anchor="t">
-            <a:spAutoFit/>
-          </a:bodyPr>
-          <a:lstStyle/>
-          <a:p>
-            <a:pPr algn="l"/>
-            <a:r>
-              <a:rPr sz="1400" b="0" i="0">
+            <a:off x="1783080" y="5843016"/>
+            <a:ext cx="2843783" cy="411480"/>
+          </a:xfrm>
+          <a:prstGeom prst="rect">
+            <a:avLst/>
+          </a:prstGeom>
+          <a:noFill/>
+        </p:spPr>
+        <p:txBody>
+          <a:bodyPr wrap="square" lIns="0" rIns="0" tIns="0" bIns="0" anchor="t">
+            <a:spAutoFit/>
+          </a:bodyPr>
+          <a:lstStyle/>
+          <a:p>
+            <a:pPr algn="l"/>
+            <a:r>
+              <a:rPr sz="1200" b="0" i="0">
                 <a:solidFill>
                   <a:srgbClr val="000000"/>
                 </a:solidFill>
@@ -7088,29 +13100,29 @@
         </p:nvSpPr>
         <p:spPr>
           <a:xfrm>
-            <a:off x="6748272" y="6720840"/>
-            <a:ext cx="4782312" cy="822959"/>
-          </a:xfrm>
-          <a:prstGeom prst="rect">
-            <a:avLst/>
-          </a:prstGeom>
-          <a:noFill/>
-        </p:spPr>
-        <p:txBody>
-          <a:bodyPr wrap="square" lIns="0" rIns="0" tIns="0" bIns="0" anchor="t">
-            <a:spAutoFit/>
-          </a:bodyPr>
-          <a:lstStyle/>
-          <a:p>
-            <a:pPr algn="l"/>
-            <a:r>
-              <a:rPr sz="1050" b="0" i="0">
+            <a:off x="1143000" y="6373368"/>
+            <a:ext cx="3483863" cy="914400"/>
+          </a:xfrm>
+          <a:prstGeom prst="rect">
+            <a:avLst/>
+          </a:prstGeom>
+          <a:noFill/>
+        </p:spPr>
+        <p:txBody>
+          <a:bodyPr wrap="square" lIns="0" rIns="0" tIns="0" bIns="0" anchor="t">
+            <a:spAutoFit/>
+          </a:bodyPr>
+          <a:lstStyle/>
+          <a:p>
+            <a:pPr algn="l"/>
+            <a:r>
+              <a:rPr sz="950" b="0" i="0">
                 <a:solidFill>
                   <a:srgbClr val="4B5563"/>
                 </a:solidFill>
                 <a:latin typeface="Calibri"/>
               </a:rPr>
-              <a:t>Setup → marca sessão → confirma → nudges → próximo passo.</a:t>
+              <a:t>Consulta termina → paciente confirma no form → comprovativo → CRM atualiza.</a:t>
             </a:r>
           </a:p>
         </p:txBody>
@@ -7123,8 +13135,8 @@
         </p:nvSpPr>
         <p:spPr>
           <a:xfrm>
-            <a:off x="12033504" y="5943600"/>
-            <a:ext cx="5330952" cy="1737360"/>
+            <a:off x="5084064" y="5687568"/>
+            <a:ext cx="3941063" cy="1691640"/>
           </a:xfrm>
           <a:prstGeom prst="roundRect">
             <a:avLst>
@@ -7169,23 +13181,23 @@
         </p:nvSpPr>
         <p:spPr>
           <a:xfrm>
-            <a:off x="12307824" y="6108192"/>
-            <a:ext cx="822960" cy="365760"/>
-          </a:xfrm>
-          <a:prstGeom prst="rect">
-            <a:avLst/>
-          </a:prstGeom>
-          <a:noFill/>
-        </p:spPr>
-        <p:txBody>
-          <a:bodyPr wrap="square" lIns="0" rIns="0" tIns="0" bIns="0" anchor="t">
-            <a:spAutoFit/>
-          </a:bodyPr>
-          <a:lstStyle/>
-          <a:p>
-            <a:pPr algn="l"/>
-            <a:r>
-              <a:rPr sz="1800" b="0" i="0">
+            <a:off x="5312664" y="5824728"/>
+            <a:ext cx="685800" cy="320040"/>
+          </a:xfrm>
+          <a:prstGeom prst="rect">
+            <a:avLst/>
+          </a:prstGeom>
+          <a:noFill/>
+        </p:spPr>
+        <p:txBody>
+          <a:bodyPr wrap="square" lIns="0" rIns="0" tIns="0" bIns="0" anchor="t">
+            <a:spAutoFit/>
+          </a:bodyPr>
+          <a:lstStyle/>
+          <a:p>
+            <a:pPr algn="l"/>
+            <a:r>
+              <a:rPr sz="1500" b="0" i="0">
                 <a:solidFill>
                   <a:srgbClr val="FF8449"/>
                 </a:solidFill>
@@ -7204,23 +13216,23 @@
         </p:nvSpPr>
         <p:spPr>
           <a:xfrm>
-            <a:off x="13039344" y="6126480"/>
-            <a:ext cx="4050791" cy="457200"/>
-          </a:xfrm>
-          <a:prstGeom prst="rect">
-            <a:avLst/>
-          </a:prstGeom>
-          <a:noFill/>
-        </p:spPr>
-        <p:txBody>
-          <a:bodyPr wrap="square" lIns="0" rIns="0" tIns="0" bIns="0" anchor="t">
-            <a:spAutoFit/>
-          </a:bodyPr>
-          <a:lstStyle/>
-          <a:p>
-            <a:pPr algn="l"/>
-            <a:r>
-              <a:rPr sz="1400" b="0" i="0">
+            <a:off x="5952744" y="5843016"/>
+            <a:ext cx="2843783" cy="411480"/>
+          </a:xfrm>
+          <a:prstGeom prst="rect">
+            <a:avLst/>
+          </a:prstGeom>
+          <a:noFill/>
+        </p:spPr>
+        <p:txBody>
+          <a:bodyPr wrap="square" lIns="0" rIns="0" tIns="0" bIns="0" anchor="t">
+            <a:spAutoFit/>
+          </a:bodyPr>
+          <a:lstStyle/>
+          <a:p>
+            <a:pPr algn="l"/>
+            <a:r>
+              <a:rPr sz="1200" b="0" i="0">
                 <a:solidFill>
                   <a:srgbClr val="000000"/>
                 </a:solidFill>
@@ -7239,23 +13251,23 @@
         </p:nvSpPr>
         <p:spPr>
           <a:xfrm>
-            <a:off x="12307824" y="6720840"/>
-            <a:ext cx="4782312" cy="822959"/>
-          </a:xfrm>
-          <a:prstGeom prst="rect">
-            <a:avLst/>
-          </a:prstGeom>
-          <a:noFill/>
-        </p:spPr>
-        <p:txBody>
-          <a:bodyPr wrap="square" lIns="0" rIns="0" tIns="0" bIns="0" anchor="t">
-            <a:spAutoFit/>
-          </a:bodyPr>
-          <a:lstStyle/>
-          <a:p>
-            <a:pPr algn="l"/>
-            <a:r>
-              <a:rPr sz="1050" b="0" i="0">
+            <a:off x="5312664" y="6373368"/>
+            <a:ext cx="3483863" cy="914400"/>
+          </a:xfrm>
+          <a:prstGeom prst="rect">
+            <a:avLst/>
+          </a:prstGeom>
+          <a:noFill/>
+        </p:spPr>
+        <p:txBody>
+          <a:bodyPr wrap="square" lIns="0" rIns="0" tIns="0" bIns="0" anchor="t">
+            <a:spAutoFit/>
+          </a:bodyPr>
+          <a:lstStyle/>
+          <a:p>
+            <a:pPr algn="l"/>
+            <a:r>
+              <a:rPr sz="950" b="0" i="0">
                 <a:solidFill>
                   <a:srgbClr val="4B5563"/>
                 </a:solidFill>
@@ -7274,8 +13286,8 @@
         </p:nvSpPr>
         <p:spPr>
           <a:xfrm>
-            <a:off x="914400" y="7955279"/>
-            <a:ext cx="5330952" cy="1737360"/>
+            <a:off x="9253728" y="5687568"/>
+            <a:ext cx="3941063" cy="1691640"/>
           </a:xfrm>
           <a:prstGeom prst="roundRect">
             <a:avLst>
@@ -7320,23 +13332,23 @@
         </p:nvSpPr>
         <p:spPr>
           <a:xfrm>
-            <a:off x="1188720" y="8119871"/>
-            <a:ext cx="822960" cy="365760"/>
-          </a:xfrm>
-          <a:prstGeom prst="rect">
-            <a:avLst/>
-          </a:prstGeom>
-          <a:noFill/>
-        </p:spPr>
-        <p:txBody>
-          <a:bodyPr wrap="square" lIns="0" rIns="0" tIns="0" bIns="0" anchor="t">
-            <a:spAutoFit/>
-          </a:bodyPr>
-          <a:lstStyle/>
-          <a:p>
-            <a:pPr algn="l"/>
-            <a:r>
-              <a:rPr sz="1800" b="0" i="0">
+            <a:off x="9482328" y="5824728"/>
+            <a:ext cx="685800" cy="320040"/>
+          </a:xfrm>
+          <a:prstGeom prst="rect">
+            <a:avLst/>
+          </a:prstGeom>
+          <a:noFill/>
+        </p:spPr>
+        <p:txBody>
+          <a:bodyPr wrap="square" lIns="0" rIns="0" tIns="0" bIns="0" anchor="t">
+            <a:spAutoFit/>
+          </a:bodyPr>
+          <a:lstStyle/>
+          <a:p>
+            <a:pPr algn="l"/>
+            <a:r>
+              <a:rPr sz="1500" b="0" i="0">
                 <a:solidFill>
                   <a:srgbClr val="FF8449"/>
                 </a:solidFill>
@@ -7355,23 +13367,23 @@
         </p:nvSpPr>
         <p:spPr>
           <a:xfrm>
-            <a:off x="1920240" y="8138159"/>
-            <a:ext cx="4050791" cy="457200"/>
-          </a:xfrm>
-          <a:prstGeom prst="rect">
-            <a:avLst/>
-          </a:prstGeom>
-          <a:noFill/>
-        </p:spPr>
-        <p:txBody>
-          <a:bodyPr wrap="square" lIns="0" rIns="0" tIns="0" bIns="0" anchor="t">
-            <a:spAutoFit/>
-          </a:bodyPr>
-          <a:lstStyle/>
-          <a:p>
-            <a:pPr algn="l"/>
-            <a:r>
-              <a:rPr sz="1400" b="0" i="0">
+            <a:off x="10122407" y="5843016"/>
+            <a:ext cx="2843783" cy="411480"/>
+          </a:xfrm>
+          <a:prstGeom prst="rect">
+            <a:avLst/>
+          </a:prstGeom>
+          <a:noFill/>
+        </p:spPr>
+        <p:txBody>
+          <a:bodyPr wrap="square" lIns="0" rIns="0" tIns="0" bIns="0" anchor="t">
+            <a:spAutoFit/>
+          </a:bodyPr>
+          <a:lstStyle/>
+          <a:p>
+            <a:pPr algn="l"/>
+            <a:r>
+              <a:rPr sz="1200" b="0" i="0">
                 <a:solidFill>
                   <a:srgbClr val="000000"/>
                 </a:solidFill>
@@ -7390,23 +13402,23 @@
         </p:nvSpPr>
         <p:spPr>
           <a:xfrm>
-            <a:off x="1188720" y="8732519"/>
-            <a:ext cx="4782312" cy="822959"/>
-          </a:xfrm>
-          <a:prstGeom prst="rect">
-            <a:avLst/>
-          </a:prstGeom>
-          <a:noFill/>
-        </p:spPr>
-        <p:txBody>
-          <a:bodyPr wrap="square" lIns="0" rIns="0" tIns="0" bIns="0" anchor="t">
-            <a:spAutoFit/>
-          </a:bodyPr>
-          <a:lstStyle/>
-          <a:p>
-            <a:pPr algn="l"/>
-            <a:r>
-              <a:rPr sz="1050" b="0" i="0">
+            <a:off x="9482328" y="6373368"/>
+            <a:ext cx="3483863" cy="914400"/>
+          </a:xfrm>
+          <a:prstGeom prst="rect">
+            <a:avLst/>
+          </a:prstGeom>
+          <a:noFill/>
+        </p:spPr>
+        <p:txBody>
+          <a:bodyPr wrap="square" lIns="0" rIns="0" tIns="0" bIns="0" anchor="t">
+            <a:spAutoFit/>
+          </a:bodyPr>
+          <a:lstStyle/>
+          <a:p>
+            <a:pPr algn="l"/>
+            <a:r>
+              <a:rPr sz="950" b="0" i="0">
                 <a:solidFill>
                   <a:srgbClr val="4B5563"/>
                 </a:solidFill>
@@ -7425,8 +13437,8 @@
         </p:nvSpPr>
         <p:spPr>
           <a:xfrm>
-            <a:off x="6473952" y="7955279"/>
-            <a:ext cx="5330952" cy="1737360"/>
+            <a:off x="13423392" y="5687568"/>
+            <a:ext cx="3941063" cy="1691640"/>
           </a:xfrm>
           <a:prstGeom prst="roundRect">
             <a:avLst>
@@ -7471,23 +13483,23 @@
         </p:nvSpPr>
         <p:spPr>
           <a:xfrm>
-            <a:off x="6748272" y="8119871"/>
-            <a:ext cx="822960" cy="365760"/>
-          </a:xfrm>
-          <a:prstGeom prst="rect">
-            <a:avLst/>
-          </a:prstGeom>
-          <a:noFill/>
-        </p:spPr>
-        <p:txBody>
-          <a:bodyPr wrap="square" lIns="0" rIns="0" tIns="0" bIns="0" anchor="t">
-            <a:spAutoFit/>
-          </a:bodyPr>
-          <a:lstStyle/>
-          <a:p>
-            <a:pPr algn="l"/>
-            <a:r>
-              <a:rPr sz="1800" b="0" i="0">
+            <a:off x="13651992" y="5824728"/>
+            <a:ext cx="685800" cy="320040"/>
+          </a:xfrm>
+          <a:prstGeom prst="rect">
+            <a:avLst/>
+          </a:prstGeom>
+          <a:noFill/>
+        </p:spPr>
+        <p:txBody>
+          <a:bodyPr wrap="square" lIns="0" rIns="0" tIns="0" bIns="0" anchor="t">
+            <a:spAutoFit/>
+          </a:bodyPr>
+          <a:lstStyle/>
+          <a:p>
+            <a:pPr algn="l"/>
+            <a:r>
+              <a:rPr sz="1500" b="0" i="0">
                 <a:solidFill>
                   <a:srgbClr val="FF8449"/>
                 </a:solidFill>
@@ -7506,23 +13518,23 @@
         </p:nvSpPr>
         <p:spPr>
           <a:xfrm>
-            <a:off x="7479792" y="8138159"/>
-            <a:ext cx="4050791" cy="457200"/>
-          </a:xfrm>
-          <a:prstGeom prst="rect">
-            <a:avLst/>
-          </a:prstGeom>
-          <a:noFill/>
-        </p:spPr>
-        <p:txBody>
-          <a:bodyPr wrap="square" lIns="0" rIns="0" tIns="0" bIns="0" anchor="t">
-            <a:spAutoFit/>
-          </a:bodyPr>
-          <a:lstStyle/>
-          <a:p>
-            <a:pPr algn="l"/>
-            <a:r>
-              <a:rPr sz="1400" b="0" i="0">
+            <a:off x="14292072" y="5843016"/>
+            <a:ext cx="2843783" cy="411480"/>
+          </a:xfrm>
+          <a:prstGeom prst="rect">
+            <a:avLst/>
+          </a:prstGeom>
+          <a:noFill/>
+        </p:spPr>
+        <p:txBody>
+          <a:bodyPr wrap="square" lIns="0" rIns="0" tIns="0" bIns="0" anchor="t">
+            <a:spAutoFit/>
+          </a:bodyPr>
+          <a:lstStyle/>
+          <a:p>
+            <a:pPr algn="l"/>
+            <a:r>
+              <a:rPr sz="1200" b="0" i="0">
                 <a:solidFill>
                   <a:srgbClr val="000000"/>
                 </a:solidFill>
@@ -7541,23 +13553,23 @@
         </p:nvSpPr>
         <p:spPr>
           <a:xfrm>
-            <a:off x="6748272" y="8732519"/>
-            <a:ext cx="4782312" cy="822959"/>
-          </a:xfrm>
-          <a:prstGeom prst="rect">
-            <a:avLst/>
-          </a:prstGeom>
-          <a:noFill/>
-        </p:spPr>
-        <p:txBody>
-          <a:bodyPr wrap="square" lIns="0" rIns="0" tIns="0" bIns="0" anchor="t">
-            <a:spAutoFit/>
-          </a:bodyPr>
-          <a:lstStyle/>
-          <a:p>
-            <a:pPr algn="l"/>
-            <a:r>
-              <a:rPr sz="1050" b="0" i="0">
+            <a:off x="13651992" y="6373368"/>
+            <a:ext cx="3483863" cy="914400"/>
+          </a:xfrm>
+          <a:prstGeom prst="rect">
+            <a:avLst/>
+          </a:prstGeom>
+          <a:noFill/>
+        </p:spPr>
+        <p:txBody>
+          <a:bodyPr wrap="square" lIns="0" rIns="0" tIns="0" bIns="0" anchor="t">
+            <a:spAutoFit/>
+          </a:bodyPr>
+          <a:lstStyle/>
+          <a:p>
+            <a:pPr algn="l"/>
+            <a:r>
+              <a:rPr sz="950" b="0" i="0">
                 <a:solidFill>
                   <a:srgbClr val="4B5563"/>
                 </a:solidFill>
@@ -7576,8 +13588,8 @@
         </p:nvSpPr>
         <p:spPr>
           <a:xfrm>
-            <a:off x="12033504" y="7955279"/>
-            <a:ext cx="5330952" cy="1737360"/>
+            <a:off x="914400" y="7580376"/>
+            <a:ext cx="3941063" cy="1691640"/>
           </a:xfrm>
           <a:prstGeom prst="roundRect">
             <a:avLst>
@@ -7622,23 +13634,23 @@
         </p:nvSpPr>
         <p:spPr>
           <a:xfrm>
-            <a:off x="12307824" y="8119871"/>
-            <a:ext cx="822960" cy="365760"/>
-          </a:xfrm>
-          <a:prstGeom prst="rect">
-            <a:avLst/>
-          </a:prstGeom>
-          <a:noFill/>
-        </p:spPr>
-        <p:txBody>
-          <a:bodyPr wrap="square" lIns="0" rIns="0" tIns="0" bIns="0" anchor="t">
-            <a:spAutoFit/>
-          </a:bodyPr>
-          <a:lstStyle/>
-          <a:p>
-            <a:pPr algn="l"/>
-            <a:r>
-              <a:rPr sz="1800" b="0" i="0">
+            <a:off x="1143000" y="7717536"/>
+            <a:ext cx="685800" cy="320040"/>
+          </a:xfrm>
+          <a:prstGeom prst="rect">
+            <a:avLst/>
+          </a:prstGeom>
+          <a:noFill/>
+        </p:spPr>
+        <p:txBody>
+          <a:bodyPr wrap="square" lIns="0" rIns="0" tIns="0" bIns="0" anchor="t">
+            <a:spAutoFit/>
+          </a:bodyPr>
+          <a:lstStyle/>
+          <a:p>
+            <a:pPr algn="l"/>
+            <a:r>
+              <a:rPr sz="1500" b="0" i="0">
                 <a:solidFill>
                   <a:srgbClr val="FF8449"/>
                 </a:solidFill>
@@ -7657,23 +13669,23 @@
         </p:nvSpPr>
         <p:spPr>
           <a:xfrm>
-            <a:off x="13039344" y="8138159"/>
-            <a:ext cx="4050791" cy="457200"/>
-          </a:xfrm>
-          <a:prstGeom prst="rect">
-            <a:avLst/>
-          </a:prstGeom>
-          <a:noFill/>
-        </p:spPr>
-        <p:txBody>
-          <a:bodyPr wrap="square" lIns="0" rIns="0" tIns="0" bIns="0" anchor="t">
-            <a:spAutoFit/>
-          </a:bodyPr>
-          <a:lstStyle/>
-          <a:p>
-            <a:pPr algn="l"/>
-            <a:r>
-              <a:rPr sz="1400" b="0" i="0">
+            <a:off x="1783080" y="7735824"/>
+            <a:ext cx="2843783" cy="411480"/>
+          </a:xfrm>
+          <a:prstGeom prst="rect">
+            <a:avLst/>
+          </a:prstGeom>
+          <a:noFill/>
+        </p:spPr>
+        <p:txBody>
+          <a:bodyPr wrap="square" lIns="0" rIns="0" tIns="0" bIns="0" anchor="t">
+            <a:spAutoFit/>
+          </a:bodyPr>
+          <a:lstStyle/>
+          <a:p>
+            <a:pPr algn="l"/>
+            <a:r>
+              <a:rPr sz="1200" b="0" i="0">
                 <a:solidFill>
                   <a:srgbClr val="000000"/>
                 </a:solidFill>
@@ -7692,23 +13704,23 @@
         </p:nvSpPr>
         <p:spPr>
           <a:xfrm>
-            <a:off x="12307824" y="8732519"/>
-            <a:ext cx="4782312" cy="822959"/>
-          </a:xfrm>
-          <a:prstGeom prst="rect">
-            <a:avLst/>
-          </a:prstGeom>
-          <a:noFill/>
-        </p:spPr>
-        <p:txBody>
-          <a:bodyPr wrap="square" lIns="0" rIns="0" tIns="0" bIns="0" anchor="t">
-            <a:spAutoFit/>
-          </a:bodyPr>
-          <a:lstStyle/>
-          <a:p>
-            <a:pPr algn="l"/>
-            <a:r>
-              <a:rPr sz="1050" b="0" i="0">
+            <a:off x="1143000" y="8266176"/>
+            <a:ext cx="3483863" cy="914400"/>
+          </a:xfrm>
+          <a:prstGeom prst="rect">
+            <a:avLst/>
+          </a:prstGeom>
+          <a:noFill/>
+        </p:spPr>
+        <p:txBody>
+          <a:bodyPr wrap="square" lIns="0" rIns="0" tIns="0" bIns="0" anchor="t">
+            <a:spAutoFit/>
+          </a:bodyPr>
+          <a:lstStyle/>
+          <a:p>
+            <a:pPr algn="l"/>
+            <a:r>
+              <a:rPr sz="950" b="0" i="0">
                 <a:solidFill>
                   <a:srgbClr val="4B5563"/>
                 </a:solidFill>
@@ -7721,7 +13733,460 @@
       </p:sp>
       <p:sp>
         <p:nvSpPr>
-          <p:cNvPr id="41" name="TextBox 40"/>
+          <p:cNvPr id="41" name="Rounded Rectangle 40"/>
+          <p:cNvSpPr/>
+          <p:nvPr/>
+        </p:nvSpPr>
+        <p:spPr>
+          <a:xfrm>
+            <a:off x="5084064" y="7580376"/>
+            <a:ext cx="3941063" cy="1691640"/>
+          </a:xfrm>
+          <a:prstGeom prst="roundRect">
+            <a:avLst>
+              <a:gd name="adj" fmla="val 4000"/>
+            </a:avLst>
+          </a:prstGeom>
+          <a:solidFill>
+            <a:srgbClr val="FFFFFF"/>
+          </a:solidFill>
+          <a:ln>
+            <a:noFill/>
+          </a:ln>
+          <a:effectLst/>
+        </p:spPr>
+        <p:style>
+          <a:lnRef idx="1">
+            <a:schemeClr val="accent1"/>
+          </a:lnRef>
+          <a:fillRef idx="3">
+            <a:schemeClr val="accent1"/>
+          </a:fillRef>
+          <a:effectRef idx="2">
+            <a:schemeClr val="accent1"/>
+          </a:effectRef>
+          <a:fontRef idx="minor">
+            <a:schemeClr val="lt1"/>
+          </a:fontRef>
+        </p:style>
+        <p:txBody>
+          <a:bodyPr rtlCol="0" anchor="ctr"/>
+          <a:lstStyle/>
+          <a:p>
+            <a:pPr algn="ctr"/>
+          </a:p>
+        </p:txBody>
+      </p:sp>
+      <p:sp>
+        <p:nvSpPr>
+          <p:cNvPr id="42" name="TextBox 41"/>
+          <p:cNvSpPr txBox="1"/>
+          <p:nvPr/>
+        </p:nvSpPr>
+        <p:spPr>
+          <a:xfrm>
+            <a:off x="5312664" y="7717536"/>
+            <a:ext cx="685800" cy="320040"/>
+          </a:xfrm>
+          <a:prstGeom prst="rect">
+            <a:avLst/>
+          </a:prstGeom>
+          <a:noFill/>
+        </p:spPr>
+        <p:txBody>
+          <a:bodyPr wrap="square" lIns="0" rIns="0" tIns="0" bIns="0" anchor="t">
+            <a:spAutoFit/>
+          </a:bodyPr>
+          <a:lstStyle/>
+          <a:p>
+            <a:pPr algn="l"/>
+            <a:r>
+              <a:rPr sz="1500" b="0" i="0">
+                <a:solidFill>
+                  <a:srgbClr val="FF8449"/>
+                </a:solidFill>
+                <a:latin typeface="Georgia"/>
+              </a:rPr>
+              <a:t>10</a:t>
+            </a:r>
+          </a:p>
+        </p:txBody>
+      </p:sp>
+      <p:sp>
+        <p:nvSpPr>
+          <p:cNvPr id="43" name="TextBox 42"/>
+          <p:cNvSpPr txBox="1"/>
+          <p:nvPr/>
+        </p:nvSpPr>
+        <p:spPr>
+          <a:xfrm>
+            <a:off x="5952744" y="7735824"/>
+            <a:ext cx="2843783" cy="411480"/>
+          </a:xfrm>
+          <a:prstGeom prst="rect">
+            <a:avLst/>
+          </a:prstGeom>
+          <a:noFill/>
+        </p:spPr>
+        <p:txBody>
+          <a:bodyPr wrap="square" lIns="0" rIns="0" tIns="0" bIns="0" anchor="t">
+            <a:spAutoFit/>
+          </a:bodyPr>
+          <a:lstStyle/>
+          <a:p>
+            <a:pPr algn="l"/>
+            <a:r>
+              <a:rPr sz="1200" b="0" i="0">
+                <a:solidFill>
+                  <a:srgbClr val="000000"/>
+                </a:solidFill>
+                <a:latin typeface="Georgia"/>
+              </a:rPr>
+              <a:t>Conteúdo &amp; redes sociais</a:t>
+            </a:r>
+          </a:p>
+        </p:txBody>
+      </p:sp>
+      <p:sp>
+        <p:nvSpPr>
+          <p:cNvPr id="44" name="TextBox 43"/>
+          <p:cNvSpPr txBox="1"/>
+          <p:nvPr/>
+        </p:nvSpPr>
+        <p:spPr>
+          <a:xfrm>
+            <a:off x="5312664" y="8266176"/>
+            <a:ext cx="3483863" cy="914400"/>
+          </a:xfrm>
+          <a:prstGeom prst="rect">
+            <a:avLst/>
+          </a:prstGeom>
+          <a:noFill/>
+        </p:spPr>
+        <p:txBody>
+          <a:bodyPr wrap="square" lIns="0" rIns="0" tIns="0" bIns="0" anchor="t">
+            <a:spAutoFit/>
+          </a:bodyPr>
+          <a:lstStyle/>
+          <a:p>
+            <a:pPr algn="l"/>
+            <a:r>
+              <a:rPr sz="950" b="0" i="0">
+                <a:solidFill>
+                  <a:srgbClr val="4B5563"/>
+                </a:solidFill>
+                <a:latin typeface="Calibri"/>
+              </a:rPr>
+              <a:t>Pesquisa → drafts → aprovação → publicação automática → engagement volta.</a:t>
+            </a:r>
+          </a:p>
+        </p:txBody>
+      </p:sp>
+      <p:sp>
+        <p:nvSpPr>
+          <p:cNvPr id="45" name="Rounded Rectangle 44"/>
+          <p:cNvSpPr/>
+          <p:nvPr/>
+        </p:nvSpPr>
+        <p:spPr>
+          <a:xfrm>
+            <a:off x="9253728" y="7580376"/>
+            <a:ext cx="3941063" cy="1691640"/>
+          </a:xfrm>
+          <a:prstGeom prst="roundRect">
+            <a:avLst>
+              <a:gd name="adj" fmla="val 4000"/>
+            </a:avLst>
+          </a:prstGeom>
+          <a:solidFill>
+            <a:srgbClr val="FFFFFF"/>
+          </a:solidFill>
+          <a:ln>
+            <a:noFill/>
+          </a:ln>
+          <a:effectLst/>
+        </p:spPr>
+        <p:style>
+          <a:lnRef idx="1">
+            <a:schemeClr val="accent1"/>
+          </a:lnRef>
+          <a:fillRef idx="3">
+            <a:schemeClr val="accent1"/>
+          </a:fillRef>
+          <a:effectRef idx="2">
+            <a:schemeClr val="accent1"/>
+          </a:effectRef>
+          <a:fontRef idx="minor">
+            <a:schemeClr val="lt1"/>
+          </a:fontRef>
+        </p:style>
+        <p:txBody>
+          <a:bodyPr rtlCol="0" anchor="ctr"/>
+          <a:lstStyle/>
+          <a:p>
+            <a:pPr algn="ctr"/>
+          </a:p>
+        </p:txBody>
+      </p:sp>
+      <p:sp>
+        <p:nvSpPr>
+          <p:cNvPr id="46" name="TextBox 45"/>
+          <p:cNvSpPr txBox="1"/>
+          <p:nvPr/>
+        </p:nvSpPr>
+        <p:spPr>
+          <a:xfrm>
+            <a:off x="9482328" y="7717536"/>
+            <a:ext cx="685800" cy="320040"/>
+          </a:xfrm>
+          <a:prstGeom prst="rect">
+            <a:avLst/>
+          </a:prstGeom>
+          <a:noFill/>
+        </p:spPr>
+        <p:txBody>
+          <a:bodyPr wrap="square" lIns="0" rIns="0" tIns="0" bIns="0" anchor="t">
+            <a:spAutoFit/>
+          </a:bodyPr>
+          <a:lstStyle/>
+          <a:p>
+            <a:pPr algn="l"/>
+            <a:r>
+              <a:rPr sz="1500" b="0" i="0">
+                <a:solidFill>
+                  <a:srgbClr val="FF8449"/>
+                </a:solidFill>
+                <a:latin typeface="Georgia"/>
+              </a:rPr>
+              <a:t>11</a:t>
+            </a:r>
+          </a:p>
+        </p:txBody>
+      </p:sp>
+      <p:sp>
+        <p:nvSpPr>
+          <p:cNvPr id="47" name="TextBox 46"/>
+          <p:cNvSpPr txBox="1"/>
+          <p:nvPr/>
+        </p:nvSpPr>
+        <p:spPr>
+          <a:xfrm>
+            <a:off x="10122407" y="7735824"/>
+            <a:ext cx="2843783" cy="411480"/>
+          </a:xfrm>
+          <a:prstGeom prst="rect">
+            <a:avLst/>
+          </a:prstGeom>
+          <a:noFill/>
+        </p:spPr>
+        <p:txBody>
+          <a:bodyPr wrap="square" lIns="0" rIns="0" tIns="0" bIns="0" anchor="t">
+            <a:spAutoFit/>
+          </a:bodyPr>
+          <a:lstStyle/>
+          <a:p>
+            <a:pPr algn="l"/>
+            <a:r>
+              <a:rPr sz="1200" b="0" i="0">
+                <a:solidFill>
+                  <a:srgbClr val="000000"/>
+                </a:solidFill>
+                <a:latin typeface="Georgia"/>
+              </a:rPr>
+              <a:t>Anúncios Google + Meta</a:t>
+            </a:r>
+          </a:p>
+        </p:txBody>
+      </p:sp>
+      <p:sp>
+        <p:nvSpPr>
+          <p:cNvPr id="48" name="TextBox 47"/>
+          <p:cNvSpPr txBox="1"/>
+          <p:nvPr/>
+        </p:nvSpPr>
+        <p:spPr>
+          <a:xfrm>
+            <a:off x="9482328" y="8266176"/>
+            <a:ext cx="3483863" cy="914400"/>
+          </a:xfrm>
+          <a:prstGeom prst="rect">
+            <a:avLst/>
+          </a:prstGeom>
+          <a:noFill/>
+        </p:spPr>
+        <p:txBody>
+          <a:bodyPr wrap="square" lIns="0" rIns="0" tIns="0" bIns="0" anchor="t">
+            <a:spAutoFit/>
+          </a:bodyPr>
+          <a:lstStyle/>
+          <a:p>
+            <a:pPr algn="l"/>
+            <a:r>
+              <a:rPr sz="950" b="0" i="0">
+                <a:solidFill>
+                  <a:srgbClr val="4B5563"/>
+                </a:solidFill>
+                <a:latin typeface="Calibri"/>
+              </a:rPr>
+              <a:t>Cowork propõe → Sara aprova → Code publica + afina diariamente → relatório semanal.</a:t>
+            </a:r>
+          </a:p>
+        </p:txBody>
+      </p:sp>
+      <p:sp>
+        <p:nvSpPr>
+          <p:cNvPr id="49" name="Rounded Rectangle 48"/>
+          <p:cNvSpPr/>
+          <p:nvPr/>
+        </p:nvSpPr>
+        <p:spPr>
+          <a:xfrm>
+            <a:off x="13423392" y="7580376"/>
+            <a:ext cx="3941063" cy="1691640"/>
+          </a:xfrm>
+          <a:prstGeom prst="roundRect">
+            <a:avLst>
+              <a:gd name="adj" fmla="val 4000"/>
+            </a:avLst>
+          </a:prstGeom>
+          <a:solidFill>
+            <a:srgbClr val="FFFFFF"/>
+          </a:solidFill>
+          <a:ln>
+            <a:noFill/>
+          </a:ln>
+          <a:effectLst/>
+        </p:spPr>
+        <p:style>
+          <a:lnRef idx="1">
+            <a:schemeClr val="accent1"/>
+          </a:lnRef>
+          <a:fillRef idx="3">
+            <a:schemeClr val="accent1"/>
+          </a:fillRef>
+          <a:effectRef idx="2">
+            <a:schemeClr val="accent1"/>
+          </a:effectRef>
+          <a:fontRef idx="minor">
+            <a:schemeClr val="lt1"/>
+          </a:fontRef>
+        </p:style>
+        <p:txBody>
+          <a:bodyPr rtlCol="0" anchor="ctr"/>
+          <a:lstStyle/>
+          <a:p>
+            <a:pPr algn="ctr"/>
+          </a:p>
+        </p:txBody>
+      </p:sp>
+      <p:sp>
+        <p:nvSpPr>
+          <p:cNvPr id="50" name="TextBox 49"/>
+          <p:cNvSpPr txBox="1"/>
+          <p:nvPr/>
+        </p:nvSpPr>
+        <p:spPr>
+          <a:xfrm>
+            <a:off x="13651992" y="7717536"/>
+            <a:ext cx="685800" cy="320040"/>
+          </a:xfrm>
+          <a:prstGeom prst="rect">
+            <a:avLst/>
+          </a:prstGeom>
+          <a:noFill/>
+        </p:spPr>
+        <p:txBody>
+          <a:bodyPr wrap="square" lIns="0" rIns="0" tIns="0" bIns="0" anchor="t">
+            <a:spAutoFit/>
+          </a:bodyPr>
+          <a:lstStyle/>
+          <a:p>
+            <a:pPr algn="l"/>
+            <a:r>
+              <a:rPr sz="1500" b="0" i="0">
+                <a:solidFill>
+                  <a:srgbClr val="FF8449"/>
+                </a:solidFill>
+                <a:latin typeface="Georgia"/>
+              </a:rPr>
+              <a:t>12</a:t>
+            </a:r>
+          </a:p>
+        </p:txBody>
+      </p:sp>
+      <p:sp>
+        <p:nvSpPr>
+          <p:cNvPr id="51" name="TextBox 50"/>
+          <p:cNvSpPr txBox="1"/>
+          <p:nvPr/>
+        </p:nvSpPr>
+        <p:spPr>
+          <a:xfrm>
+            <a:off x="14292072" y="7735824"/>
+            <a:ext cx="2843783" cy="411480"/>
+          </a:xfrm>
+          <a:prstGeom prst="rect">
+            <a:avLst/>
+          </a:prstGeom>
+          <a:noFill/>
+        </p:spPr>
+        <p:txBody>
+          <a:bodyPr wrap="square" lIns="0" rIns="0" tIns="0" bIns="0" anchor="t">
+            <a:spAutoFit/>
+          </a:bodyPr>
+          <a:lstStyle/>
+          <a:p>
+            <a:pPr algn="l"/>
+            <a:r>
+              <a:rPr sz="1200" b="0" i="0">
+                <a:solidFill>
+                  <a:srgbClr val="000000"/>
+                </a:solidFill>
+                <a:latin typeface="Georgia"/>
+              </a:rPr>
+              <a:t>Website novo + manutenção</a:t>
+            </a:r>
+          </a:p>
+        </p:txBody>
+      </p:sp>
+      <p:sp>
+        <p:nvSpPr>
+          <p:cNvPr id="52" name="TextBox 51"/>
+          <p:cNvSpPr txBox="1"/>
+          <p:nvPr/>
+        </p:nvSpPr>
+        <p:spPr>
+          <a:xfrm>
+            <a:off x="13651992" y="8266176"/>
+            <a:ext cx="3483863" cy="914400"/>
+          </a:xfrm>
+          <a:prstGeom prst="rect">
+            <a:avLst/>
+          </a:prstGeom>
+          <a:noFill/>
+        </p:spPr>
+        <p:txBody>
+          <a:bodyPr wrap="square" lIns="0" rIns="0" tIns="0" bIns="0" anchor="t">
+            <a:spAutoFit/>
+          </a:bodyPr>
+          <a:lstStyle/>
+          <a:p>
+            <a:pPr algn="l"/>
+            <a:r>
+              <a:rPr sz="950" b="0" i="0">
+                <a:solidFill>
+                  <a:srgbClr val="4B5563"/>
+                </a:solidFill>
+                <a:latin typeface="Calibri"/>
+              </a:rPr>
+              <a:t>Sara descreve → Cowork redige → staging → aprova → publicado e logged.</a:t>
+            </a:r>
+          </a:p>
+        </p:txBody>
+      </p:sp>
+      <p:sp>
+        <p:nvSpPr>
+          <p:cNvPr id="53" name="TextBox 52"/>
           <p:cNvSpPr txBox="1"/>
           <p:nvPr/>
         </p:nvSpPr>
@@ -7756,7 +14221,7 @@
       </p:sp>
       <p:sp>
         <p:nvSpPr>
-          <p:cNvPr id="42" name="TextBox 41"/>
+          <p:cNvPr id="54" name="TextBox 53"/>
           <p:cNvSpPr txBox="1"/>
           <p:nvPr/>
         </p:nvSpPr>
@@ -7791,7 +14256,7 @@
       </p:sp>
       <p:sp>
         <p:nvSpPr>
-          <p:cNvPr id="43" name="TextBox 42"/>
+          <p:cNvPr id="55" name="TextBox 54"/>
           <p:cNvSpPr txBox="1"/>
           <p:nvPr/>
         </p:nvSpPr>
@@ -7819,14 +14284,14 @@
                 </a:solidFill>
                 <a:latin typeface="Calibri"/>
               </a:rPr>
-              <a:t>11 / 11</a:t>
-            </a:r>
-          </a:p>
-        </p:txBody>
-      </p:sp>
-      <p:sp>
-        <p:nvSpPr>
-          <p:cNvPr id="44" name="TextBox 43"/>
+              <a:t>14 / 14</a:t>
+            </a:r>
+          </a:p>
+        </p:txBody>
+      </p:sp>
+      <p:sp>
+        <p:nvSpPr>
+          <p:cNvPr id="56" name="TextBox 55"/>
           <p:cNvSpPr txBox="1"/>
           <p:nvPr/>
         </p:nvSpPr>
@@ -9717,7 +16182,7 @@
                 </a:solidFill>
                 <a:latin typeface="Calibri"/>
               </a:rPr>
-              <a:t>02 / 11</a:t>
+              <a:t>02 / 14</a:t>
             </a:r>
           </a:p>
         </p:txBody>
@@ -11615,7 +18080,7 @@
                 </a:solidFill>
                 <a:latin typeface="Calibri"/>
               </a:rPr>
-              <a:t>03 / 11</a:t>
+              <a:t>03 / 14</a:t>
             </a:r>
           </a:p>
         </p:txBody>
@@ -13513,7 +19978,7 @@
                 </a:solidFill>
                 <a:latin typeface="Calibri"/>
               </a:rPr>
-              <a:t>04 / 11</a:t>
+              <a:t>04 / 14</a:t>
             </a:r>
           </a:p>
         </p:txBody>
@@ -15411,7 +21876,7 @@
                 </a:solidFill>
                 <a:latin typeface="Calibri"/>
               </a:rPr>
-              <a:t>05 / 11</a:t>
+              <a:t>05 / 14</a:t>
             </a:r>
           </a:p>
         </p:txBody>
@@ -15542,7 +22007,7 @@
                 </a:solidFill>
                 <a:latin typeface="Georgia"/>
               </a:rPr>
-              <a:t>Como um pacote de tratamento é seguido do início ao fim.</a:t>
+              <a:t>Como um pacote é confirmado pelo paciente, sessão a sessão.</a:t>
             </a:r>
           </a:p>
         </p:txBody>
@@ -15577,7 +22042,7 @@
                 </a:solidFill>
                 <a:latin typeface="Georgia"/>
               </a:rPr>
-              <a:t>Substituição do controlo em papel: cada sessão registada e confirmada. Code processa o evento de «sessão concluída» em segundos e dispara recordatórios precisos.</a:t>
+              <a:t>Substitui o cartão de carimbos. Paciente confirma a presença num formulário simples; o CRM atualiza sozinho. Equipa só intervém se o paciente não confirmar — fallback, não fluxo principal.</a:t>
             </a:r>
           </a:p>
         </p:txBody>
@@ -15774,7 +22239,7 @@
                 </a:solidFill>
                 <a:latin typeface="Georgia"/>
               </a:rPr>
-              <a:t>Pacote criado</a:t>
+              <a:t>Consulta termina</a:t>
             </a:r>
           </a:p>
         </p:txBody>
@@ -15844,7 +22309,7 @@
                 </a:solidFill>
                 <a:latin typeface="Calibri"/>
               </a:rPr>
-              <a:t>Paciente X com pacote de 4 sessões de laser. O sistema regista total, datas, intervalos.</a:t>
+              <a:t>Plataforma de marcações regista a consulta como concluída. Code daemon recebe o evento em segundos.</a:t>
             </a:r>
           </a:p>
         </p:txBody>
@@ -15879,7 +22344,7 @@
                 </a:solidFill>
                 <a:latin typeface="Calibri"/>
               </a:rPr>
-              <a:t>SETUP</a:t>
+              <a:t>TRIGGER</a:t>
             </a:r>
           </a:p>
         </p:txBody>
@@ -16039,7 +22504,7 @@
                 </a:solidFill>
                 <a:latin typeface="Georgia"/>
               </a:rPr>
-              <a:t>Sessão concluída</a:t>
+              <a:t>Envia formulário</a:t>
             </a:r>
           </a:p>
         </p:txBody>
@@ -16109,7 +22574,7 @@
                 </a:solidFill>
                 <a:latin typeface="Calibri"/>
               </a:rPr>
-              <a:t>Equipa marca em 1 clique (CRM, app ou WhatsApp ao Claude). Contador atualiza.</a:t>
+              <a:t>Paciente recebe um link curto (SMS, email ou WhatsApp conforme preferência): «Confirma a sessão 2 de 4 de hoje?»</a:t>
             </a:r>
           </a:p>
         </p:txBody>
@@ -16144,7 +22609,7 @@
                 </a:solidFill>
                 <a:latin typeface="Calibri"/>
               </a:rPr>
-              <a:t>MARK</a:t>
+              <a:t>SEND</a:t>
             </a:r>
           </a:p>
         </p:txBody>
@@ -16304,7 +22769,7 @@
                 </a:solidFill>
                 <a:latin typeface="Georgia"/>
               </a:rPr>
-              <a:t>Confirma ao paciente</a:t>
+              <a:t>Paciente tica a caixa</a:t>
             </a:r>
           </a:p>
         </p:txBody>
@@ -16374,7 +22839,7 @@
                 </a:solidFill>
                 <a:latin typeface="Calibri"/>
               </a:rPr>
-              <a:t>«Sessão 1 de 4 concluída. Próxima entre X e Y. Falta 1 sessão para concluir o pacote.»</a:t>
+              <a:t>Formulário com uma pergunta e um botão. Submete em segundos — equivalente digital do carimbo no cartão.</a:t>
             </a:r>
           </a:p>
         </p:txBody>
@@ -16569,7 +23034,7 @@
                 </a:solidFill>
                 <a:latin typeface="Georgia"/>
               </a:rPr>
-              <a:t>Nudge a meio do pacote</a:t>
+              <a:t>Comprovativo de volta</a:t>
             </a:r>
           </a:p>
         </p:txBody>
@@ -16639,7 +23104,7 @@
                 </a:solidFill>
                 <a:latin typeface="Calibri"/>
               </a:rPr>
-              <a:t>Quando faltam X sessões → recordatório. Quando falta 1 → oferta de marcação proativa.</a:t>
+              <a:t>«Sessão 2 de 4 confirmada. Próxima recomendada entre X e Y. Faltam 2 sessões.» Fica no histórico do paciente.</a:t>
             </a:r>
           </a:p>
         </p:txBody>
@@ -16674,7 +23139,7 @@
                 </a:solidFill>
                 <a:latin typeface="Calibri"/>
               </a:rPr>
-              <a:t>NUDGE</a:t>
+              <a:t>RECEIPT</a:t>
             </a:r>
           </a:p>
         </p:txBody>
@@ -16834,7 +23299,7 @@
                 </a:solidFill>
                 <a:latin typeface="Georgia"/>
               </a:rPr>
-              <a:t>Pacote termina</a:t>
+              <a:t>CRM atualiza sozinho</a:t>
             </a:r>
           </a:p>
         </p:txBody>
@@ -16904,7 +23369,7 @@
                 </a:solidFill>
                 <a:latin typeface="Calibri"/>
               </a:rPr>
-              <a:t>Confirmação final + handoff para a sugestão da Prioridade 2: manutenção? Novo pacote?</a:t>
+              <a:t>Contador do pacote sobe. Code regista a confirmação na Brain com timestamp e canal. Aciona o próximo recordatório.</a:t>
             </a:r>
           </a:p>
         </p:txBody>
@@ -16939,7 +23404,7 @@
                 </a:solidFill>
                 <a:latin typeface="Calibri"/>
               </a:rPr>
-              <a:t>CLOSE</a:t>
+              <a:t>UPDATE</a:t>
             </a:r>
           </a:p>
         </p:txBody>
@@ -17099,7 +23564,7 @@
                 </a:solidFill>
                 <a:latin typeface="Georgia"/>
               </a:rPr>
-              <a:t>Relatório semanal</a:t>
+              <a:t>Fallback à equipa</a:t>
             </a:r>
           </a:p>
         </p:txBody>
@@ -17169,7 +23634,7 @@
                 </a:solidFill>
                 <a:latin typeface="Calibri"/>
               </a:rPr>
-              <a:t>Sara vê pacotes ativos, próximos a concluir, em risco de abandono, expirados.</a:t>
+              <a:t>Se em X horas o paciente não confirmou, Cowork mostra à equipa uma fila de «por confirmar» — 1 clique para marcar manualmente.</a:t>
             </a:r>
           </a:p>
         </p:txBody>
@@ -17204,7 +23669,7 @@
                 </a:solidFill>
                 <a:latin typeface="Calibri"/>
               </a:rPr>
-              <a:t>REPORT</a:t>
+              <a:t>FALLBACK</a:t>
             </a:r>
           </a:p>
         </p:txBody>
@@ -17239,7 +23704,7 @@
                 </a:solidFill>
                 <a:latin typeface="Georgia"/>
               </a:rPr>
-              <a:t>Pacotes deixam de morrer por esquecimento — a taxa de conclusão sobe sem trabalho extra.</a:t>
+              <a:t>Mantém o ritual do cartão (paciente confirma, recebe comprovativo), mas em digital. A equipa só intervém para os pacientes que não usam o canal.</a:t>
             </a:r>
           </a:p>
         </p:txBody>
@@ -17309,7 +23774,7 @@
                 </a:solidFill>
                 <a:latin typeface="Calibri"/>
               </a:rPr>
-              <a:t>06 / 11</a:t>
+              <a:t>06 / 14</a:t>
             </a:r>
           </a:p>
         </p:txBody>
@@ -19207,7 +25672,7 @@
                 </a:solidFill>
                 <a:latin typeface="Calibri"/>
               </a:rPr>
-              <a:t>07 / 11</a:t>
+              <a:t>07 / 14</a:t>
             </a:r>
           </a:p>
         </p:txBody>
@@ -21105,7 +27570,7 @@
                 </a:solidFill>
                 <a:latin typeface="Calibri"/>
               </a:rPr>
-              <a:t>08 / 11</a:t>
+              <a:t>08 / 14</a:t>
             </a:r>
           </a:p>
         </p:txBody>
@@ -23003,7 +29468,7 @@
                 </a:solidFill>
                 <a:latin typeface="Calibri"/>
               </a:rPr>
-              <a:t>09 / 11</a:t>
+              <a:t>09 / 14</a:t>
             </a:r>
           </a:p>
         </p:txBody>
